--- a/media/exports/reports/2026-10/job-margins.pptx
+++ b/media/exports/reports/2026-10/job-margins.pptx
@@ -8057,7 +8057,7 @@
         <p:spPr>
           <a:xfrm>
             <a:off x="457200" y="1645920"/>
-            <a:ext cx="11277295" cy="2011680"/>
+            <a:ext cx="3576218" cy="2011680"/>
           </a:xfrm>
           <a:prstGeom prst="rect">
             <a:avLst/>
@@ -8102,7 +8102,7 @@
         <p:spPr>
           <a:xfrm>
             <a:off x="640080" y="1783080"/>
-            <a:ext cx="10911535" cy="457200"/>
+            <a:ext cx="3210458" cy="457200"/>
           </a:xfrm>
           <a:prstGeom prst="rect">
             <a:avLst/>
@@ -8136,7 +8136,7 @@
         <p:spPr>
           <a:xfrm>
             <a:off x="640080" y="2240280"/>
-            <a:ext cx="10911535" cy="731520"/>
+            <a:ext cx="3210458" cy="731520"/>
           </a:xfrm>
           <a:prstGeom prst="rect">
             <a:avLst/>
@@ -8170,7 +8170,7 @@
         <p:spPr>
           <a:xfrm>
             <a:off x="640080" y="3017520"/>
-            <a:ext cx="10911535" cy="548640"/>
+            <a:ext cx="3210458" cy="548640"/>
           </a:xfrm>
           <a:prstGeom prst="rect">
             <a:avLst/>
@@ -8197,7 +8197,301 @@
       </p:sp>
       <p:sp>
         <p:nvSpPr>
-          <p:cNvPr id="9" name="TextBox 8"/>
+          <p:cNvPr id="9" name="Rectangle 8"/>
+          <p:cNvSpPr/>
+          <p:nvPr/>
+        </p:nvSpPr>
+        <p:spPr>
+          <a:xfrm>
+            <a:off x="4307738" y="1645920"/>
+            <a:ext cx="3576218" cy="2011680"/>
+          </a:xfrm>
+          <a:prstGeom prst="rect">
+            <a:avLst/>
+          </a:prstGeom>
+          <a:solidFill>
+            <a:srgbClr val="F7FAF7"/>
+          </a:solidFill>
+          <a:ln>
+            <a:solidFill>
+              <a:srgbClr val="DCE8DC"/>
+            </a:solidFill>
+          </a:ln>
+        </p:spPr>
+        <p:style>
+          <a:lnRef idx="1">
+            <a:schemeClr val="accent1"/>
+          </a:lnRef>
+          <a:fillRef idx="3">
+            <a:schemeClr val="accent1"/>
+          </a:fillRef>
+          <a:effectRef idx="2">
+            <a:schemeClr val="accent1"/>
+          </a:effectRef>
+          <a:fontRef idx="minor">
+            <a:schemeClr val="lt1"/>
+          </a:fontRef>
+        </p:style>
+        <p:txBody>
+          <a:bodyPr rtlCol="0" anchor="ctr"/>
+          <a:lstStyle/>
+          <a:p>
+            <a:pPr algn="ctr"/>
+          </a:p>
+        </p:txBody>
+      </p:sp>
+      <p:sp>
+        <p:nvSpPr>
+          <p:cNvPr id="10" name="TextBox 9"/>
+          <p:cNvSpPr txBox="1"/>
+          <p:nvPr/>
+        </p:nvSpPr>
+        <p:spPr>
+          <a:xfrm>
+            <a:off x="4490618" y="1783080"/>
+            <a:ext cx="3210458" cy="457200"/>
+          </a:xfrm>
+          <a:prstGeom prst="rect">
+            <a:avLst/>
+          </a:prstGeom>
+          <a:noFill/>
+        </p:spPr>
+        <p:txBody>
+          <a:bodyPr wrap="square">
+            <a:spAutoFit/>
+          </a:bodyPr>
+          <a:lstStyle/>
+          <a:p>
+            <a:r>
+              <a:rPr sz="1200" b="0">
+                <a:solidFill>
+                  <a:srgbClr val="5F6F63"/>
+                </a:solidFill>
+                <a:latin typeface="Arial"/>
+              </a:rPr>
+              <a:t>Technician time charged, October so far</a:t>
+            </a:r>
+          </a:p>
+        </p:txBody>
+      </p:sp>
+      <p:sp>
+        <p:nvSpPr>
+          <p:cNvPr id="11" name="TextBox 10"/>
+          <p:cNvSpPr txBox="1"/>
+          <p:nvPr/>
+        </p:nvSpPr>
+        <p:spPr>
+          <a:xfrm>
+            <a:off x="4490618" y="2240280"/>
+            <a:ext cx="3210458" cy="731520"/>
+          </a:xfrm>
+          <a:prstGeom prst="rect">
+            <a:avLst/>
+          </a:prstGeom>
+          <a:noFill/>
+        </p:spPr>
+        <p:txBody>
+          <a:bodyPr wrap="square">
+            <a:spAutoFit/>
+          </a:bodyPr>
+          <a:lstStyle/>
+          <a:p>
+            <a:r>
+              <a:rPr sz="3000" b="1">
+                <a:solidFill>
+                  <a:srgbClr val="2F7A5D"/>
+                </a:solidFill>
+                <a:latin typeface="Arial"/>
+              </a:rPr>
+              <a:t>$2,465</a:t>
+            </a:r>
+          </a:p>
+        </p:txBody>
+      </p:sp>
+      <p:sp>
+        <p:nvSpPr>
+          <p:cNvPr id="12" name="TextBox 11"/>
+          <p:cNvSpPr txBox="1"/>
+          <p:nvPr/>
+        </p:nvSpPr>
+        <p:spPr>
+          <a:xfrm>
+            <a:off x="4490618" y="3017520"/>
+            <a:ext cx="3210458" cy="548640"/>
+          </a:xfrm>
+          <a:prstGeom prst="rect">
+            <a:avLst/>
+          </a:prstGeom>
+          <a:noFill/>
+        </p:spPr>
+        <p:txBody>
+          <a:bodyPr wrap="square">
+            <a:spAutoFit/>
+          </a:bodyPr>
+          <a:lstStyle/>
+          <a:p>
+            <a:r>
+              <a:rPr sz="1100" b="0">
+                <a:solidFill>
+                  <a:srgbClr val="5F6F63"/>
+                </a:solidFill>
+                <a:latin typeface="Arial"/>
+              </a:rPr>
+              <a:t>73.0% of call-out revenue</a:t>
+            </a:r>
+          </a:p>
+        </p:txBody>
+      </p:sp>
+      <p:sp>
+        <p:nvSpPr>
+          <p:cNvPr id="13" name="Rectangle 12"/>
+          <p:cNvSpPr/>
+          <p:nvPr/>
+        </p:nvSpPr>
+        <p:spPr>
+          <a:xfrm>
+            <a:off x="8158276" y="1645920"/>
+            <a:ext cx="3576218" cy="2011680"/>
+          </a:xfrm>
+          <a:prstGeom prst="rect">
+            <a:avLst/>
+          </a:prstGeom>
+          <a:solidFill>
+            <a:srgbClr val="F7FAF7"/>
+          </a:solidFill>
+          <a:ln>
+            <a:solidFill>
+              <a:srgbClr val="DCE8DC"/>
+            </a:solidFill>
+          </a:ln>
+        </p:spPr>
+        <p:style>
+          <a:lnRef idx="1">
+            <a:schemeClr val="accent1"/>
+          </a:lnRef>
+          <a:fillRef idx="3">
+            <a:schemeClr val="accent1"/>
+          </a:fillRef>
+          <a:effectRef idx="2">
+            <a:schemeClr val="accent1"/>
+          </a:effectRef>
+          <a:fontRef idx="minor">
+            <a:schemeClr val="lt1"/>
+          </a:fontRef>
+        </p:style>
+        <p:txBody>
+          <a:bodyPr rtlCol="0" anchor="ctr"/>
+          <a:lstStyle/>
+          <a:p>
+            <a:pPr algn="ctr"/>
+          </a:p>
+        </p:txBody>
+      </p:sp>
+      <p:sp>
+        <p:nvSpPr>
+          <p:cNvPr id="14" name="TextBox 13"/>
+          <p:cNvSpPr txBox="1"/>
+          <p:nvPr/>
+        </p:nvSpPr>
+        <p:spPr>
+          <a:xfrm>
+            <a:off x="8341156" y="1783080"/>
+            <a:ext cx="3210458" cy="457200"/>
+          </a:xfrm>
+          <a:prstGeom prst="rect">
+            <a:avLst/>
+          </a:prstGeom>
+          <a:noFill/>
+        </p:spPr>
+        <p:txBody>
+          <a:bodyPr wrap="square">
+            <a:spAutoFit/>
+          </a:bodyPr>
+          <a:lstStyle/>
+          <a:p>
+            <a:r>
+              <a:rPr sz="1200" b="0">
+                <a:solidFill>
+                  <a:srgbClr val="5F6F63"/>
+                </a:solidFill>
+                <a:latin typeface="Arial"/>
+              </a:rPr>
+              <a:t>Materials charged, October so far</a:t>
+            </a:r>
+          </a:p>
+        </p:txBody>
+      </p:sp>
+      <p:sp>
+        <p:nvSpPr>
+          <p:cNvPr id="15" name="TextBox 14"/>
+          <p:cNvSpPr txBox="1"/>
+          <p:nvPr/>
+        </p:nvSpPr>
+        <p:spPr>
+          <a:xfrm>
+            <a:off x="8341156" y="2240280"/>
+            <a:ext cx="3210458" cy="731520"/>
+          </a:xfrm>
+          <a:prstGeom prst="rect">
+            <a:avLst/>
+          </a:prstGeom>
+          <a:noFill/>
+        </p:spPr>
+        <p:txBody>
+          <a:bodyPr wrap="square">
+            <a:spAutoFit/>
+          </a:bodyPr>
+          <a:lstStyle/>
+          <a:p>
+            <a:r>
+              <a:rPr sz="3000" b="1">
+                <a:solidFill>
+                  <a:srgbClr val="2F7A5D"/>
+                </a:solidFill>
+                <a:latin typeface="Arial"/>
+              </a:rPr>
+              <a:t>$910</a:t>
+            </a:r>
+          </a:p>
+        </p:txBody>
+      </p:sp>
+      <p:sp>
+        <p:nvSpPr>
+          <p:cNvPr id="16" name="TextBox 15"/>
+          <p:cNvSpPr txBox="1"/>
+          <p:nvPr/>
+        </p:nvSpPr>
+        <p:spPr>
+          <a:xfrm>
+            <a:off x="8341156" y="3017520"/>
+            <a:ext cx="3210458" cy="548640"/>
+          </a:xfrm>
+          <a:prstGeom prst="rect">
+            <a:avLst/>
+          </a:prstGeom>
+          <a:noFill/>
+        </p:spPr>
+        <p:txBody>
+          <a:bodyPr wrap="square">
+            <a:spAutoFit/>
+          </a:bodyPr>
+          <a:lstStyle/>
+          <a:p>
+            <a:r>
+              <a:rPr sz="1100" b="0">
+                <a:solidFill>
+                  <a:srgbClr val="5F6F63"/>
+                </a:solidFill>
+                <a:latin typeface="Arial"/>
+              </a:rPr>
+              <a:t>$700 at cost, plus 30%</a:t>
+            </a:r>
+          </a:p>
+        </p:txBody>
+      </p:sp>
+      <p:sp>
+        <p:nvSpPr>
+          <p:cNvPr id="17" name="TextBox 16"/>
           <p:cNvSpPr txBox="1"/>
           <p:nvPr/>
         </p:nvSpPr>
@@ -8231,7 +8525,7 @@
       </p:sp>
       <p:sp>
         <p:nvSpPr>
-          <p:cNvPr id="10" name="TextBox 9"/>
+          <p:cNvPr id="18" name="TextBox 17"/>
           <p:cNvSpPr txBox="1"/>
           <p:nvPr/>
         </p:nvSpPr>
@@ -8266,7 +8560,7 @@
       </p:sp>
       <p:sp>
         <p:nvSpPr>
-          <p:cNvPr id="11" name="TextBox 10"/>
+          <p:cNvPr id="19" name="TextBox 18"/>
           <p:cNvSpPr txBox="1"/>
           <p:nvPr/>
         </p:nvSpPr>
@@ -9140,7 +9434,7 @@
                 </a:solidFill>
                 <a:latin typeface="Arial"/>
               </a:rPr>
-              <a:t>7 call-outs in October so far made a 45.0% job gross margin between them. Gross margins run from 41.0% to 48.1% by length: the hourly rate covers technician time comfortably, so the gross margin mostly moves with how much material goes on the van.</a:t>
+              <a:t>7 call-outs in October so far billed $2,465 of technician time and $910 of materials ($700 at cost plus 30%), and made a 45.0% job gross margin between them. Gross margins run from 41.0% to 48.1% by length: the hourly rate covers technician time comfortably, so the gross margin mostly moves with how much material goes on the van.</a:t>
             </a:r>
           </a:p>
         </p:txBody>

--- a/media/exports/reports/2026-10/job-margins.pptx
+++ b/media/exports/reports/2026-10/job-margins.pptx
@@ -284,7 +284,9 @@
     <a:lstStyle/>
     <a:p>
       <a:pPr>
-        <a:defRPr sz="1800"/>
+        <a:defRPr sz="1800">
+          <a:latin typeface="Roboto"/>
+        </a:defRPr>
       </a:pPr>
       <a:endParaRPr lang="en-US"/>
     </a:p>
@@ -580,7 +582,9 @@
     <a:lstStyle/>
     <a:p>
       <a:pPr>
-        <a:defRPr sz="1800"/>
+        <a:defRPr sz="1800">
+          <a:latin typeface="Roboto"/>
+        </a:defRPr>
       </a:pPr>
       <a:endParaRPr/>
     </a:p>
@@ -748,7 +752,9 @@
     <a:lstStyle/>
     <a:p>
       <a:pPr>
-        <a:defRPr sz="1800"/>
+        <a:defRPr sz="1800">
+          <a:latin typeface="Roboto"/>
+        </a:defRPr>
       </a:pPr>
       <a:endParaRPr lang="en-US"/>
     </a:p>
@@ -1070,7 +1076,9 @@
     <a:lstStyle/>
     <a:p>
       <a:pPr>
-        <a:defRPr sz="1800"/>
+        <a:defRPr sz="1800">
+          <a:latin typeface="Roboto"/>
+        </a:defRPr>
       </a:pPr>
       <a:endParaRPr lang="en-US"/>
     </a:p>
@@ -1392,7 +1400,9 @@
     <a:lstStyle/>
     <a:p>
       <a:pPr>
-        <a:defRPr sz="1800"/>
+        <a:defRPr sz="1800">
+          <a:latin typeface="Roboto"/>
+        </a:defRPr>
       </a:pPr>
       <a:endParaRPr lang="en-US"/>
     </a:p>
@@ -1532,7 +1542,9 @@
     <a:lstStyle/>
     <a:p>
       <a:pPr>
-        <a:defRPr sz="1800"/>
+        <a:defRPr sz="1800">
+          <a:latin typeface="Roboto"/>
+        </a:defRPr>
       </a:pPr>
       <a:endParaRPr lang="en-US"/>
     </a:p>
@@ -1672,7 +1684,9 @@
     <a:lstStyle/>
     <a:p>
       <a:pPr>
-        <a:defRPr sz="1800"/>
+        <a:defRPr sz="1800">
+          <a:latin typeface="Roboto"/>
+        </a:defRPr>
       </a:pPr>
       <a:endParaRPr lang="en-US"/>
     </a:p>
@@ -1868,7 +1882,9 @@
     <a:lstStyle/>
     <a:p>
       <a:pPr>
-        <a:defRPr sz="1800"/>
+        <a:defRPr sz="1800">
+          <a:latin typeface="Roboto"/>
+        </a:defRPr>
       </a:pPr>
       <a:endParaRPr lang="en-US"/>
     </a:p>
@@ -2064,7 +2080,9 @@
     <a:lstStyle/>
     <a:p>
       <a:pPr>
-        <a:defRPr sz="1800"/>
+        <a:defRPr sz="1800">
+          <a:latin typeface="Roboto"/>
+        </a:defRPr>
       </a:pPr>
       <a:endParaRPr lang="en-US"/>
     </a:p>
@@ -2360,7 +2378,9 @@
     <a:lstStyle/>
     <a:p>
       <a:pPr>
-        <a:defRPr sz="1800"/>
+        <a:defRPr sz="1800">
+          <a:latin typeface="Roboto"/>
+        </a:defRPr>
       </a:pPr>
       <a:endParaRPr/>
     </a:p>
@@ -5391,11 +5411,17 @@
           <a:bodyPr rtlCol="0" anchor="ctr"/>
           <a:lstStyle/>
           <a:p>
+            <a:pPr>
+              <a:defRPr>
+                <a:latin typeface="Roboto"/>
+              </a:defRPr>
+            </a:pPr>
             <a:r>
               <a:rPr sz="1600" b="1">
                 <a:solidFill>
                   <a:srgbClr val="FFFFFF"/>
                 </a:solidFill>
+                <a:latin typeface="Roboto"/>
               </a:rPr>
               <a:t>4th</a:t>
             </a:r>
@@ -5424,14 +5450,19 @@
           </a:bodyPr>
           <a:lstStyle/>
           <a:p>
+            <a:pPr>
+              <a:defRPr>
+                <a:latin typeface="Roboto"/>
+              </a:defRPr>
+            </a:pPr>
             <a:r>
               <a:rPr sz="1800" b="1">
                 <a:solidFill>
                   <a:srgbClr val="25342A"/>
                 </a:solidFill>
-                <a:latin typeface="Arial"/>
-              </a:rPr>
-              <a:t>The 4th Sheet</a:t>
+                <a:latin typeface="Roboto"/>
+              </a:rPr>
+              <a:t>The Fourth Sheet</a:t>
             </a:r>
           </a:p>
         </p:txBody>
@@ -5458,12 +5489,17 @@
           </a:bodyPr>
           <a:lstStyle/>
           <a:p>
+            <a:pPr>
+              <a:defRPr>
+                <a:latin typeface="Roboto"/>
+              </a:defRPr>
+            </a:pPr>
             <a:r>
               <a:rPr sz="1100" b="1">
                 <a:solidFill>
                   <a:srgbClr val="8A7A52"/>
                 </a:solidFill>
-                <a:latin typeface="Arial"/>
+                <a:latin typeface="Roboto"/>
               </a:rPr>
               <a:t>SAMPLE DATA · invented figures for demonstration</a:t>
             </a:r>
@@ -5492,12 +5528,17 @@
           </a:bodyPr>
           <a:lstStyle/>
           <a:p>
+            <a:pPr>
+              <a:defRPr>
+                <a:latin typeface="Roboto"/>
+              </a:defRPr>
+            </a:pPr>
             <a:r>
               <a:rPr sz="3400" b="1">
                 <a:solidFill>
                   <a:srgbClr val="25342A"/>
                 </a:solidFill>
-                <a:latin typeface="Arial"/>
+                <a:latin typeface="Roboto"/>
               </a:rPr>
               <a:t>Which jobs actually make money?</a:t>
             </a:r>
@@ -5526,12 +5567,17 @@
           </a:bodyPr>
           <a:lstStyle/>
           <a:p>
+            <a:pPr>
+              <a:defRPr>
+                <a:latin typeface="Roboto"/>
+              </a:defRPr>
+            </a:pPr>
             <a:r>
               <a:rPr sz="1600" b="0">
                 <a:solidFill>
                   <a:srgbClr val="5F6F63"/>
                 </a:solidFill>
-                <a:latin typeface="Arial"/>
+                <a:latin typeface="Roboto"/>
               </a:rPr>
               <a:t>Sample Electrical &amp; Air Pty Ltd</a:t>
             </a:r>
@@ -5560,12 +5606,17 @@
           </a:bodyPr>
           <a:lstStyle/>
           <a:p>
+            <a:pPr>
+              <a:defRPr>
+                <a:latin typeface="Roboto"/>
+              </a:defRPr>
+            </a:pPr>
             <a:r>
               <a:rPr sz="1400" b="0">
                 <a:solidFill>
                   <a:srgbClr val="25342A"/>
                 </a:solidFill>
-                <a:latin typeface="Arial"/>
+                <a:latin typeface="Roboto"/>
               </a:rPr>
               <a:t>Period: October 2026 to date. Every job's gross margin: revenue less materials, subcontractors and technician time at $68 an hour (fully loaded: wages and all on-costs). Before overheads, so this is not profit. Pick a type of job and every number, chart and note on the page follows it.</a:t>
             </a:r>
@@ -5594,34 +5645,49 @@
           </a:bodyPr>
           <a:lstStyle/>
           <a:p>
+            <a:pPr>
+              <a:defRPr>
+                <a:latin typeface="Roboto"/>
+              </a:defRPr>
+            </a:pPr>
             <a:r>
               <a:rPr sz="1100" b="0">
                 <a:solidFill>
                   <a:srgbClr val="5F6F63"/>
                 </a:solidFill>
-                <a:latin typeface="Arial"/>
+                <a:latin typeface="Roboto"/>
               </a:rPr>
               <a:t>How final is this data?</a:t>
             </a:r>
           </a:p>
           <a:p>
+            <a:pPr>
+              <a:defRPr>
+                <a:latin typeface="Roboto"/>
+              </a:defRPr>
+            </a:pPr>
             <a:r>
               <a:rPr sz="1100" b="0">
                 <a:solidFill>
                   <a:srgbClr val="5F6F63"/>
                 </a:solidFill>
-                <a:latin typeface="Arial"/>
+                <a:latin typeface="Roboto"/>
               </a:rPr>
               <a:t>September 2026: Locked. September 2026 is locked (closed 2 Oct 2026). These numbers won't change.</a:t>
             </a:r>
           </a:p>
           <a:p>
+            <a:pPr>
+              <a:defRPr>
+                <a:latin typeface="Roboto"/>
+              </a:defRPr>
+            </a:pPr>
             <a:r>
               <a:rPr sz="1100" b="0">
                 <a:solidFill>
                   <a:srgbClr val="5F6F63"/>
                 </a:solidFill>
-                <a:latin typeface="Arial"/>
+                <a:latin typeface="Roboto"/>
               </a:rPr>
               <a:t>October 2026: Incomplete. October 2026 is still in progress: figures to 6 Oct only.</a:t>
             </a:r>
@@ -5650,12 +5716,17 @@
           </a:bodyPr>
           <a:lstStyle/>
           <a:p>
+            <a:pPr>
+              <a:defRPr>
+                <a:latin typeface="Roboto"/>
+              </a:defRPr>
+            </a:pPr>
             <a:r>
               <a:rPr sz="900" b="0">
                 <a:solidFill>
                   <a:srgbClr val="5F6F63"/>
                 </a:solidFill>
-                <a:latin typeface="Arial"/>
+                <a:latin typeface="Roboto"/>
               </a:rPr>
               <a:t>job-margins.pptx</a:t>
             </a:r>
@@ -5684,13 +5755,17 @@
           </a:bodyPr>
           <a:lstStyle/>
           <a:p>
-            <a:pPr algn="ctr"/>
+            <a:pPr algn="ctr">
+              <a:defRPr>
+                <a:latin typeface="Roboto"/>
+              </a:defRPr>
+            </a:pPr>
             <a:r>
               <a:rPr sz="900" b="0">
                 <a:solidFill>
                   <a:srgbClr val="5F6F63"/>
                 </a:solidFill>
-                <a:latin typeface="Arial"/>
+                <a:latin typeface="Roboto"/>
               </a:rPr>
               <a:t>Data retrieved 2pm, Tue 6 Oct 2026 · Sample data</a:t>
             </a:r>
@@ -5719,13 +5794,17 @@
           </a:bodyPr>
           <a:lstStyle/>
           <a:p>
-            <a:pPr algn="r"/>
+            <a:pPr algn="r">
+              <a:defRPr>
+                <a:latin typeface="Roboto"/>
+              </a:defRPr>
+            </a:pPr>
             <a:r>
               <a:rPr sz="900" b="0">
                 <a:solidFill>
                   <a:srgbClr val="5F6F63"/>
                 </a:solidFill>
-                <a:latin typeface="Arial"/>
+                <a:latin typeface="Roboto"/>
               </a:rPr>
               <a:t>Slide 1 of 21</a:t>
             </a:r>
@@ -5789,7 +5868,11 @@
           <a:bodyPr rtlCol="0" anchor="ctr"/>
           <a:lstStyle/>
           <a:p>
-            <a:pPr algn="ctr"/>
+            <a:pPr algn="ctr">
+              <a:defRPr>
+                <a:latin typeface="Roboto"/>
+              </a:defRPr>
+            </a:pPr>
           </a:p>
         </p:txBody>
       </p:sp>
@@ -5815,12 +5898,17 @@
           </a:bodyPr>
           <a:lstStyle/>
           <a:p>
+            <a:pPr>
+              <a:defRPr>
+                <a:latin typeface="Roboto"/>
+              </a:defRPr>
+            </a:pPr>
             <a:r>
               <a:rPr sz="1000" b="0">
                 <a:solidFill>
                   <a:srgbClr val="5F6F63"/>
                 </a:solidFill>
-                <a:latin typeface="Arial"/>
+                <a:latin typeface="Roboto"/>
               </a:rPr>
               <a:t>Sample Electrical &amp; Air Pty Ltd · Which jobs actually make money?</a:t>
             </a:r>
@@ -5849,12 +5937,17 @@
           </a:bodyPr>
           <a:lstStyle/>
           <a:p>
+            <a:pPr>
+              <a:defRPr>
+                <a:latin typeface="Roboto"/>
+              </a:defRPr>
+            </a:pPr>
             <a:r>
               <a:rPr sz="2400" b="1">
                 <a:solidFill>
                   <a:srgbClr val="25342A"/>
                 </a:solidFill>
-                <a:latin typeface="Arial"/>
+                <a:latin typeface="Roboto"/>
               </a:rPr>
               <a:t>Job gross margin on each maintenance contract, October 2026 to date · Gross margin $ · Type of job: Maintenance contracts</a:t>
             </a:r>
@@ -5883,12 +5976,17 @@
           </a:bodyPr>
           <a:lstStyle/>
           <a:p>
+            <a:pPr>
+              <a:defRPr>
+                <a:latin typeface="Roboto"/>
+              </a:defRPr>
+            </a:pPr>
             <a:r>
               <a:rPr sz="1200" b="0">
                 <a:solidFill>
                   <a:srgbClr val="5F6F63"/>
                 </a:solidFill>
-                <a:latin typeface="Arial"/>
+                <a:latin typeface="Roboto"/>
               </a:rPr>
               <a:t>The month's fee less materials and technician time at $68/hour.</a:t>
             </a:r>
@@ -5935,12 +6033,17 @@
           </a:bodyPr>
           <a:lstStyle/>
           <a:p>
+            <a:pPr>
+              <a:defRPr>
+                <a:latin typeface="Roboto"/>
+              </a:defRPr>
+            </a:pPr>
             <a:r>
               <a:rPr sz="900" b="0">
                 <a:solidFill>
                   <a:srgbClr val="5F6F63"/>
                 </a:solidFill>
-                <a:latin typeface="Arial"/>
+                <a:latin typeface="Roboto"/>
               </a:rPr>
               <a:t>job-margins.pptx</a:t>
             </a:r>
@@ -5969,13 +6072,17 @@
           </a:bodyPr>
           <a:lstStyle/>
           <a:p>
-            <a:pPr algn="ctr"/>
+            <a:pPr algn="ctr">
+              <a:defRPr>
+                <a:latin typeface="Roboto"/>
+              </a:defRPr>
+            </a:pPr>
             <a:r>
               <a:rPr sz="900" b="0">
                 <a:solidFill>
                   <a:srgbClr val="5F6F63"/>
                 </a:solidFill>
-                <a:latin typeface="Arial"/>
+                <a:latin typeface="Roboto"/>
               </a:rPr>
               <a:t>Data retrieved 2pm, Tue 6 Oct 2026 · Sample data</a:t>
             </a:r>
@@ -6004,13 +6111,17 @@
           </a:bodyPr>
           <a:lstStyle/>
           <a:p>
-            <a:pPr algn="r"/>
+            <a:pPr algn="r">
+              <a:defRPr>
+                <a:latin typeface="Roboto"/>
+              </a:defRPr>
+            </a:pPr>
             <a:r>
               <a:rPr sz="900" b="0">
                 <a:solidFill>
                   <a:srgbClr val="5F6F63"/>
                 </a:solidFill>
-                <a:latin typeface="Arial"/>
+                <a:latin typeface="Roboto"/>
               </a:rPr>
               <a:t>Slide 10 of 21</a:t>
             </a:r>
@@ -6074,7 +6185,11 @@
           <a:bodyPr rtlCol="0" anchor="ctr"/>
           <a:lstStyle/>
           <a:p>
-            <a:pPr algn="ctr"/>
+            <a:pPr algn="ctr">
+              <a:defRPr>
+                <a:latin typeface="Roboto"/>
+              </a:defRPr>
+            </a:pPr>
           </a:p>
         </p:txBody>
       </p:sp>
@@ -6100,12 +6215,17 @@
           </a:bodyPr>
           <a:lstStyle/>
           <a:p>
+            <a:pPr>
+              <a:defRPr>
+                <a:latin typeface="Roboto"/>
+              </a:defRPr>
+            </a:pPr>
             <a:r>
               <a:rPr sz="1000" b="0">
                 <a:solidFill>
                   <a:srgbClr val="5F6F63"/>
                 </a:solidFill>
-                <a:latin typeface="Arial"/>
+                <a:latin typeface="Roboto"/>
               </a:rPr>
               <a:t>Sample Electrical &amp; Air Pty Ltd · Which jobs actually make money?</a:t>
             </a:r>
@@ -6134,12 +6254,17 @@
           </a:bodyPr>
           <a:lstStyle/>
           <a:p>
+            <a:pPr>
+              <a:defRPr>
+                <a:latin typeface="Roboto"/>
+              </a:defRPr>
+            </a:pPr>
             <a:r>
               <a:rPr sz="2400" b="1">
                 <a:solidFill>
                   <a:srgbClr val="25342A"/>
                 </a:solidFill>
-                <a:latin typeface="Arial"/>
+                <a:latin typeface="Roboto"/>
               </a:rPr>
               <a:t>What it shows · Type of job: Maintenance contracts</a:t>
             </a:r>
@@ -6187,7 +6312,11 @@
           <a:bodyPr rtlCol="0" anchor="ctr"/>
           <a:lstStyle/>
           <a:p>
-            <a:pPr algn="ctr"/>
+            <a:pPr algn="ctr">
+              <a:defRPr>
+                <a:latin typeface="Roboto"/>
+              </a:defRPr>
+            </a:pPr>
           </a:p>
         </p:txBody>
       </p:sp>
@@ -6213,12 +6342,17 @@
           </a:bodyPr>
           <a:lstStyle/>
           <a:p>
+            <a:pPr>
+              <a:defRPr>
+                <a:latin typeface="Roboto"/>
+              </a:defRPr>
+            </a:pPr>
             <a:r>
               <a:rPr sz="1100" b="1">
                 <a:solidFill>
                   <a:srgbClr val="5F6F63"/>
                 </a:solidFill>
-                <a:latin typeface="Arial"/>
+                <a:latin typeface="Roboto"/>
               </a:rPr>
               <a:t>WHAT IT SHOWS</a:t>
             </a:r>
@@ -6247,12 +6381,17 @@
           </a:bodyPr>
           <a:lstStyle/>
           <a:p>
+            <a:pPr>
+              <a:defRPr>
+                <a:latin typeface="Roboto"/>
+              </a:defRPr>
+            </a:pPr>
             <a:r>
               <a:rPr sz="1600" b="0">
                 <a:solidFill>
                   <a:srgbClr val="25342A"/>
                 </a:solidFill>
-                <a:latin typeface="Arial"/>
+                <a:latin typeface="Roboto"/>
               </a:rPr>
               <a:t>All 14 contracts made more than the 35.0% job gross margin target. The thinnest was Kangaroo Point townhouses at 58.2% job gross margin: 14.0 h of technician time on a $2,400 monthly fee.</a:t>
             </a:r>
@@ -6300,7 +6439,11 @@
           <a:bodyPr rtlCol="0" anchor="ctr"/>
           <a:lstStyle/>
           <a:p>
-            <a:pPr algn="ctr"/>
+            <a:pPr algn="ctr">
+              <a:defRPr>
+                <a:latin typeface="Roboto"/>
+              </a:defRPr>
+            </a:pPr>
           </a:p>
         </p:txBody>
       </p:sp>
@@ -6326,12 +6469,17 @@
           </a:bodyPr>
           <a:lstStyle/>
           <a:p>
+            <a:pPr>
+              <a:defRPr>
+                <a:latin typeface="Roboto"/>
+              </a:defRPr>
+            </a:pPr>
             <a:r>
               <a:rPr sz="1100" b="1">
                 <a:solidFill>
                   <a:srgbClr val="5F6F63"/>
                 </a:solidFill>
-                <a:latin typeface="Arial"/>
+                <a:latin typeface="Roboto"/>
               </a:rPr>
               <a:t>WHAT YOU'D DO ABOUT IT</a:t>
             </a:r>
@@ -6360,12 +6508,17 @@
           </a:bodyPr>
           <a:lstStyle/>
           <a:p>
+            <a:pPr>
+              <a:defRPr>
+                <a:latin typeface="Roboto"/>
+              </a:defRPr>
+            </a:pPr>
             <a:r>
               <a:rPr sz="1600" b="0">
                 <a:solidFill>
                   <a:srgbClr val="25342A"/>
                 </a:solidFill>
-                <a:latin typeface="Arial"/>
+                <a:latin typeface="Roboto"/>
               </a:rPr>
               <a:t>The Kangaroo Point townhouses contract: 58.2% gross margin, 27.1 points clear of the 31.1% overheads need. Maintenance contracts overall: 59.5% gross margin.</a:t>
             </a:r>
@@ -6394,12 +6547,17 @@
           </a:bodyPr>
           <a:lstStyle/>
           <a:p>
+            <a:pPr>
+              <a:defRPr>
+                <a:latin typeface="Roboto"/>
+              </a:defRPr>
+            </a:pPr>
             <a:r>
               <a:rPr sz="900" b="0">
                 <a:solidFill>
                   <a:srgbClr val="5F6F63"/>
                 </a:solidFill>
-                <a:latin typeface="Arial"/>
+                <a:latin typeface="Roboto"/>
               </a:rPr>
               <a:t>job-margins.pptx</a:t>
             </a:r>
@@ -6428,13 +6586,17 @@
           </a:bodyPr>
           <a:lstStyle/>
           <a:p>
-            <a:pPr algn="ctr"/>
+            <a:pPr algn="ctr">
+              <a:defRPr>
+                <a:latin typeface="Roboto"/>
+              </a:defRPr>
+            </a:pPr>
             <a:r>
               <a:rPr sz="900" b="0">
                 <a:solidFill>
                   <a:srgbClr val="5F6F63"/>
                 </a:solidFill>
-                <a:latin typeface="Arial"/>
+                <a:latin typeface="Roboto"/>
               </a:rPr>
               <a:t>Data retrieved 2pm, Tue 6 Oct 2026 · Sample data</a:t>
             </a:r>
@@ -6463,13 +6625,17 @@
           </a:bodyPr>
           <a:lstStyle/>
           <a:p>
-            <a:pPr algn="r"/>
+            <a:pPr algn="r">
+              <a:defRPr>
+                <a:latin typeface="Roboto"/>
+              </a:defRPr>
+            </a:pPr>
             <a:r>
               <a:rPr sz="900" b="0">
                 <a:solidFill>
                   <a:srgbClr val="5F6F63"/>
                 </a:solidFill>
-                <a:latin typeface="Arial"/>
+                <a:latin typeface="Roboto"/>
               </a:rPr>
               <a:t>Slide 11 of 21</a:t>
             </a:r>
@@ -6533,7 +6699,11 @@
           <a:bodyPr rtlCol="0" anchor="ctr"/>
           <a:lstStyle/>
           <a:p>
-            <a:pPr algn="ctr"/>
+            <a:pPr algn="ctr">
+              <a:defRPr>
+                <a:latin typeface="Roboto"/>
+              </a:defRPr>
+            </a:pPr>
           </a:p>
         </p:txBody>
       </p:sp>
@@ -6559,12 +6729,17 @@
           </a:bodyPr>
           <a:lstStyle/>
           <a:p>
+            <a:pPr>
+              <a:defRPr>
+                <a:latin typeface="Roboto"/>
+              </a:defRPr>
+            </a:pPr>
             <a:r>
               <a:rPr sz="1000" b="0">
                 <a:solidFill>
                   <a:srgbClr val="5F6F63"/>
                 </a:solidFill>
-                <a:latin typeface="Arial"/>
+                <a:latin typeface="Roboto"/>
               </a:rPr>
               <a:t>Sample Electrical &amp; Air Pty Ltd · Which jobs actually make money?</a:t>
             </a:r>
@@ -6593,12 +6768,17 @@
           </a:bodyPr>
           <a:lstStyle/>
           <a:p>
+            <a:pPr>
+              <a:defRPr>
+                <a:latin typeface="Roboto"/>
+              </a:defRPr>
+            </a:pPr>
             <a:r>
               <a:rPr sz="2400" b="1">
                 <a:solidFill>
                   <a:srgbClr val="25342A"/>
                 </a:solidFill>
-                <a:latin typeface="Arial"/>
+                <a:latin typeface="Roboto"/>
               </a:rPr>
               <a:t>Headline numbers · Type of job: Installations</a:t>
             </a:r>
@@ -6646,7 +6826,11 @@
           <a:bodyPr rtlCol="0" anchor="ctr"/>
           <a:lstStyle/>
           <a:p>
-            <a:pPr algn="ctr"/>
+            <a:pPr algn="ctr">
+              <a:defRPr>
+                <a:latin typeface="Roboto"/>
+              </a:defRPr>
+            </a:pPr>
           </a:p>
         </p:txBody>
       </p:sp>
@@ -6672,12 +6856,17 @@
           </a:bodyPr>
           <a:lstStyle/>
           <a:p>
+            <a:pPr>
+              <a:defRPr>
+                <a:latin typeface="Roboto"/>
+              </a:defRPr>
+            </a:pPr>
             <a:r>
               <a:rPr sz="1200" b="0">
                 <a:solidFill>
                   <a:srgbClr val="5F6F63"/>
                 </a:solidFill>
-                <a:latin typeface="Arial"/>
+                <a:latin typeface="Roboto"/>
               </a:rPr>
               <a:t>Job gross margin, October so far · Installations</a:t>
             </a:r>
@@ -6706,12 +6895,17 @@
           </a:bodyPr>
           <a:lstStyle/>
           <a:p>
+            <a:pPr>
+              <a:defRPr>
+                <a:latin typeface="Roboto"/>
+              </a:defRPr>
+            </a:pPr>
             <a:r>
               <a:rPr sz="3000" b="1">
                 <a:solidFill>
                   <a:srgbClr val="2F7A5D"/>
                 </a:solidFill>
-                <a:latin typeface="Arial"/>
+                <a:latin typeface="Roboto"/>
               </a:rPr>
               <a:t>22.0%</a:t>
             </a:r>
@@ -6740,12 +6934,17 @@
           </a:bodyPr>
           <a:lstStyle/>
           <a:p>
+            <a:pPr>
+              <a:defRPr>
+                <a:latin typeface="Roboto"/>
+              </a:defRPr>
+            </a:pPr>
             <a:r>
               <a:rPr sz="1100" b="0">
                 <a:solidFill>
                   <a:srgbClr val="5F6F63"/>
                 </a:solidFill>
-                <a:latin typeface="Arial"/>
+                <a:latin typeface="Roboto"/>
               </a:rPr>
               <a:t>September 27.0%</a:t>
             </a:r>
@@ -6774,12 +6973,17 @@
           </a:bodyPr>
           <a:lstStyle/>
           <a:p>
+            <a:pPr>
+              <a:defRPr>
+                <a:latin typeface="Roboto"/>
+              </a:defRPr>
+            </a:pPr>
             <a:r>
               <a:rPr sz="900" b="0">
                 <a:solidFill>
                   <a:srgbClr val="5F6F63"/>
                 </a:solidFill>
-                <a:latin typeface="Arial"/>
+                <a:latin typeface="Roboto"/>
               </a:rPr>
               <a:t>job-margins.pptx</a:t>
             </a:r>
@@ -6808,13 +7012,17 @@
           </a:bodyPr>
           <a:lstStyle/>
           <a:p>
-            <a:pPr algn="ctr"/>
+            <a:pPr algn="ctr">
+              <a:defRPr>
+                <a:latin typeface="Roboto"/>
+              </a:defRPr>
+            </a:pPr>
             <a:r>
               <a:rPr sz="900" b="0">
                 <a:solidFill>
                   <a:srgbClr val="5F6F63"/>
                 </a:solidFill>
-                <a:latin typeface="Arial"/>
+                <a:latin typeface="Roboto"/>
               </a:rPr>
               <a:t>Data retrieved 2pm, Tue 6 Oct 2026 · Sample data</a:t>
             </a:r>
@@ -6843,13 +7051,17 @@
           </a:bodyPr>
           <a:lstStyle/>
           <a:p>
-            <a:pPr algn="r"/>
+            <a:pPr algn="r">
+              <a:defRPr>
+                <a:latin typeface="Roboto"/>
+              </a:defRPr>
+            </a:pPr>
             <a:r>
               <a:rPr sz="900" b="0">
                 <a:solidFill>
                   <a:srgbClr val="5F6F63"/>
                 </a:solidFill>
-                <a:latin typeface="Arial"/>
+                <a:latin typeface="Roboto"/>
               </a:rPr>
               <a:t>Slide 12 of 21</a:t>
             </a:r>
@@ -6913,7 +7125,11 @@
           <a:bodyPr rtlCol="0" anchor="ctr"/>
           <a:lstStyle/>
           <a:p>
-            <a:pPr algn="ctr"/>
+            <a:pPr algn="ctr">
+              <a:defRPr>
+                <a:latin typeface="Roboto"/>
+              </a:defRPr>
+            </a:pPr>
           </a:p>
         </p:txBody>
       </p:sp>
@@ -6939,12 +7155,17 @@
           </a:bodyPr>
           <a:lstStyle/>
           <a:p>
+            <a:pPr>
+              <a:defRPr>
+                <a:latin typeface="Roboto"/>
+              </a:defRPr>
+            </a:pPr>
             <a:r>
               <a:rPr sz="1000" b="0">
                 <a:solidFill>
                   <a:srgbClr val="5F6F63"/>
                 </a:solidFill>
-                <a:latin typeface="Arial"/>
+                <a:latin typeface="Roboto"/>
               </a:rPr>
               <a:t>Sample Electrical &amp; Air Pty Ltd · Which jobs actually make money?</a:t>
             </a:r>
@@ -6973,12 +7194,17 @@
           </a:bodyPr>
           <a:lstStyle/>
           <a:p>
+            <a:pPr>
+              <a:defRPr>
+                <a:latin typeface="Roboto"/>
+              </a:defRPr>
+            </a:pPr>
             <a:r>
               <a:rPr sz="2400" b="1">
                 <a:solidFill>
                   <a:srgbClr val="25342A"/>
                 </a:solidFill>
-                <a:latin typeface="Arial"/>
+                <a:latin typeface="Roboto"/>
               </a:rPr>
               <a:t>Job gross margin on each installation invoiced in October 2026 to date · Gross margin % · Type of job: Installations</a:t>
             </a:r>
@@ -7007,12 +7233,17 @@
           </a:bodyPr>
           <a:lstStyle/>
           <a:p>
+            <a:pPr>
+              <a:defRPr>
+                <a:latin typeface="Roboto"/>
+              </a:defRPr>
+            </a:pPr>
             <a:r>
               <a:rPr sz="1200" b="0">
                 <a:solidFill>
                   <a:srgbClr val="5F6F63"/>
                 </a:solidFill>
-                <a:latin typeface="Arial"/>
+                <a:latin typeface="Roboto"/>
               </a:rPr>
               <a:t>Whole job, recognised when invoiced: revenue less materials, subcontractors and technician time at $68/hour. Before overheads: not profit. One 35.0% target for every job for now.</a:t>
             </a:r>
@@ -7059,12 +7290,17 @@
           </a:bodyPr>
           <a:lstStyle/>
           <a:p>
+            <a:pPr>
+              <a:defRPr>
+                <a:latin typeface="Roboto"/>
+              </a:defRPr>
+            </a:pPr>
             <a:r>
               <a:rPr sz="1000" b="0">
                 <a:solidFill>
                   <a:srgbClr val="5F6F63"/>
                 </a:solidFill>
-                <a:latin typeface="Arial"/>
+                <a:latin typeface="Roboto"/>
               </a:rPr>
               <a:t>Target 35.0%  ·  grey = below target</a:t>
             </a:r>
@@ -7093,12 +7329,17 @@
           </a:bodyPr>
           <a:lstStyle/>
           <a:p>
+            <a:pPr>
+              <a:defRPr>
+                <a:latin typeface="Roboto"/>
+              </a:defRPr>
+            </a:pPr>
             <a:r>
               <a:rPr sz="900" b="0">
                 <a:solidFill>
                   <a:srgbClr val="5F6F63"/>
                 </a:solidFill>
-                <a:latin typeface="Arial"/>
+                <a:latin typeface="Roboto"/>
               </a:rPr>
               <a:t>job-margins.pptx</a:t>
             </a:r>
@@ -7127,13 +7368,17 @@
           </a:bodyPr>
           <a:lstStyle/>
           <a:p>
-            <a:pPr algn="ctr"/>
+            <a:pPr algn="ctr">
+              <a:defRPr>
+                <a:latin typeface="Roboto"/>
+              </a:defRPr>
+            </a:pPr>
             <a:r>
               <a:rPr sz="900" b="0">
                 <a:solidFill>
                   <a:srgbClr val="5F6F63"/>
                 </a:solidFill>
-                <a:latin typeface="Arial"/>
+                <a:latin typeface="Roboto"/>
               </a:rPr>
               <a:t>Data retrieved 2pm, Tue 6 Oct 2026 · Sample data</a:t>
             </a:r>
@@ -7162,13 +7407,17 @@
           </a:bodyPr>
           <a:lstStyle/>
           <a:p>
-            <a:pPr algn="r"/>
+            <a:pPr algn="r">
+              <a:defRPr>
+                <a:latin typeface="Roboto"/>
+              </a:defRPr>
+            </a:pPr>
             <a:r>
               <a:rPr sz="900" b="0">
                 <a:solidFill>
                   <a:srgbClr val="5F6F63"/>
                 </a:solidFill>
-                <a:latin typeface="Arial"/>
+                <a:latin typeface="Roboto"/>
               </a:rPr>
               <a:t>Slide 13 of 21</a:t>
             </a:r>
@@ -7232,7 +7481,11 @@
           <a:bodyPr rtlCol="0" anchor="ctr"/>
           <a:lstStyle/>
           <a:p>
-            <a:pPr algn="ctr"/>
+            <a:pPr algn="ctr">
+              <a:defRPr>
+                <a:latin typeface="Roboto"/>
+              </a:defRPr>
+            </a:pPr>
           </a:p>
         </p:txBody>
       </p:sp>
@@ -7258,12 +7511,17 @@
           </a:bodyPr>
           <a:lstStyle/>
           <a:p>
+            <a:pPr>
+              <a:defRPr>
+                <a:latin typeface="Roboto"/>
+              </a:defRPr>
+            </a:pPr>
             <a:r>
               <a:rPr sz="1000" b="0">
                 <a:solidFill>
                   <a:srgbClr val="5F6F63"/>
                 </a:solidFill>
-                <a:latin typeface="Arial"/>
+                <a:latin typeface="Roboto"/>
               </a:rPr>
               <a:t>Sample Electrical &amp; Air Pty Ltd · Which jobs actually make money?</a:t>
             </a:r>
@@ -7292,12 +7550,17 @@
           </a:bodyPr>
           <a:lstStyle/>
           <a:p>
+            <a:pPr>
+              <a:defRPr>
+                <a:latin typeface="Roboto"/>
+              </a:defRPr>
+            </a:pPr>
             <a:r>
               <a:rPr sz="2400" b="1">
                 <a:solidFill>
                   <a:srgbClr val="25342A"/>
                 </a:solidFill>
-                <a:latin typeface="Arial"/>
+                <a:latin typeface="Roboto"/>
               </a:rPr>
               <a:t>Job gross margin on each installation invoiced in October 2026 to date · Gross margin $ · Type of job: Installations</a:t>
             </a:r>
@@ -7326,12 +7589,17 @@
           </a:bodyPr>
           <a:lstStyle/>
           <a:p>
+            <a:pPr>
+              <a:defRPr>
+                <a:latin typeface="Roboto"/>
+              </a:defRPr>
+            </a:pPr>
             <a:r>
               <a:rPr sz="1200" b="0">
                 <a:solidFill>
                   <a:srgbClr val="5F6F63"/>
                 </a:solidFill>
-                <a:latin typeface="Arial"/>
+                <a:latin typeface="Roboto"/>
               </a:rPr>
               <a:t>Whole job, recognised when invoiced: revenue less materials, subcontractors and technician time at $68/hour. Before overheads: not profit. One 35.0% target for every job for now.</a:t>
             </a:r>
@@ -7378,12 +7646,17 @@
           </a:bodyPr>
           <a:lstStyle/>
           <a:p>
+            <a:pPr>
+              <a:defRPr>
+                <a:latin typeface="Roboto"/>
+              </a:defRPr>
+            </a:pPr>
             <a:r>
               <a:rPr sz="900" b="0">
                 <a:solidFill>
                   <a:srgbClr val="5F6F63"/>
                 </a:solidFill>
-                <a:latin typeface="Arial"/>
+                <a:latin typeface="Roboto"/>
               </a:rPr>
               <a:t>job-margins.pptx</a:t>
             </a:r>
@@ -7412,13 +7685,17 @@
           </a:bodyPr>
           <a:lstStyle/>
           <a:p>
-            <a:pPr algn="ctr"/>
+            <a:pPr algn="ctr">
+              <a:defRPr>
+                <a:latin typeface="Roboto"/>
+              </a:defRPr>
+            </a:pPr>
             <a:r>
               <a:rPr sz="900" b="0">
                 <a:solidFill>
                   <a:srgbClr val="5F6F63"/>
                 </a:solidFill>
-                <a:latin typeface="Arial"/>
+                <a:latin typeface="Roboto"/>
               </a:rPr>
               <a:t>Data retrieved 2pm, Tue 6 Oct 2026 · Sample data</a:t>
             </a:r>
@@ -7447,13 +7724,17 @@
           </a:bodyPr>
           <a:lstStyle/>
           <a:p>
-            <a:pPr algn="r"/>
+            <a:pPr algn="r">
+              <a:defRPr>
+                <a:latin typeface="Roboto"/>
+              </a:defRPr>
+            </a:pPr>
             <a:r>
               <a:rPr sz="900" b="0">
                 <a:solidFill>
                   <a:srgbClr val="5F6F63"/>
                 </a:solidFill>
-                <a:latin typeface="Arial"/>
+                <a:latin typeface="Roboto"/>
               </a:rPr>
               <a:t>Slide 14 of 21</a:t>
             </a:r>
@@ -7517,7 +7798,11 @@
           <a:bodyPr rtlCol="0" anchor="ctr"/>
           <a:lstStyle/>
           <a:p>
-            <a:pPr algn="ctr"/>
+            <a:pPr algn="ctr">
+              <a:defRPr>
+                <a:latin typeface="Roboto"/>
+              </a:defRPr>
+            </a:pPr>
           </a:p>
         </p:txBody>
       </p:sp>
@@ -7543,12 +7828,17 @@
           </a:bodyPr>
           <a:lstStyle/>
           <a:p>
+            <a:pPr>
+              <a:defRPr>
+                <a:latin typeface="Roboto"/>
+              </a:defRPr>
+            </a:pPr>
             <a:r>
               <a:rPr sz="1000" b="0">
                 <a:solidFill>
                   <a:srgbClr val="5F6F63"/>
                 </a:solidFill>
-                <a:latin typeface="Arial"/>
+                <a:latin typeface="Roboto"/>
               </a:rPr>
               <a:t>Sample Electrical &amp; Air Pty Ltd · Which jobs actually make money?</a:t>
             </a:r>
@@ -7577,12 +7867,17 @@
           </a:bodyPr>
           <a:lstStyle/>
           <a:p>
+            <a:pPr>
+              <a:defRPr>
+                <a:latin typeface="Roboto"/>
+              </a:defRPr>
+            </a:pPr>
             <a:r>
               <a:rPr sz="2400" b="1">
                 <a:solidFill>
                   <a:srgbClr val="25342A"/>
                 </a:solidFill>
-                <a:latin typeface="Arial"/>
+                <a:latin typeface="Roboto"/>
               </a:rPr>
               <a:t>What it shows · Type of job: Installations</a:t>
             </a:r>
@@ -7630,7 +7925,11 @@
           <a:bodyPr rtlCol="0" anchor="ctr"/>
           <a:lstStyle/>
           <a:p>
-            <a:pPr algn="ctr"/>
+            <a:pPr algn="ctr">
+              <a:defRPr>
+                <a:latin typeface="Roboto"/>
+              </a:defRPr>
+            </a:pPr>
           </a:p>
         </p:txBody>
       </p:sp>
@@ -7656,12 +7955,17 @@
           </a:bodyPr>
           <a:lstStyle/>
           <a:p>
+            <a:pPr>
+              <a:defRPr>
+                <a:latin typeface="Roboto"/>
+              </a:defRPr>
+            </a:pPr>
             <a:r>
               <a:rPr sz="1100" b="1">
                 <a:solidFill>
                   <a:srgbClr val="5F6F63"/>
                 </a:solidFill>
-                <a:latin typeface="Arial"/>
+                <a:latin typeface="Roboto"/>
               </a:rPr>
               <a:t>WHAT IT SHOWS</a:t>
             </a:r>
@@ -7690,12 +7994,17 @@
           </a:bodyPr>
           <a:lstStyle/>
           <a:p>
+            <a:pPr>
+              <a:defRPr>
+                <a:latin typeface="Roboto"/>
+              </a:defRPr>
+            </a:pPr>
             <a:r>
               <a:rPr sz="1600" b="0">
                 <a:solidFill>
                   <a:srgbClr val="25342A"/>
                 </a:solidFill>
-                <a:latin typeface="Arial"/>
+                <a:latin typeface="Roboto"/>
               </a:rPr>
               <a:t>1 of the 1 installation jobs invoiced in October so far made less than the 35.0% job gross margin target. The Morningside house air-con install made a 22.0% job gross margin: 131.5 h of technician time ($8,942) and $2,300 of subcontractors on a $33,000 job. Jobs need 31.1% gross margin just to cover overheads.</a:t>
             </a:r>
@@ -7743,7 +8052,11 @@
           <a:bodyPr rtlCol="0" anchor="ctr"/>
           <a:lstStyle/>
           <a:p>
-            <a:pPr algn="ctr"/>
+            <a:pPr algn="ctr">
+              <a:defRPr>
+                <a:latin typeface="Roboto"/>
+              </a:defRPr>
+            </a:pPr>
           </a:p>
         </p:txBody>
       </p:sp>
@@ -7769,12 +8082,17 @@
           </a:bodyPr>
           <a:lstStyle/>
           <a:p>
+            <a:pPr>
+              <a:defRPr>
+                <a:latin typeface="Roboto"/>
+              </a:defRPr>
+            </a:pPr>
             <a:r>
               <a:rPr sz="1100" b="1">
                 <a:solidFill>
                   <a:srgbClr val="5F6F63"/>
                 </a:solidFill>
-                <a:latin typeface="Arial"/>
+                <a:latin typeface="Roboto"/>
               </a:rPr>
               <a:t>WHAT YOU'D DO ABOUT IT</a:t>
             </a:r>
@@ -7803,12 +8121,17 @@
           </a:bodyPr>
           <a:lstStyle/>
           <a:p>
+            <a:pPr>
+              <a:defRPr>
+                <a:latin typeface="Roboto"/>
+              </a:defRPr>
+            </a:pPr>
             <a:r>
               <a:rPr sz="1600" b="0">
                 <a:solidFill>
                   <a:srgbClr val="25342A"/>
                 </a:solidFill>
-                <a:latin typeface="Arial"/>
+                <a:latin typeface="Roboto"/>
               </a:rPr>
               <a:t>Below the 31.1% overheads need: Morningside house air-con install (22.0%). Most profitable: Morningside house air-con install (22.0%).</a:t>
             </a:r>
@@ -7837,12 +8160,17 @@
           </a:bodyPr>
           <a:lstStyle/>
           <a:p>
+            <a:pPr>
+              <a:defRPr>
+                <a:latin typeface="Roboto"/>
+              </a:defRPr>
+            </a:pPr>
             <a:r>
               <a:rPr sz="900" b="0">
                 <a:solidFill>
                   <a:srgbClr val="5F6F63"/>
                 </a:solidFill>
-                <a:latin typeface="Arial"/>
+                <a:latin typeface="Roboto"/>
               </a:rPr>
               <a:t>job-margins.pptx</a:t>
             </a:r>
@@ -7871,13 +8199,17 @@
           </a:bodyPr>
           <a:lstStyle/>
           <a:p>
-            <a:pPr algn="ctr"/>
+            <a:pPr algn="ctr">
+              <a:defRPr>
+                <a:latin typeface="Roboto"/>
+              </a:defRPr>
+            </a:pPr>
             <a:r>
               <a:rPr sz="900" b="0">
                 <a:solidFill>
                   <a:srgbClr val="5F6F63"/>
                 </a:solidFill>
-                <a:latin typeface="Arial"/>
+                <a:latin typeface="Roboto"/>
               </a:rPr>
               <a:t>Data retrieved 2pm, Tue 6 Oct 2026 · Sample data</a:t>
             </a:r>
@@ -7906,13 +8238,17 @@
           </a:bodyPr>
           <a:lstStyle/>
           <a:p>
-            <a:pPr algn="r"/>
+            <a:pPr algn="r">
+              <a:defRPr>
+                <a:latin typeface="Roboto"/>
+              </a:defRPr>
+            </a:pPr>
             <a:r>
               <a:rPr sz="900" b="0">
                 <a:solidFill>
                   <a:srgbClr val="5F6F63"/>
                 </a:solidFill>
-                <a:latin typeface="Arial"/>
+                <a:latin typeface="Roboto"/>
               </a:rPr>
               <a:t>Slide 15 of 21</a:t>
             </a:r>
@@ -7976,7 +8312,11 @@
           <a:bodyPr rtlCol="0" anchor="ctr"/>
           <a:lstStyle/>
           <a:p>
-            <a:pPr algn="ctr"/>
+            <a:pPr algn="ctr">
+              <a:defRPr>
+                <a:latin typeface="Roboto"/>
+              </a:defRPr>
+            </a:pPr>
           </a:p>
         </p:txBody>
       </p:sp>
@@ -8002,12 +8342,17 @@
           </a:bodyPr>
           <a:lstStyle/>
           <a:p>
+            <a:pPr>
+              <a:defRPr>
+                <a:latin typeface="Roboto"/>
+              </a:defRPr>
+            </a:pPr>
             <a:r>
               <a:rPr sz="1000" b="0">
                 <a:solidFill>
                   <a:srgbClr val="5F6F63"/>
                 </a:solidFill>
-                <a:latin typeface="Arial"/>
+                <a:latin typeface="Roboto"/>
               </a:rPr>
               <a:t>Sample Electrical &amp; Air Pty Ltd · Which jobs actually make money?</a:t>
             </a:r>
@@ -8036,12 +8381,17 @@
           </a:bodyPr>
           <a:lstStyle/>
           <a:p>
+            <a:pPr>
+              <a:defRPr>
+                <a:latin typeface="Roboto"/>
+              </a:defRPr>
+            </a:pPr>
             <a:r>
               <a:rPr sz="2400" b="1">
                 <a:solidFill>
                   <a:srgbClr val="25342A"/>
                 </a:solidFill>
-                <a:latin typeface="Arial"/>
+                <a:latin typeface="Roboto"/>
               </a:rPr>
               <a:t>Headline numbers · Type of job: Call-outs and repairs</a:t>
             </a:r>
@@ -8089,7 +8439,11 @@
           <a:bodyPr rtlCol="0" anchor="ctr"/>
           <a:lstStyle/>
           <a:p>
-            <a:pPr algn="ctr"/>
+            <a:pPr algn="ctr">
+              <a:defRPr>
+                <a:latin typeface="Roboto"/>
+              </a:defRPr>
+            </a:pPr>
           </a:p>
         </p:txBody>
       </p:sp>
@@ -8115,12 +8469,17 @@
           </a:bodyPr>
           <a:lstStyle/>
           <a:p>
+            <a:pPr>
+              <a:defRPr>
+                <a:latin typeface="Roboto"/>
+              </a:defRPr>
+            </a:pPr>
             <a:r>
               <a:rPr sz="1200" b="0">
                 <a:solidFill>
                   <a:srgbClr val="5F6F63"/>
                 </a:solidFill>
-                <a:latin typeface="Arial"/>
+                <a:latin typeface="Roboto"/>
               </a:rPr>
               <a:t>Job gross margin, October so far · Call-outs and repairs</a:t>
             </a:r>
@@ -8149,12 +8508,17 @@
           </a:bodyPr>
           <a:lstStyle/>
           <a:p>
+            <a:pPr>
+              <a:defRPr>
+                <a:latin typeface="Roboto"/>
+              </a:defRPr>
+            </a:pPr>
             <a:r>
               <a:rPr sz="3000" b="1">
                 <a:solidFill>
                   <a:srgbClr val="2F7A5D"/>
                 </a:solidFill>
-                <a:latin typeface="Arial"/>
+                <a:latin typeface="Roboto"/>
               </a:rPr>
               <a:t>45.0%</a:t>
             </a:r>
@@ -8183,12 +8547,17 @@
           </a:bodyPr>
           <a:lstStyle/>
           <a:p>
+            <a:pPr>
+              <a:defRPr>
+                <a:latin typeface="Roboto"/>
+              </a:defRPr>
+            </a:pPr>
             <a:r>
               <a:rPr sz="1100" b="0">
                 <a:solidFill>
                   <a:srgbClr val="5F6F63"/>
                 </a:solidFill>
-                <a:latin typeface="Arial"/>
+                <a:latin typeface="Roboto"/>
               </a:rPr>
               <a:t>September 43.9%</a:t>
             </a:r>
@@ -8236,7 +8605,11 @@
           <a:bodyPr rtlCol="0" anchor="ctr"/>
           <a:lstStyle/>
           <a:p>
-            <a:pPr algn="ctr"/>
+            <a:pPr algn="ctr">
+              <a:defRPr>
+                <a:latin typeface="Roboto"/>
+              </a:defRPr>
+            </a:pPr>
           </a:p>
         </p:txBody>
       </p:sp>
@@ -8262,12 +8635,17 @@
           </a:bodyPr>
           <a:lstStyle/>
           <a:p>
+            <a:pPr>
+              <a:defRPr>
+                <a:latin typeface="Roboto"/>
+              </a:defRPr>
+            </a:pPr>
             <a:r>
               <a:rPr sz="1200" b="0">
                 <a:solidFill>
                   <a:srgbClr val="5F6F63"/>
                 </a:solidFill>
-                <a:latin typeface="Arial"/>
+                <a:latin typeface="Roboto"/>
               </a:rPr>
               <a:t>Technician time charged, October so far</a:t>
             </a:r>
@@ -8296,12 +8674,17 @@
           </a:bodyPr>
           <a:lstStyle/>
           <a:p>
+            <a:pPr>
+              <a:defRPr>
+                <a:latin typeface="Roboto"/>
+              </a:defRPr>
+            </a:pPr>
             <a:r>
               <a:rPr sz="3000" b="1">
                 <a:solidFill>
                   <a:srgbClr val="2F7A5D"/>
                 </a:solidFill>
-                <a:latin typeface="Arial"/>
+                <a:latin typeface="Roboto"/>
               </a:rPr>
               <a:t>$2,465</a:t>
             </a:r>
@@ -8330,12 +8713,17 @@
           </a:bodyPr>
           <a:lstStyle/>
           <a:p>
+            <a:pPr>
+              <a:defRPr>
+                <a:latin typeface="Roboto"/>
+              </a:defRPr>
+            </a:pPr>
             <a:r>
               <a:rPr sz="1100" b="0">
                 <a:solidFill>
                   <a:srgbClr val="5F6F63"/>
                 </a:solidFill>
-                <a:latin typeface="Arial"/>
+                <a:latin typeface="Roboto"/>
               </a:rPr>
               <a:t>73.0% of call-out revenue</a:t>
             </a:r>
@@ -8383,7 +8771,11 @@
           <a:bodyPr rtlCol="0" anchor="ctr"/>
           <a:lstStyle/>
           <a:p>
-            <a:pPr algn="ctr"/>
+            <a:pPr algn="ctr">
+              <a:defRPr>
+                <a:latin typeface="Roboto"/>
+              </a:defRPr>
+            </a:pPr>
           </a:p>
         </p:txBody>
       </p:sp>
@@ -8409,12 +8801,17 @@
           </a:bodyPr>
           <a:lstStyle/>
           <a:p>
+            <a:pPr>
+              <a:defRPr>
+                <a:latin typeface="Roboto"/>
+              </a:defRPr>
+            </a:pPr>
             <a:r>
               <a:rPr sz="1200" b="0">
                 <a:solidFill>
                   <a:srgbClr val="5F6F63"/>
                 </a:solidFill>
-                <a:latin typeface="Arial"/>
+                <a:latin typeface="Roboto"/>
               </a:rPr>
               <a:t>Materials charged, October so far</a:t>
             </a:r>
@@ -8443,12 +8840,17 @@
           </a:bodyPr>
           <a:lstStyle/>
           <a:p>
+            <a:pPr>
+              <a:defRPr>
+                <a:latin typeface="Roboto"/>
+              </a:defRPr>
+            </a:pPr>
             <a:r>
               <a:rPr sz="3000" b="1">
                 <a:solidFill>
                   <a:srgbClr val="2F7A5D"/>
                 </a:solidFill>
-                <a:latin typeface="Arial"/>
+                <a:latin typeface="Roboto"/>
               </a:rPr>
               <a:t>$910</a:t>
             </a:r>
@@ -8477,12 +8879,17 @@
           </a:bodyPr>
           <a:lstStyle/>
           <a:p>
+            <a:pPr>
+              <a:defRPr>
+                <a:latin typeface="Roboto"/>
+              </a:defRPr>
+            </a:pPr>
             <a:r>
               <a:rPr sz="1100" b="0">
                 <a:solidFill>
                   <a:srgbClr val="5F6F63"/>
                 </a:solidFill>
-                <a:latin typeface="Arial"/>
+                <a:latin typeface="Roboto"/>
               </a:rPr>
               <a:t>$700 at cost, plus 30%</a:t>
             </a:r>
@@ -8511,12 +8918,17 @@
           </a:bodyPr>
           <a:lstStyle/>
           <a:p>
+            <a:pPr>
+              <a:defRPr>
+                <a:latin typeface="Roboto"/>
+              </a:defRPr>
+            </a:pPr>
             <a:r>
               <a:rPr sz="900" b="0">
                 <a:solidFill>
                   <a:srgbClr val="5F6F63"/>
                 </a:solidFill>
-                <a:latin typeface="Arial"/>
+                <a:latin typeface="Roboto"/>
               </a:rPr>
               <a:t>job-margins.pptx</a:t>
             </a:r>
@@ -8545,13 +8957,17 @@
           </a:bodyPr>
           <a:lstStyle/>
           <a:p>
-            <a:pPr algn="ctr"/>
+            <a:pPr algn="ctr">
+              <a:defRPr>
+                <a:latin typeface="Roboto"/>
+              </a:defRPr>
+            </a:pPr>
             <a:r>
               <a:rPr sz="900" b="0">
                 <a:solidFill>
                   <a:srgbClr val="5F6F63"/>
                 </a:solidFill>
-                <a:latin typeface="Arial"/>
+                <a:latin typeface="Roboto"/>
               </a:rPr>
               <a:t>Data retrieved 2pm, Tue 6 Oct 2026 · Sample data</a:t>
             </a:r>
@@ -8580,13 +8996,17 @@
           </a:bodyPr>
           <a:lstStyle/>
           <a:p>
-            <a:pPr algn="r"/>
+            <a:pPr algn="r">
+              <a:defRPr>
+                <a:latin typeface="Roboto"/>
+              </a:defRPr>
+            </a:pPr>
             <a:r>
               <a:rPr sz="900" b="0">
                 <a:solidFill>
                   <a:srgbClr val="5F6F63"/>
                 </a:solidFill>
-                <a:latin typeface="Arial"/>
+                <a:latin typeface="Roboto"/>
               </a:rPr>
               <a:t>Slide 16 of 21</a:t>
             </a:r>
@@ -8650,7 +9070,11 @@
           <a:bodyPr rtlCol="0" anchor="ctr"/>
           <a:lstStyle/>
           <a:p>
-            <a:pPr algn="ctr"/>
+            <a:pPr algn="ctr">
+              <a:defRPr>
+                <a:latin typeface="Roboto"/>
+              </a:defRPr>
+            </a:pPr>
           </a:p>
         </p:txBody>
       </p:sp>
@@ -8676,12 +9100,17 @@
           </a:bodyPr>
           <a:lstStyle/>
           <a:p>
+            <a:pPr>
+              <a:defRPr>
+                <a:latin typeface="Roboto"/>
+              </a:defRPr>
+            </a:pPr>
             <a:r>
               <a:rPr sz="1000" b="0">
                 <a:solidFill>
                   <a:srgbClr val="5F6F63"/>
                 </a:solidFill>
-                <a:latin typeface="Arial"/>
+                <a:latin typeface="Roboto"/>
               </a:rPr>
               <a:t>Sample Electrical &amp; Air Pty Ltd · Which jobs actually make money?</a:t>
             </a:r>
@@ -8710,12 +9139,17 @@
           </a:bodyPr>
           <a:lstStyle/>
           <a:p>
+            <a:pPr>
+              <a:defRPr>
+                <a:latin typeface="Roboto"/>
+              </a:defRPr>
+            </a:pPr>
             <a:r>
               <a:rPr sz="2400" b="1">
                 <a:solidFill>
                   <a:srgbClr val="25342A"/>
                 </a:solidFill>
-                <a:latin typeface="Arial"/>
+                <a:latin typeface="Roboto"/>
               </a:rPr>
               <a:t>Job gross margin on call-outs by length, October 2026 to date · Gross margin % · Type of job: Call-outs and repairs</a:t>
             </a:r>
@@ -8744,12 +9178,17 @@
           </a:bodyPr>
           <a:lstStyle/>
           <a:p>
+            <a:pPr>
+              <a:defRPr>
+                <a:latin typeface="Roboto"/>
+              </a:defRPr>
+            </a:pPr>
             <a:r>
               <a:rPr sz="1200" b="0">
                 <a:solidFill>
                   <a:srgbClr val="5F6F63"/>
                 </a:solidFill>
-                <a:latin typeface="Arial"/>
+                <a:latin typeface="Roboto"/>
               </a:rPr>
               <a:t>Charged at $145/hour plus materials at cost × 1.3; technician time at $68/hour.</a:t>
             </a:r>
@@ -8796,12 +9235,17 @@
           </a:bodyPr>
           <a:lstStyle/>
           <a:p>
+            <a:pPr>
+              <a:defRPr>
+                <a:latin typeface="Roboto"/>
+              </a:defRPr>
+            </a:pPr>
             <a:r>
               <a:rPr sz="1000" b="0">
                 <a:solidFill>
                   <a:srgbClr val="5F6F63"/>
                 </a:solidFill>
-                <a:latin typeface="Arial"/>
+                <a:latin typeface="Roboto"/>
               </a:rPr>
               <a:t>Target 35.0%  ·  grey = below target</a:t>
             </a:r>
@@ -8830,12 +9274,17 @@
           </a:bodyPr>
           <a:lstStyle/>
           <a:p>
+            <a:pPr>
+              <a:defRPr>
+                <a:latin typeface="Roboto"/>
+              </a:defRPr>
+            </a:pPr>
             <a:r>
               <a:rPr sz="900" b="0">
                 <a:solidFill>
                   <a:srgbClr val="5F6F63"/>
                 </a:solidFill>
-                <a:latin typeface="Arial"/>
+                <a:latin typeface="Roboto"/>
               </a:rPr>
               <a:t>job-margins.pptx</a:t>
             </a:r>
@@ -8864,13 +9313,17 @@
           </a:bodyPr>
           <a:lstStyle/>
           <a:p>
-            <a:pPr algn="ctr"/>
+            <a:pPr algn="ctr">
+              <a:defRPr>
+                <a:latin typeface="Roboto"/>
+              </a:defRPr>
+            </a:pPr>
             <a:r>
               <a:rPr sz="900" b="0">
                 <a:solidFill>
                   <a:srgbClr val="5F6F63"/>
                 </a:solidFill>
-                <a:latin typeface="Arial"/>
+                <a:latin typeface="Roboto"/>
               </a:rPr>
               <a:t>Data retrieved 2pm, Tue 6 Oct 2026 · Sample data</a:t>
             </a:r>
@@ -8899,13 +9352,17 @@
           </a:bodyPr>
           <a:lstStyle/>
           <a:p>
-            <a:pPr algn="r"/>
+            <a:pPr algn="r">
+              <a:defRPr>
+                <a:latin typeface="Roboto"/>
+              </a:defRPr>
+            </a:pPr>
             <a:r>
               <a:rPr sz="900" b="0">
                 <a:solidFill>
                   <a:srgbClr val="5F6F63"/>
                 </a:solidFill>
-                <a:latin typeface="Arial"/>
+                <a:latin typeface="Roboto"/>
               </a:rPr>
               <a:t>Slide 17 of 21</a:t>
             </a:r>
@@ -8969,7 +9426,11 @@
           <a:bodyPr rtlCol="0" anchor="ctr"/>
           <a:lstStyle/>
           <a:p>
-            <a:pPr algn="ctr"/>
+            <a:pPr algn="ctr">
+              <a:defRPr>
+                <a:latin typeface="Roboto"/>
+              </a:defRPr>
+            </a:pPr>
           </a:p>
         </p:txBody>
       </p:sp>
@@ -8995,12 +9456,17 @@
           </a:bodyPr>
           <a:lstStyle/>
           <a:p>
+            <a:pPr>
+              <a:defRPr>
+                <a:latin typeface="Roboto"/>
+              </a:defRPr>
+            </a:pPr>
             <a:r>
               <a:rPr sz="1000" b="0">
                 <a:solidFill>
                   <a:srgbClr val="5F6F63"/>
                 </a:solidFill>
-                <a:latin typeface="Arial"/>
+                <a:latin typeface="Roboto"/>
               </a:rPr>
               <a:t>Sample Electrical &amp; Air Pty Ltd · Which jobs actually make money?</a:t>
             </a:r>
@@ -9029,12 +9495,17 @@
           </a:bodyPr>
           <a:lstStyle/>
           <a:p>
+            <a:pPr>
+              <a:defRPr>
+                <a:latin typeface="Roboto"/>
+              </a:defRPr>
+            </a:pPr>
             <a:r>
               <a:rPr sz="2400" b="1">
                 <a:solidFill>
                   <a:srgbClr val="25342A"/>
                 </a:solidFill>
-                <a:latin typeface="Arial"/>
+                <a:latin typeface="Roboto"/>
               </a:rPr>
               <a:t>Job gross margin on call-outs by length, October 2026 to date · Gross margin $ · Type of job: Call-outs and repairs</a:t>
             </a:r>
@@ -9063,12 +9534,17 @@
           </a:bodyPr>
           <a:lstStyle/>
           <a:p>
+            <a:pPr>
+              <a:defRPr>
+                <a:latin typeface="Roboto"/>
+              </a:defRPr>
+            </a:pPr>
             <a:r>
               <a:rPr sz="1200" b="0">
                 <a:solidFill>
                   <a:srgbClr val="5F6F63"/>
                 </a:solidFill>
-                <a:latin typeface="Arial"/>
+                <a:latin typeface="Roboto"/>
               </a:rPr>
               <a:t>Charged at $145/hour plus materials at cost × 1.3; technician time at $68/hour.</a:t>
             </a:r>
@@ -9115,12 +9591,17 @@
           </a:bodyPr>
           <a:lstStyle/>
           <a:p>
+            <a:pPr>
+              <a:defRPr>
+                <a:latin typeface="Roboto"/>
+              </a:defRPr>
+            </a:pPr>
             <a:r>
               <a:rPr sz="900" b="0">
                 <a:solidFill>
                   <a:srgbClr val="5F6F63"/>
                 </a:solidFill>
-                <a:latin typeface="Arial"/>
+                <a:latin typeface="Roboto"/>
               </a:rPr>
               <a:t>job-margins.pptx</a:t>
             </a:r>
@@ -9149,13 +9630,17 @@
           </a:bodyPr>
           <a:lstStyle/>
           <a:p>
-            <a:pPr algn="ctr"/>
+            <a:pPr algn="ctr">
+              <a:defRPr>
+                <a:latin typeface="Roboto"/>
+              </a:defRPr>
+            </a:pPr>
             <a:r>
               <a:rPr sz="900" b="0">
                 <a:solidFill>
                   <a:srgbClr val="5F6F63"/>
                 </a:solidFill>
-                <a:latin typeface="Arial"/>
+                <a:latin typeface="Roboto"/>
               </a:rPr>
               <a:t>Data retrieved 2pm, Tue 6 Oct 2026 · Sample data</a:t>
             </a:r>
@@ -9184,13 +9669,17 @@
           </a:bodyPr>
           <a:lstStyle/>
           <a:p>
-            <a:pPr algn="r"/>
+            <a:pPr algn="r">
+              <a:defRPr>
+                <a:latin typeface="Roboto"/>
+              </a:defRPr>
+            </a:pPr>
             <a:r>
               <a:rPr sz="900" b="0">
                 <a:solidFill>
                   <a:srgbClr val="5F6F63"/>
                 </a:solidFill>
-                <a:latin typeface="Arial"/>
+                <a:latin typeface="Roboto"/>
               </a:rPr>
               <a:t>Slide 18 of 21</a:t>
             </a:r>
@@ -9254,7 +9743,11 @@
           <a:bodyPr rtlCol="0" anchor="ctr"/>
           <a:lstStyle/>
           <a:p>
-            <a:pPr algn="ctr"/>
+            <a:pPr algn="ctr">
+              <a:defRPr>
+                <a:latin typeface="Roboto"/>
+              </a:defRPr>
+            </a:pPr>
           </a:p>
         </p:txBody>
       </p:sp>
@@ -9280,12 +9773,17 @@
           </a:bodyPr>
           <a:lstStyle/>
           <a:p>
+            <a:pPr>
+              <a:defRPr>
+                <a:latin typeface="Roboto"/>
+              </a:defRPr>
+            </a:pPr>
             <a:r>
               <a:rPr sz="1000" b="0">
                 <a:solidFill>
                   <a:srgbClr val="5F6F63"/>
                 </a:solidFill>
-                <a:latin typeface="Arial"/>
+                <a:latin typeface="Roboto"/>
               </a:rPr>
               <a:t>Sample Electrical &amp; Air Pty Ltd · Which jobs actually make money?</a:t>
             </a:r>
@@ -9314,12 +9812,17 @@
           </a:bodyPr>
           <a:lstStyle/>
           <a:p>
+            <a:pPr>
+              <a:defRPr>
+                <a:latin typeface="Roboto"/>
+              </a:defRPr>
+            </a:pPr>
             <a:r>
               <a:rPr sz="2400" b="1">
                 <a:solidFill>
                   <a:srgbClr val="25342A"/>
                 </a:solidFill>
-                <a:latin typeface="Arial"/>
+                <a:latin typeface="Roboto"/>
               </a:rPr>
               <a:t>What it shows · Type of job: Call-outs and repairs</a:t>
             </a:r>
@@ -9367,7 +9870,11 @@
           <a:bodyPr rtlCol="0" anchor="ctr"/>
           <a:lstStyle/>
           <a:p>
-            <a:pPr algn="ctr"/>
+            <a:pPr algn="ctr">
+              <a:defRPr>
+                <a:latin typeface="Roboto"/>
+              </a:defRPr>
+            </a:pPr>
           </a:p>
         </p:txBody>
       </p:sp>
@@ -9393,12 +9900,17 @@
           </a:bodyPr>
           <a:lstStyle/>
           <a:p>
+            <a:pPr>
+              <a:defRPr>
+                <a:latin typeface="Roboto"/>
+              </a:defRPr>
+            </a:pPr>
             <a:r>
               <a:rPr sz="1100" b="1">
                 <a:solidFill>
                   <a:srgbClr val="5F6F63"/>
                 </a:solidFill>
-                <a:latin typeface="Arial"/>
+                <a:latin typeface="Roboto"/>
               </a:rPr>
               <a:t>WHAT IT SHOWS</a:t>
             </a:r>
@@ -9427,12 +9939,17 @@
           </a:bodyPr>
           <a:lstStyle/>
           <a:p>
+            <a:pPr>
+              <a:defRPr>
+                <a:latin typeface="Roboto"/>
+              </a:defRPr>
+            </a:pPr>
             <a:r>
               <a:rPr sz="1600" b="0">
                 <a:solidFill>
                   <a:srgbClr val="25342A"/>
                 </a:solidFill>
-                <a:latin typeface="Arial"/>
+                <a:latin typeface="Roboto"/>
               </a:rPr>
               <a:t>7 call-outs in October so far billed $2,465 of technician time and $910 of materials ($700 at cost plus 30%), and made a 45.0% job gross margin between them. Gross margins run from 41.0% to 48.1% by length: the hourly rate covers technician time comfortably, so the gross margin mostly moves with how much material goes on the van.</a:t>
             </a:r>
@@ -9480,7 +9997,11 @@
           <a:bodyPr rtlCol="0" anchor="ctr"/>
           <a:lstStyle/>
           <a:p>
-            <a:pPr algn="ctr"/>
+            <a:pPr algn="ctr">
+              <a:defRPr>
+                <a:latin typeface="Roboto"/>
+              </a:defRPr>
+            </a:pPr>
           </a:p>
         </p:txBody>
       </p:sp>
@@ -9506,12 +10027,17 @@
           </a:bodyPr>
           <a:lstStyle/>
           <a:p>
+            <a:pPr>
+              <a:defRPr>
+                <a:latin typeface="Roboto"/>
+              </a:defRPr>
+            </a:pPr>
             <a:r>
               <a:rPr sz="1100" b="1">
                 <a:solidFill>
                   <a:srgbClr val="5F6F63"/>
                 </a:solidFill>
-                <a:latin typeface="Arial"/>
+                <a:latin typeface="Roboto"/>
               </a:rPr>
               <a:t>WHAT YOU'D DO ABOUT IT</a:t>
             </a:r>
@@ -9540,12 +10066,17 @@
           </a:bodyPr>
           <a:lstStyle/>
           <a:p>
+            <a:pPr>
+              <a:defRPr>
+                <a:latin typeface="Roboto"/>
+              </a:defRPr>
+            </a:pPr>
             <a:r>
               <a:rPr sz="1600" b="0">
                 <a:solidFill>
                   <a:srgbClr val="25342A"/>
                 </a:solidFill>
-                <a:latin typeface="Arial"/>
+                <a:latin typeface="Roboto"/>
               </a:rPr>
               <a:t>Call-outs: 45.0% gross margin, 13.9 points clear of the 31.1% overheads need.</a:t>
             </a:r>
@@ -9574,12 +10105,17 @@
           </a:bodyPr>
           <a:lstStyle/>
           <a:p>
+            <a:pPr>
+              <a:defRPr>
+                <a:latin typeface="Roboto"/>
+              </a:defRPr>
+            </a:pPr>
             <a:r>
               <a:rPr sz="900" b="0">
                 <a:solidFill>
                   <a:srgbClr val="5F6F63"/>
                 </a:solidFill>
-                <a:latin typeface="Arial"/>
+                <a:latin typeface="Roboto"/>
               </a:rPr>
               <a:t>job-margins.pptx</a:t>
             </a:r>
@@ -9608,13 +10144,17 @@
           </a:bodyPr>
           <a:lstStyle/>
           <a:p>
-            <a:pPr algn="ctr"/>
+            <a:pPr algn="ctr">
+              <a:defRPr>
+                <a:latin typeface="Roboto"/>
+              </a:defRPr>
+            </a:pPr>
             <a:r>
               <a:rPr sz="900" b="0">
                 <a:solidFill>
                   <a:srgbClr val="5F6F63"/>
                 </a:solidFill>
-                <a:latin typeface="Arial"/>
+                <a:latin typeface="Roboto"/>
               </a:rPr>
               <a:t>Data retrieved 2pm, Tue 6 Oct 2026 · Sample data</a:t>
             </a:r>
@@ -9643,13 +10183,17 @@
           </a:bodyPr>
           <a:lstStyle/>
           <a:p>
-            <a:pPr algn="r"/>
+            <a:pPr algn="r">
+              <a:defRPr>
+                <a:latin typeface="Roboto"/>
+              </a:defRPr>
+            </a:pPr>
             <a:r>
               <a:rPr sz="900" b="0">
                 <a:solidFill>
                   <a:srgbClr val="5F6F63"/>
                 </a:solidFill>
-                <a:latin typeface="Arial"/>
+                <a:latin typeface="Roboto"/>
               </a:rPr>
               <a:t>Slide 19 of 21</a:t>
             </a:r>
@@ -9713,7 +10257,11 @@
           <a:bodyPr rtlCol="0" anchor="ctr"/>
           <a:lstStyle/>
           <a:p>
-            <a:pPr algn="ctr"/>
+            <a:pPr algn="ctr">
+              <a:defRPr>
+                <a:latin typeface="Roboto"/>
+              </a:defRPr>
+            </a:pPr>
           </a:p>
         </p:txBody>
       </p:sp>
@@ -9739,12 +10287,17 @@
           </a:bodyPr>
           <a:lstStyle/>
           <a:p>
+            <a:pPr>
+              <a:defRPr>
+                <a:latin typeface="Roboto"/>
+              </a:defRPr>
+            </a:pPr>
             <a:r>
               <a:rPr sz="1000" b="0">
                 <a:solidFill>
                   <a:srgbClr val="5F6F63"/>
                 </a:solidFill>
-                <a:latin typeface="Arial"/>
+                <a:latin typeface="Roboto"/>
               </a:rPr>
               <a:t>Sample Electrical &amp; Air Pty Ltd · Which jobs actually make money?</a:t>
             </a:r>
@@ -9773,12 +10326,17 @@
           </a:bodyPr>
           <a:lstStyle/>
           <a:p>
+            <a:pPr>
+              <a:defRPr>
+                <a:latin typeface="Roboto"/>
+              </a:defRPr>
+            </a:pPr>
             <a:r>
               <a:rPr sz="2400" b="1">
                 <a:solidFill>
                   <a:srgbClr val="25342A"/>
                 </a:solidFill>
-                <a:latin typeface="Arial"/>
+                <a:latin typeface="Roboto"/>
               </a:rPr>
               <a:t>Gross margin, not profit</a:t>
             </a:r>
@@ -9826,7 +10384,11 @@
           <a:bodyPr rtlCol="0" anchor="ctr"/>
           <a:lstStyle/>
           <a:p>
-            <a:pPr algn="ctr"/>
+            <a:pPr algn="ctr">
+              <a:defRPr>
+                <a:latin typeface="Roboto"/>
+              </a:defRPr>
+            </a:pPr>
           </a:p>
         </p:txBody>
       </p:sp>
@@ -9852,12 +10414,17 @@
           </a:bodyPr>
           <a:lstStyle/>
           <a:p>
+            <a:pPr>
+              <a:defRPr>
+                <a:latin typeface="Roboto"/>
+              </a:defRPr>
+            </a:pPr>
             <a:r>
               <a:rPr sz="1100" b="1">
                 <a:solidFill>
                   <a:srgbClr val="5F6F63"/>
                 </a:solidFill>
-                <a:latin typeface="Arial"/>
+                <a:latin typeface="Roboto"/>
               </a:rPr>
               <a:t>GROSS MARGIN, NOT PROFIT</a:t>
             </a:r>
@@ -9886,12 +10453,17 @@
           </a:bodyPr>
           <a:lstStyle/>
           <a:p>
+            <a:pPr>
+              <a:defRPr>
+                <a:latin typeface="Roboto"/>
+              </a:defRPr>
+            </a:pPr>
             <a:r>
               <a:rPr sz="1600" b="0">
                 <a:solidFill>
                   <a:srgbClr val="25342A"/>
                 </a:solidFill>
-                <a:latin typeface="Arial"/>
+                <a:latin typeface="Roboto"/>
               </a:rPr>
               <a:t>Gross margin is not profit. Job gross margin = revenue less materials, subcontractors and technician time charged to the job at $68 an hour (wages and all on-costs). Not included: technician time not charged to any job (travel, training, waiting), and overheads (office wages, marketing, vehicles, rent, insurance, IT, depreciation, interest). Profit is what's left after those. Wages always include all on-costs: super, payroll tax, workers' compensation insurance and leave.</a:t>
             </a:r>
@@ -9920,12 +10492,17 @@
           </a:bodyPr>
           <a:lstStyle/>
           <a:p>
+            <a:pPr>
+              <a:defRPr>
+                <a:latin typeface="Roboto"/>
+              </a:defRPr>
+            </a:pPr>
             <a:r>
               <a:rPr sz="900" b="0">
                 <a:solidFill>
                   <a:srgbClr val="5F6F63"/>
                 </a:solidFill>
-                <a:latin typeface="Arial"/>
+                <a:latin typeface="Roboto"/>
               </a:rPr>
               <a:t>job-margins.pptx</a:t>
             </a:r>
@@ -9954,13 +10531,17 @@
           </a:bodyPr>
           <a:lstStyle/>
           <a:p>
-            <a:pPr algn="ctr"/>
+            <a:pPr algn="ctr">
+              <a:defRPr>
+                <a:latin typeface="Roboto"/>
+              </a:defRPr>
+            </a:pPr>
             <a:r>
               <a:rPr sz="900" b="0">
                 <a:solidFill>
                   <a:srgbClr val="5F6F63"/>
                 </a:solidFill>
-                <a:latin typeface="Arial"/>
+                <a:latin typeface="Roboto"/>
               </a:rPr>
               <a:t>Data retrieved 2pm, Tue 6 Oct 2026 · Sample data</a:t>
             </a:r>
@@ -9989,13 +10570,17 @@
           </a:bodyPr>
           <a:lstStyle/>
           <a:p>
-            <a:pPr algn="r"/>
+            <a:pPr algn="r">
+              <a:defRPr>
+                <a:latin typeface="Roboto"/>
+              </a:defRPr>
+            </a:pPr>
             <a:r>
               <a:rPr sz="900" b="0">
                 <a:solidFill>
                   <a:srgbClr val="5F6F63"/>
                 </a:solidFill>
-                <a:latin typeface="Arial"/>
+                <a:latin typeface="Roboto"/>
               </a:rPr>
               <a:t>Slide 2 of 21</a:t>
             </a:r>
@@ -10059,7 +10644,11 @@
           <a:bodyPr rtlCol="0" anchor="ctr"/>
           <a:lstStyle/>
           <a:p>
-            <a:pPr algn="ctr"/>
+            <a:pPr algn="ctr">
+              <a:defRPr>
+                <a:latin typeface="Roboto"/>
+              </a:defRPr>
+            </a:pPr>
           </a:p>
         </p:txBody>
       </p:sp>
@@ -10085,12 +10674,17 @@
           </a:bodyPr>
           <a:lstStyle/>
           <a:p>
+            <a:pPr>
+              <a:defRPr>
+                <a:latin typeface="Roboto"/>
+              </a:defRPr>
+            </a:pPr>
             <a:r>
               <a:rPr sz="1000" b="0">
                 <a:solidFill>
                   <a:srgbClr val="5F6F63"/>
                 </a:solidFill>
-                <a:latin typeface="Arial"/>
+                <a:latin typeface="Roboto"/>
               </a:rPr>
               <a:t>Sample Electrical &amp; Air Pty Ltd · Which jobs actually make money?</a:t>
             </a:r>
@@ -10119,12 +10713,17 @@
           </a:bodyPr>
           <a:lstStyle/>
           <a:p>
+            <a:pPr>
+              <a:defRPr>
+                <a:latin typeface="Roboto"/>
+              </a:defRPr>
+            </a:pPr>
             <a:r>
               <a:rPr sz="2400" b="1">
                 <a:solidFill>
                   <a:srgbClr val="25342A"/>
                 </a:solidFill>
-                <a:latin typeface="Arial"/>
+                <a:latin typeface="Roboto"/>
               </a:rPr>
               <a:t>Job gross margin by month · Gross margin % · Every type of job at once</a:t>
             </a:r>
@@ -10153,12 +10752,17 @@
           </a:bodyPr>
           <a:lstStyle/>
           <a:p>
+            <a:pPr>
+              <a:defRPr>
+                <a:latin typeface="Roboto"/>
+              </a:defRPr>
+            </a:pPr>
             <a:r>
               <a:rPr sz="1200" b="0">
                 <a:solidFill>
                   <a:srgbClr val="5F6F63"/>
                 </a:solidFill>
-                <a:latin typeface="Arial"/>
+                <a:latin typeface="Roboto"/>
               </a:rPr>
               <a:t>Tap a month for its workings.</a:t>
             </a:r>
@@ -10205,12 +10809,17 @@
           </a:bodyPr>
           <a:lstStyle/>
           <a:p>
+            <a:pPr>
+              <a:defRPr>
+                <a:latin typeface="Roboto"/>
+              </a:defRPr>
+            </a:pPr>
             <a:r>
               <a:rPr sz="900" b="0">
                 <a:solidFill>
                   <a:srgbClr val="5F6F63"/>
                 </a:solidFill>
-                <a:latin typeface="Arial"/>
+                <a:latin typeface="Roboto"/>
               </a:rPr>
               <a:t>job-margins.pptx</a:t>
             </a:r>
@@ -10239,13 +10848,17 @@
           </a:bodyPr>
           <a:lstStyle/>
           <a:p>
-            <a:pPr algn="ctr"/>
+            <a:pPr algn="ctr">
+              <a:defRPr>
+                <a:latin typeface="Roboto"/>
+              </a:defRPr>
+            </a:pPr>
             <a:r>
               <a:rPr sz="900" b="0">
                 <a:solidFill>
                   <a:srgbClr val="5F6F63"/>
                 </a:solidFill>
-                <a:latin typeface="Arial"/>
+                <a:latin typeface="Roboto"/>
               </a:rPr>
               <a:t>Data retrieved 2pm, Tue 6 Oct 2026 · Sample data</a:t>
             </a:r>
@@ -10274,13 +10887,17 @@
           </a:bodyPr>
           <a:lstStyle/>
           <a:p>
-            <a:pPr algn="r"/>
+            <a:pPr algn="r">
+              <a:defRPr>
+                <a:latin typeface="Roboto"/>
+              </a:defRPr>
+            </a:pPr>
             <a:r>
               <a:rPr sz="900" b="0">
                 <a:solidFill>
                   <a:srgbClr val="5F6F63"/>
                 </a:solidFill>
-                <a:latin typeface="Arial"/>
+                <a:latin typeface="Roboto"/>
               </a:rPr>
               <a:t>Slide 20 of 21</a:t>
             </a:r>
@@ -10344,7 +10961,11 @@
           <a:bodyPr rtlCol="0" anchor="ctr"/>
           <a:lstStyle/>
           <a:p>
-            <a:pPr algn="ctr"/>
+            <a:pPr algn="ctr">
+              <a:defRPr>
+                <a:latin typeface="Roboto"/>
+              </a:defRPr>
+            </a:pPr>
           </a:p>
         </p:txBody>
       </p:sp>
@@ -10370,12 +10991,17 @@
           </a:bodyPr>
           <a:lstStyle/>
           <a:p>
+            <a:pPr>
+              <a:defRPr>
+                <a:latin typeface="Roboto"/>
+              </a:defRPr>
+            </a:pPr>
             <a:r>
               <a:rPr sz="1000" b="0">
                 <a:solidFill>
                   <a:srgbClr val="5F6F63"/>
                 </a:solidFill>
-                <a:latin typeface="Arial"/>
+                <a:latin typeface="Roboto"/>
               </a:rPr>
               <a:t>Sample Electrical &amp; Air Pty Ltd · Which jobs actually make money?</a:t>
             </a:r>
@@ -10404,12 +11030,17 @@
           </a:bodyPr>
           <a:lstStyle/>
           <a:p>
+            <a:pPr>
+              <a:defRPr>
+                <a:latin typeface="Roboto"/>
+              </a:defRPr>
+            </a:pPr>
             <a:r>
               <a:rPr sz="2400" b="1">
                 <a:solidFill>
                   <a:srgbClr val="25342A"/>
                 </a:solidFill>
-                <a:latin typeface="Arial"/>
+                <a:latin typeface="Roboto"/>
               </a:rPr>
               <a:t>Job gross margin by month · Gross margin $ · Every type of job at once</a:t>
             </a:r>
@@ -10438,12 +11069,17 @@
           </a:bodyPr>
           <a:lstStyle/>
           <a:p>
+            <a:pPr>
+              <a:defRPr>
+                <a:latin typeface="Roboto"/>
+              </a:defRPr>
+            </a:pPr>
             <a:r>
               <a:rPr sz="1200" b="0">
                 <a:solidFill>
                   <a:srgbClr val="5F6F63"/>
                 </a:solidFill>
-                <a:latin typeface="Arial"/>
+                <a:latin typeface="Roboto"/>
               </a:rPr>
               <a:t>Tap a month for its workings.</a:t>
             </a:r>
@@ -10490,12 +11126,17 @@
           </a:bodyPr>
           <a:lstStyle/>
           <a:p>
+            <a:pPr>
+              <a:defRPr>
+                <a:latin typeface="Roboto"/>
+              </a:defRPr>
+            </a:pPr>
             <a:r>
               <a:rPr sz="900" b="0">
                 <a:solidFill>
                   <a:srgbClr val="5F6F63"/>
                 </a:solidFill>
-                <a:latin typeface="Arial"/>
+                <a:latin typeface="Roboto"/>
               </a:rPr>
               <a:t>job-margins.pptx</a:t>
             </a:r>
@@ -10524,13 +11165,17 @@
           </a:bodyPr>
           <a:lstStyle/>
           <a:p>
-            <a:pPr algn="ctr"/>
+            <a:pPr algn="ctr">
+              <a:defRPr>
+                <a:latin typeface="Roboto"/>
+              </a:defRPr>
+            </a:pPr>
             <a:r>
               <a:rPr sz="900" b="0">
                 <a:solidFill>
                   <a:srgbClr val="5F6F63"/>
                 </a:solidFill>
-                <a:latin typeface="Arial"/>
+                <a:latin typeface="Roboto"/>
               </a:rPr>
               <a:t>Data retrieved 2pm, Tue 6 Oct 2026 · Sample data</a:t>
             </a:r>
@@ -10559,13 +11204,17 @@
           </a:bodyPr>
           <a:lstStyle/>
           <a:p>
-            <a:pPr algn="r"/>
+            <a:pPr algn="r">
+              <a:defRPr>
+                <a:latin typeface="Roboto"/>
+              </a:defRPr>
+            </a:pPr>
             <a:r>
               <a:rPr sz="900" b="0">
                 <a:solidFill>
                   <a:srgbClr val="5F6F63"/>
                 </a:solidFill>
-                <a:latin typeface="Arial"/>
+                <a:latin typeface="Roboto"/>
               </a:rPr>
               <a:t>Slide 21 of 21</a:t>
             </a:r>
@@ -10629,7 +11278,11 @@
           <a:bodyPr rtlCol="0" anchor="ctr"/>
           <a:lstStyle/>
           <a:p>
-            <a:pPr algn="ctr"/>
+            <a:pPr algn="ctr">
+              <a:defRPr>
+                <a:latin typeface="Roboto"/>
+              </a:defRPr>
+            </a:pPr>
           </a:p>
         </p:txBody>
       </p:sp>
@@ -10655,12 +11308,17 @@
           </a:bodyPr>
           <a:lstStyle/>
           <a:p>
+            <a:pPr>
+              <a:defRPr>
+                <a:latin typeface="Roboto"/>
+              </a:defRPr>
+            </a:pPr>
             <a:r>
               <a:rPr sz="1000" b="0">
                 <a:solidFill>
                   <a:srgbClr val="5F6F63"/>
                 </a:solidFill>
-                <a:latin typeface="Arial"/>
+                <a:latin typeface="Roboto"/>
               </a:rPr>
               <a:t>Sample Electrical &amp; Air Pty Ltd · Which jobs actually make money?</a:t>
             </a:r>
@@ -10689,12 +11347,17 @@
           </a:bodyPr>
           <a:lstStyle/>
           <a:p>
+            <a:pPr>
+              <a:defRPr>
+                <a:latin typeface="Roboto"/>
+              </a:defRPr>
+            </a:pPr>
             <a:r>
               <a:rPr sz="2400" b="1">
                 <a:solidFill>
                   <a:srgbClr val="25342A"/>
                 </a:solidFill>
-                <a:latin typeface="Arial"/>
+                <a:latin typeface="Roboto"/>
               </a:rPr>
               <a:t>From gross margin to profit</a:t>
             </a:r>
@@ -10723,12 +11386,17 @@
           </a:bodyPr>
           <a:lstStyle/>
           <a:p>
+            <a:pPr>
+              <a:defRPr>
+                <a:latin typeface="Roboto"/>
+              </a:defRPr>
+            </a:pPr>
             <a:r>
               <a:rPr sz="1200" b="0">
                 <a:solidFill>
                   <a:srgbClr val="5F6F63"/>
                 </a:solidFill>
-                <a:latin typeface="Arial"/>
+                <a:latin typeface="Roboto"/>
               </a:rPr>
               <a:t>September's jobs made $73,107 gross margin (36.1%). Technician time not charged to jobs took $3,430 and overheads $59,580, leaving $10,097 profit before tax (5.0% of revenue). To cover overheads, jobs need a 31.1% gross margin on average.</a:t>
             </a:r>
@@ -10762,7 +11430,13 @@
                   <a:txBody>
                     <a:bodyPr/>
                     <a:lstStyle/>
-                    <a:p/>
+                    <a:p>
+                      <a:pPr>
+                        <a:defRPr>
+                          <a:latin typeface="Roboto"/>
+                        </a:defRPr>
+                      </a:pPr>
+                    </a:p>
                   </a:txBody>
                   <a:tcPr>
                     <a:solidFill>
@@ -10775,12 +11449,17 @@
                     <a:bodyPr/>
                     <a:lstStyle/>
                     <a:p>
-                      <a:pPr algn="r"/>
+                      <a:pPr algn="r">
+                        <a:defRPr>
+                          <a:latin typeface="Roboto"/>
+                        </a:defRPr>
+                      </a:pPr>
                       <a:r>
                         <a:rPr sz="1100" b="1">
                           <a:solidFill>
                             <a:srgbClr val="FFFFFF"/>
                           </a:solidFill>
+                          <a:latin typeface="Roboto"/>
                         </a:rPr>
                         <a:t>September 2026</a:t>
                       </a:r>
@@ -10799,11 +11478,17 @@
                     <a:bodyPr/>
                     <a:lstStyle/>
                     <a:p>
+                      <a:pPr>
+                        <a:defRPr>
+                          <a:latin typeface="Roboto"/>
+                        </a:defRPr>
+                      </a:pPr>
                       <a:r>
                         <a:rPr sz="1050">
                           <a:solidFill>
                             <a:srgbClr val="25342A"/>
                           </a:solidFill>
+                          <a:latin typeface="Roboto"/>
                         </a:rPr>
                         <a:t>Gross margin on jobs</a:t>
                       </a:r>
@@ -10820,12 +11505,17 @@
                     <a:bodyPr/>
                     <a:lstStyle/>
                     <a:p>
-                      <a:pPr algn="r"/>
+                      <a:pPr algn="r">
+                        <a:defRPr>
+                          <a:latin typeface="Roboto"/>
+                        </a:defRPr>
+                      </a:pPr>
                       <a:r>
                         <a:rPr sz="1050">
                           <a:solidFill>
                             <a:srgbClr val="25342A"/>
                           </a:solidFill>
+                          <a:latin typeface="Roboto"/>
                         </a:rPr>
                         <a:t>$73,107</a:t>
                       </a:r>
@@ -10844,11 +11534,17 @@
                     <a:bodyPr/>
                     <a:lstStyle/>
                     <a:p>
+                      <a:pPr>
+                        <a:defRPr>
+                          <a:latin typeface="Roboto"/>
+                        </a:defRPr>
+                      </a:pPr>
                       <a:r>
                         <a:rPr sz="1050">
                           <a:solidFill>
                             <a:srgbClr val="25342A"/>
                           </a:solidFill>
+                          <a:latin typeface="Roboto"/>
                         </a:rPr>
                         <a:t>Technician wages and on-costs</a:t>
                       </a:r>
@@ -10865,12 +11561,17 @@
                     <a:bodyPr/>
                     <a:lstStyle/>
                     <a:p>
-                      <a:pPr algn="r"/>
+                      <a:pPr algn="r">
+                        <a:defRPr>
+                          <a:latin typeface="Roboto"/>
+                        </a:defRPr>
+                      </a:pPr>
                       <a:r>
                         <a:rPr sz="1050">
                           <a:solidFill>
                             <a:srgbClr val="25342A"/>
                           </a:solidFill>
+                          <a:latin typeface="Roboto"/>
                         </a:rPr>
                         <a:t>$54,600</a:t>
                       </a:r>
@@ -10889,11 +11590,17 @@
                     <a:bodyPr/>
                     <a:lstStyle/>
                     <a:p>
+                      <a:pPr>
+                        <a:defRPr>
+                          <a:latin typeface="Roboto"/>
+                        </a:defRPr>
+                      </a:pPr>
                       <a:r>
                         <a:rPr sz="1050">
                           <a:solidFill>
                             <a:srgbClr val="25342A"/>
                           </a:solidFill>
+                          <a:latin typeface="Roboto"/>
                         </a:rPr>
                         <a:t>Technician time charged to jobs (at cost)</a:t>
                       </a:r>
@@ -10910,12 +11617,17 @@
                     <a:bodyPr/>
                     <a:lstStyle/>
                     <a:p>
-                      <a:pPr algn="r"/>
+                      <a:pPr algn="r">
+                        <a:defRPr>
+                          <a:latin typeface="Roboto"/>
+                        </a:defRPr>
+                      </a:pPr>
                       <a:r>
                         <a:rPr sz="1050">
                           <a:solidFill>
                             <a:srgbClr val="25342A"/>
                           </a:solidFill>
+                          <a:latin typeface="Roboto"/>
                         </a:rPr>
                         <a:t>$51,170</a:t>
                       </a:r>
@@ -10934,11 +11646,17 @@
                     <a:bodyPr/>
                     <a:lstStyle/>
                     <a:p>
+                      <a:pPr>
+                        <a:defRPr>
+                          <a:latin typeface="Roboto"/>
+                        </a:defRPr>
+                      </a:pPr>
                       <a:r>
                         <a:rPr sz="1050">
                           <a:solidFill>
                             <a:srgbClr val="25342A"/>
                           </a:solidFill>
+                          <a:latin typeface="Roboto"/>
                         </a:rPr>
                         <a:t>Technician time not charged to jobs</a:t>
                       </a:r>
@@ -10955,12 +11673,17 @@
                     <a:bodyPr/>
                     <a:lstStyle/>
                     <a:p>
-                      <a:pPr algn="r"/>
+                      <a:pPr algn="r">
+                        <a:defRPr>
+                          <a:latin typeface="Roboto"/>
+                        </a:defRPr>
+                      </a:pPr>
                       <a:r>
                         <a:rPr sz="1050">
                           <a:solidFill>
                             <a:srgbClr val="25342A"/>
                           </a:solidFill>
+                          <a:latin typeface="Roboto"/>
                         </a:rPr>
                         <a:t>$3,430</a:t>
                       </a:r>
@@ -10979,11 +11702,17 @@
                     <a:bodyPr/>
                     <a:lstStyle/>
                     <a:p>
+                      <a:pPr>
+                        <a:defRPr>
+                          <a:latin typeface="Roboto"/>
+                        </a:defRPr>
+                      </a:pPr>
                       <a:r>
                         <a:rPr sz="1050">
                           <a:solidFill>
                             <a:srgbClr val="25342A"/>
                           </a:solidFill>
+                          <a:latin typeface="Roboto"/>
                         </a:rPr>
                         <a:t>Gross profit (the P&amp;L)</a:t>
                       </a:r>
@@ -11000,12 +11729,17 @@
                     <a:bodyPr/>
                     <a:lstStyle/>
                     <a:p>
-                      <a:pPr algn="r"/>
+                      <a:pPr algn="r">
+                        <a:defRPr>
+                          <a:latin typeface="Roboto"/>
+                        </a:defRPr>
+                      </a:pPr>
                       <a:r>
                         <a:rPr sz="1050">
                           <a:solidFill>
                             <a:srgbClr val="25342A"/>
                           </a:solidFill>
+                          <a:latin typeface="Roboto"/>
                         </a:rPr>
                         <a:t>$69,677</a:t>
                       </a:r>
@@ -11024,11 +11758,17 @@
                     <a:bodyPr/>
                     <a:lstStyle/>
                     <a:p>
+                      <a:pPr>
+                        <a:defRPr>
+                          <a:latin typeface="Roboto"/>
+                        </a:defRPr>
+                      </a:pPr>
                       <a:r>
                         <a:rPr sz="1050">
                           <a:solidFill>
                             <a:srgbClr val="25342A"/>
                           </a:solidFill>
+                          <a:latin typeface="Roboto"/>
                         </a:rPr>
                         <a:t>Overheads (operating expenses, depreciation, interest)</a:t>
                       </a:r>
@@ -11045,12 +11785,17 @@
                     <a:bodyPr/>
                     <a:lstStyle/>
                     <a:p>
-                      <a:pPr algn="r"/>
+                      <a:pPr algn="r">
+                        <a:defRPr>
+                          <a:latin typeface="Roboto"/>
+                        </a:defRPr>
+                      </a:pPr>
                       <a:r>
                         <a:rPr sz="1050">
                           <a:solidFill>
                             <a:srgbClr val="25342A"/>
                           </a:solidFill>
+                          <a:latin typeface="Roboto"/>
                         </a:rPr>
                         <a:t>$59,580</a:t>
                       </a:r>
@@ -11069,11 +11814,17 @@
                     <a:bodyPr/>
                     <a:lstStyle/>
                     <a:p>
+                      <a:pPr>
+                        <a:defRPr>
+                          <a:latin typeface="Roboto"/>
+                        </a:defRPr>
+                      </a:pPr>
                       <a:r>
                         <a:rPr sz="1050">
                           <a:solidFill>
                             <a:srgbClr val="25342A"/>
                           </a:solidFill>
+                          <a:latin typeface="Roboto"/>
                         </a:rPr>
                         <a:t>Profit before tax (the P&amp;L)</a:t>
                       </a:r>
@@ -11090,12 +11841,17 @@
                     <a:bodyPr/>
                     <a:lstStyle/>
                     <a:p>
-                      <a:pPr algn="r"/>
+                      <a:pPr algn="r">
+                        <a:defRPr>
+                          <a:latin typeface="Roboto"/>
+                        </a:defRPr>
+                      </a:pPr>
                       <a:r>
                         <a:rPr sz="1050">
                           <a:solidFill>
                             <a:srgbClr val="25342A"/>
                           </a:solidFill>
+                          <a:latin typeface="Roboto"/>
                         </a:rPr>
                         <a:t>$10,097</a:t>
                       </a:r>
@@ -11114,11 +11870,17 @@
                     <a:bodyPr/>
                     <a:lstStyle/>
                     <a:p>
+                      <a:pPr>
+                        <a:defRPr>
+                          <a:latin typeface="Roboto"/>
+                        </a:defRPr>
+                      </a:pPr>
                       <a:r>
                         <a:rPr sz="1050">
                           <a:solidFill>
                             <a:srgbClr val="25342A"/>
                           </a:solidFill>
+                          <a:latin typeface="Roboto"/>
                         </a:rPr>
                         <a:t>Revenue</a:t>
                       </a:r>
@@ -11135,12 +11897,17 @@
                     <a:bodyPr/>
                     <a:lstStyle/>
                     <a:p>
-                      <a:pPr algn="r"/>
+                      <a:pPr algn="r">
+                        <a:defRPr>
+                          <a:latin typeface="Roboto"/>
+                        </a:defRPr>
+                      </a:pPr>
                       <a:r>
                         <a:rPr sz="1050">
                           <a:solidFill>
                             <a:srgbClr val="25342A"/>
                           </a:solidFill>
+                          <a:latin typeface="Roboto"/>
                         </a:rPr>
                         <a:t>$202,337</a:t>
                       </a:r>
@@ -11159,11 +11926,17 @@
                     <a:bodyPr/>
                     <a:lstStyle/>
                     <a:p>
+                      <a:pPr>
+                        <a:defRPr>
+                          <a:latin typeface="Roboto"/>
+                        </a:defRPr>
+                      </a:pPr>
                       <a:r>
                         <a:rPr sz="1050">
                           <a:solidFill>
                             <a:srgbClr val="25342A"/>
                           </a:solidFill>
+                          <a:latin typeface="Roboto"/>
                         </a:rPr>
                         <a:t>Gross margin on jobs, %</a:t>
                       </a:r>
@@ -11180,12 +11953,17 @@
                     <a:bodyPr/>
                     <a:lstStyle/>
                     <a:p>
-                      <a:pPr algn="r"/>
+                      <a:pPr algn="r">
+                        <a:defRPr>
+                          <a:latin typeface="Roboto"/>
+                        </a:defRPr>
+                      </a:pPr>
                       <a:r>
                         <a:rPr sz="1050">
                           <a:solidFill>
                             <a:srgbClr val="25342A"/>
                           </a:solidFill>
+                          <a:latin typeface="Roboto"/>
                         </a:rPr>
                         <a:t>36.1%</a:t>
                       </a:r>
@@ -11204,11 +11982,17 @@
                     <a:bodyPr/>
                     <a:lstStyle/>
                     <a:p>
+                      <a:pPr>
+                        <a:defRPr>
+                          <a:latin typeface="Roboto"/>
+                        </a:defRPr>
+                      </a:pPr>
                       <a:r>
                         <a:rPr sz="1050">
                           <a:solidFill>
                             <a:srgbClr val="25342A"/>
                           </a:solidFill>
+                          <a:latin typeface="Roboto"/>
                         </a:rPr>
                         <a:t>Profit before tax, % of revenue</a:t>
                       </a:r>
@@ -11225,12 +12009,17 @@
                     <a:bodyPr/>
                     <a:lstStyle/>
                     <a:p>
-                      <a:pPr algn="r"/>
+                      <a:pPr algn="r">
+                        <a:defRPr>
+                          <a:latin typeface="Roboto"/>
+                        </a:defRPr>
+                      </a:pPr>
                       <a:r>
                         <a:rPr sz="1050">
                           <a:solidFill>
                             <a:srgbClr val="25342A"/>
                           </a:solidFill>
+                          <a:latin typeface="Roboto"/>
                         </a:rPr>
                         <a:t>5.0%</a:t>
                       </a:r>
@@ -11249,11 +12038,17 @@
                     <a:bodyPr/>
                     <a:lstStyle/>
                     <a:p>
+                      <a:pPr>
+                        <a:defRPr>
+                          <a:latin typeface="Roboto"/>
+                        </a:defRPr>
+                      </a:pPr>
                       <a:r>
                         <a:rPr sz="1050">
                           <a:solidFill>
                             <a:srgbClr val="25342A"/>
                           </a:solidFill>
+                          <a:latin typeface="Roboto"/>
                         </a:rPr>
                         <a:t>Gross margin jobs need just to cover overheads and time not charged</a:t>
                       </a:r>
@@ -11270,12 +12065,17 @@
                     <a:bodyPr/>
                     <a:lstStyle/>
                     <a:p>
-                      <a:pPr algn="r"/>
+                      <a:pPr algn="r">
+                        <a:defRPr>
+                          <a:latin typeface="Roboto"/>
+                        </a:defRPr>
+                      </a:pPr>
                       <a:r>
                         <a:rPr sz="1050">
                           <a:solidFill>
                             <a:srgbClr val="25342A"/>
                           </a:solidFill>
+                          <a:latin typeface="Roboto"/>
                         </a:rPr>
                         <a:t>31.1%</a:t>
                       </a:r>
@@ -11314,12 +12114,17 @@
           </a:bodyPr>
           <a:lstStyle/>
           <a:p>
+            <a:pPr>
+              <a:defRPr>
+                <a:latin typeface="Roboto"/>
+              </a:defRPr>
+            </a:pPr>
             <a:r>
               <a:rPr sz="900" b="0">
                 <a:solidFill>
                   <a:srgbClr val="5F6F63"/>
                 </a:solidFill>
-                <a:latin typeface="Arial"/>
+                <a:latin typeface="Roboto"/>
               </a:rPr>
               <a:t>job-margins.pptx</a:t>
             </a:r>
@@ -11348,13 +12153,17 @@
           </a:bodyPr>
           <a:lstStyle/>
           <a:p>
-            <a:pPr algn="ctr"/>
+            <a:pPr algn="ctr">
+              <a:defRPr>
+                <a:latin typeface="Roboto"/>
+              </a:defRPr>
+            </a:pPr>
             <a:r>
               <a:rPr sz="900" b="0">
                 <a:solidFill>
                   <a:srgbClr val="5F6F63"/>
                 </a:solidFill>
-                <a:latin typeface="Arial"/>
+                <a:latin typeface="Roboto"/>
               </a:rPr>
               <a:t>Data retrieved 2pm, Tue 6 Oct 2026 · Sample data</a:t>
             </a:r>
@@ -11383,13 +12192,17 @@
           </a:bodyPr>
           <a:lstStyle/>
           <a:p>
-            <a:pPr algn="r"/>
+            <a:pPr algn="r">
+              <a:defRPr>
+                <a:latin typeface="Roboto"/>
+              </a:defRPr>
+            </a:pPr>
             <a:r>
               <a:rPr sz="900" b="0">
                 <a:solidFill>
                   <a:srgbClr val="5F6F63"/>
                 </a:solidFill>
-                <a:latin typeface="Arial"/>
+                <a:latin typeface="Roboto"/>
               </a:rPr>
               <a:t>Slide 3 of 21</a:t>
             </a:r>
@@ -11453,7 +12266,11 @@
           <a:bodyPr rtlCol="0" anchor="ctr"/>
           <a:lstStyle/>
           <a:p>
-            <a:pPr algn="ctr"/>
+            <a:pPr algn="ctr">
+              <a:defRPr>
+                <a:latin typeface="Roboto"/>
+              </a:defRPr>
+            </a:pPr>
           </a:p>
         </p:txBody>
       </p:sp>
@@ -11479,12 +12296,17 @@
           </a:bodyPr>
           <a:lstStyle/>
           <a:p>
+            <a:pPr>
+              <a:defRPr>
+                <a:latin typeface="Roboto"/>
+              </a:defRPr>
+            </a:pPr>
             <a:r>
               <a:rPr sz="1000" b="0">
                 <a:solidFill>
                   <a:srgbClr val="5F6F63"/>
                 </a:solidFill>
-                <a:latin typeface="Arial"/>
+                <a:latin typeface="Roboto"/>
               </a:rPr>
               <a:t>Sample Electrical &amp; Air Pty Ltd · Which jobs actually make money?</a:t>
             </a:r>
@@ -11513,12 +12335,17 @@
           </a:bodyPr>
           <a:lstStyle/>
           <a:p>
+            <a:pPr>
+              <a:defRPr>
+                <a:latin typeface="Roboto"/>
+              </a:defRPr>
+            </a:pPr>
             <a:r>
               <a:rPr sz="2400" b="1">
                 <a:solidFill>
                   <a:srgbClr val="25342A"/>
                 </a:solidFill>
-                <a:latin typeface="Arial"/>
+                <a:latin typeface="Roboto"/>
               </a:rPr>
               <a:t>Headline numbers · Type of job: All jobs</a:t>
             </a:r>
@@ -11566,7 +12393,11 @@
           <a:bodyPr rtlCol="0" anchor="ctr"/>
           <a:lstStyle/>
           <a:p>
-            <a:pPr algn="ctr"/>
+            <a:pPr algn="ctr">
+              <a:defRPr>
+                <a:latin typeface="Roboto"/>
+              </a:defRPr>
+            </a:pPr>
           </a:p>
         </p:txBody>
       </p:sp>
@@ -11592,12 +12423,17 @@
           </a:bodyPr>
           <a:lstStyle/>
           <a:p>
+            <a:pPr>
+              <a:defRPr>
+                <a:latin typeface="Roboto"/>
+              </a:defRPr>
+            </a:pPr>
             <a:r>
               <a:rPr sz="1200" b="0">
                 <a:solidFill>
                   <a:srgbClr val="5F6F63"/>
                 </a:solidFill>
-                <a:latin typeface="Arial"/>
+                <a:latin typeface="Roboto"/>
               </a:rPr>
               <a:t>Job gross margin, October so far · All jobs</a:t>
             </a:r>
@@ -11626,12 +12462,17 @@
           </a:bodyPr>
           <a:lstStyle/>
           <a:p>
+            <a:pPr>
+              <a:defRPr>
+                <a:latin typeface="Roboto"/>
+              </a:defRPr>
+            </a:pPr>
             <a:r>
               <a:rPr sz="3000" b="1">
                 <a:solidFill>
                   <a:srgbClr val="2F7A5D"/>
                 </a:solidFill>
-                <a:latin typeface="Arial"/>
+                <a:latin typeface="Roboto"/>
               </a:rPr>
               <a:t>42.8%</a:t>
             </a:r>
@@ -11660,12 +12501,17 @@
           </a:bodyPr>
           <a:lstStyle/>
           <a:p>
+            <a:pPr>
+              <a:defRPr>
+                <a:latin typeface="Roboto"/>
+              </a:defRPr>
+            </a:pPr>
             <a:r>
               <a:rPr sz="1100" b="0">
                 <a:solidFill>
                   <a:srgbClr val="5F6F63"/>
                 </a:solidFill>
-                <a:latin typeface="Arial"/>
+                <a:latin typeface="Roboto"/>
               </a:rPr>
               <a:t>September 36.1%</a:t>
             </a:r>
@@ -11694,12 +12540,17 @@
           </a:bodyPr>
           <a:lstStyle/>
           <a:p>
+            <a:pPr>
+              <a:defRPr>
+                <a:latin typeface="Roboto"/>
+              </a:defRPr>
+            </a:pPr>
             <a:r>
               <a:rPr sz="900" b="0">
                 <a:solidFill>
                   <a:srgbClr val="5F6F63"/>
                 </a:solidFill>
-                <a:latin typeface="Arial"/>
+                <a:latin typeface="Roboto"/>
               </a:rPr>
               <a:t>job-margins.pptx</a:t>
             </a:r>
@@ -11728,13 +12579,17 @@
           </a:bodyPr>
           <a:lstStyle/>
           <a:p>
-            <a:pPr algn="ctr"/>
+            <a:pPr algn="ctr">
+              <a:defRPr>
+                <a:latin typeface="Roboto"/>
+              </a:defRPr>
+            </a:pPr>
             <a:r>
               <a:rPr sz="900" b="0">
                 <a:solidFill>
                   <a:srgbClr val="5F6F63"/>
                 </a:solidFill>
-                <a:latin typeface="Arial"/>
+                <a:latin typeface="Roboto"/>
               </a:rPr>
               <a:t>Data retrieved 2pm, Tue 6 Oct 2026 · Sample data</a:t>
             </a:r>
@@ -11763,13 +12618,17 @@
           </a:bodyPr>
           <a:lstStyle/>
           <a:p>
-            <a:pPr algn="r"/>
+            <a:pPr algn="r">
+              <a:defRPr>
+                <a:latin typeface="Roboto"/>
+              </a:defRPr>
+            </a:pPr>
             <a:r>
               <a:rPr sz="900" b="0">
                 <a:solidFill>
                   <a:srgbClr val="5F6F63"/>
                 </a:solidFill>
-                <a:latin typeface="Arial"/>
+                <a:latin typeface="Roboto"/>
               </a:rPr>
               <a:t>Slide 4 of 21</a:t>
             </a:r>
@@ -11833,7 +12692,11 @@
           <a:bodyPr rtlCol="0" anchor="ctr"/>
           <a:lstStyle/>
           <a:p>
-            <a:pPr algn="ctr"/>
+            <a:pPr algn="ctr">
+              <a:defRPr>
+                <a:latin typeface="Roboto"/>
+              </a:defRPr>
+            </a:pPr>
           </a:p>
         </p:txBody>
       </p:sp>
@@ -11859,12 +12722,17 @@
           </a:bodyPr>
           <a:lstStyle/>
           <a:p>
+            <a:pPr>
+              <a:defRPr>
+                <a:latin typeface="Roboto"/>
+              </a:defRPr>
+            </a:pPr>
             <a:r>
               <a:rPr sz="1000" b="0">
                 <a:solidFill>
                   <a:srgbClr val="5F6F63"/>
                 </a:solidFill>
-                <a:latin typeface="Arial"/>
+                <a:latin typeface="Roboto"/>
               </a:rPr>
               <a:t>Sample Electrical &amp; Air Pty Ltd · Which jobs actually make money?</a:t>
             </a:r>
@@ -11893,12 +12761,17 @@
           </a:bodyPr>
           <a:lstStyle/>
           <a:p>
+            <a:pPr>
+              <a:defRPr>
+                <a:latin typeface="Roboto"/>
+              </a:defRPr>
+            </a:pPr>
             <a:r>
               <a:rPr sz="2400" b="1">
                 <a:solidFill>
                   <a:srgbClr val="25342A"/>
                 </a:solidFill>
-                <a:latin typeface="Arial"/>
+                <a:latin typeface="Roboto"/>
               </a:rPr>
               <a:t>Job gross margin by type of job, October 2026 to date · Gross margin % · Type of job: All jobs</a:t>
             </a:r>
@@ -11927,12 +12800,17 @@
           </a:bodyPr>
           <a:lstStyle/>
           <a:p>
+            <a:pPr>
+              <a:defRPr>
+                <a:latin typeface="Roboto"/>
+              </a:defRPr>
+            </a:pPr>
             <a:r>
               <a:rPr sz="1200" b="0">
                 <a:solidFill>
                   <a:srgbClr val="5F6F63"/>
                 </a:solidFill>
-                <a:latin typeface="Arial"/>
+                <a:latin typeface="Roboto"/>
               </a:rPr>
               <a:t>Revenue less materials, subcontractors and technician time at $68/hour.</a:t>
             </a:r>
@@ -11979,12 +12857,17 @@
           </a:bodyPr>
           <a:lstStyle/>
           <a:p>
+            <a:pPr>
+              <a:defRPr>
+                <a:latin typeface="Roboto"/>
+              </a:defRPr>
+            </a:pPr>
             <a:r>
               <a:rPr sz="1000" b="0">
                 <a:solidFill>
                   <a:srgbClr val="5F6F63"/>
                 </a:solidFill>
-                <a:latin typeface="Arial"/>
+                <a:latin typeface="Roboto"/>
               </a:rPr>
               <a:t>Target 35.0%  ·  grey = below target</a:t>
             </a:r>
@@ -12013,12 +12896,17 @@
           </a:bodyPr>
           <a:lstStyle/>
           <a:p>
+            <a:pPr>
+              <a:defRPr>
+                <a:latin typeface="Roboto"/>
+              </a:defRPr>
+            </a:pPr>
             <a:r>
               <a:rPr sz="900" b="0">
                 <a:solidFill>
                   <a:srgbClr val="5F6F63"/>
                 </a:solidFill>
-                <a:latin typeface="Arial"/>
+                <a:latin typeface="Roboto"/>
               </a:rPr>
               <a:t>job-margins.pptx</a:t>
             </a:r>
@@ -12047,13 +12935,17 @@
           </a:bodyPr>
           <a:lstStyle/>
           <a:p>
-            <a:pPr algn="ctr"/>
+            <a:pPr algn="ctr">
+              <a:defRPr>
+                <a:latin typeface="Roboto"/>
+              </a:defRPr>
+            </a:pPr>
             <a:r>
               <a:rPr sz="900" b="0">
                 <a:solidFill>
                   <a:srgbClr val="5F6F63"/>
                 </a:solidFill>
-                <a:latin typeface="Arial"/>
+                <a:latin typeface="Roboto"/>
               </a:rPr>
               <a:t>Data retrieved 2pm, Tue 6 Oct 2026 · Sample data</a:t>
             </a:r>
@@ -12082,13 +12974,17 @@
           </a:bodyPr>
           <a:lstStyle/>
           <a:p>
-            <a:pPr algn="r"/>
+            <a:pPr algn="r">
+              <a:defRPr>
+                <a:latin typeface="Roboto"/>
+              </a:defRPr>
+            </a:pPr>
             <a:r>
               <a:rPr sz="900" b="0">
                 <a:solidFill>
                   <a:srgbClr val="5F6F63"/>
                 </a:solidFill>
-                <a:latin typeface="Arial"/>
+                <a:latin typeface="Roboto"/>
               </a:rPr>
               <a:t>Slide 5 of 21</a:t>
             </a:r>
@@ -12152,7 +13048,11 @@
           <a:bodyPr rtlCol="0" anchor="ctr"/>
           <a:lstStyle/>
           <a:p>
-            <a:pPr algn="ctr"/>
+            <a:pPr algn="ctr">
+              <a:defRPr>
+                <a:latin typeface="Roboto"/>
+              </a:defRPr>
+            </a:pPr>
           </a:p>
         </p:txBody>
       </p:sp>
@@ -12178,12 +13078,17 @@
           </a:bodyPr>
           <a:lstStyle/>
           <a:p>
+            <a:pPr>
+              <a:defRPr>
+                <a:latin typeface="Roboto"/>
+              </a:defRPr>
+            </a:pPr>
             <a:r>
               <a:rPr sz="1000" b="0">
                 <a:solidFill>
                   <a:srgbClr val="5F6F63"/>
                 </a:solidFill>
-                <a:latin typeface="Arial"/>
+                <a:latin typeface="Roboto"/>
               </a:rPr>
               <a:t>Sample Electrical &amp; Air Pty Ltd · Which jobs actually make money?</a:t>
             </a:r>
@@ -12212,12 +13117,17 @@
           </a:bodyPr>
           <a:lstStyle/>
           <a:p>
+            <a:pPr>
+              <a:defRPr>
+                <a:latin typeface="Roboto"/>
+              </a:defRPr>
+            </a:pPr>
             <a:r>
               <a:rPr sz="2400" b="1">
                 <a:solidFill>
                   <a:srgbClr val="25342A"/>
                 </a:solidFill>
-                <a:latin typeface="Arial"/>
+                <a:latin typeface="Roboto"/>
               </a:rPr>
               <a:t>Job gross margin by type of job, October 2026 to date · Gross margin $ · Type of job: All jobs</a:t>
             </a:r>
@@ -12246,12 +13156,17 @@
           </a:bodyPr>
           <a:lstStyle/>
           <a:p>
+            <a:pPr>
+              <a:defRPr>
+                <a:latin typeface="Roboto"/>
+              </a:defRPr>
+            </a:pPr>
             <a:r>
               <a:rPr sz="1200" b="0">
                 <a:solidFill>
                   <a:srgbClr val="5F6F63"/>
                 </a:solidFill>
-                <a:latin typeface="Arial"/>
+                <a:latin typeface="Roboto"/>
               </a:rPr>
               <a:t>Revenue less materials, subcontractors and technician time at $68/hour.</a:t>
             </a:r>
@@ -12298,12 +13213,17 @@
           </a:bodyPr>
           <a:lstStyle/>
           <a:p>
+            <a:pPr>
+              <a:defRPr>
+                <a:latin typeface="Roboto"/>
+              </a:defRPr>
+            </a:pPr>
             <a:r>
               <a:rPr sz="900" b="0">
                 <a:solidFill>
                   <a:srgbClr val="5F6F63"/>
                 </a:solidFill>
-                <a:latin typeface="Arial"/>
+                <a:latin typeface="Roboto"/>
               </a:rPr>
               <a:t>job-margins.pptx</a:t>
             </a:r>
@@ -12332,13 +13252,17 @@
           </a:bodyPr>
           <a:lstStyle/>
           <a:p>
-            <a:pPr algn="ctr"/>
+            <a:pPr algn="ctr">
+              <a:defRPr>
+                <a:latin typeface="Roboto"/>
+              </a:defRPr>
+            </a:pPr>
             <a:r>
               <a:rPr sz="900" b="0">
                 <a:solidFill>
                   <a:srgbClr val="5F6F63"/>
                 </a:solidFill>
-                <a:latin typeface="Arial"/>
+                <a:latin typeface="Roboto"/>
               </a:rPr>
               <a:t>Data retrieved 2pm, Tue 6 Oct 2026 · Sample data</a:t>
             </a:r>
@@ -12367,13 +13291,17 @@
           </a:bodyPr>
           <a:lstStyle/>
           <a:p>
-            <a:pPr algn="r"/>
+            <a:pPr algn="r">
+              <a:defRPr>
+                <a:latin typeface="Roboto"/>
+              </a:defRPr>
+            </a:pPr>
             <a:r>
               <a:rPr sz="900" b="0">
                 <a:solidFill>
                   <a:srgbClr val="5F6F63"/>
                 </a:solidFill>
-                <a:latin typeface="Arial"/>
+                <a:latin typeface="Roboto"/>
               </a:rPr>
               <a:t>Slide 6 of 21</a:t>
             </a:r>
@@ -12437,7 +13365,11 @@
           <a:bodyPr rtlCol="0" anchor="ctr"/>
           <a:lstStyle/>
           <a:p>
-            <a:pPr algn="ctr"/>
+            <a:pPr algn="ctr">
+              <a:defRPr>
+                <a:latin typeface="Roboto"/>
+              </a:defRPr>
+            </a:pPr>
           </a:p>
         </p:txBody>
       </p:sp>
@@ -12463,12 +13395,17 @@
           </a:bodyPr>
           <a:lstStyle/>
           <a:p>
+            <a:pPr>
+              <a:defRPr>
+                <a:latin typeface="Roboto"/>
+              </a:defRPr>
+            </a:pPr>
             <a:r>
               <a:rPr sz="1000" b="0">
                 <a:solidFill>
                   <a:srgbClr val="5F6F63"/>
                 </a:solidFill>
-                <a:latin typeface="Arial"/>
+                <a:latin typeface="Roboto"/>
               </a:rPr>
               <a:t>Sample Electrical &amp; Air Pty Ltd · Which jobs actually make money?</a:t>
             </a:r>
@@ -12497,12 +13434,17 @@
           </a:bodyPr>
           <a:lstStyle/>
           <a:p>
+            <a:pPr>
+              <a:defRPr>
+                <a:latin typeface="Roboto"/>
+              </a:defRPr>
+            </a:pPr>
             <a:r>
               <a:rPr sz="2400" b="1">
                 <a:solidFill>
                   <a:srgbClr val="25342A"/>
                 </a:solidFill>
-                <a:latin typeface="Arial"/>
+                <a:latin typeface="Roboto"/>
               </a:rPr>
               <a:t>What it shows · Type of job: All jobs</a:t>
             </a:r>
@@ -12550,7 +13492,11 @@
           <a:bodyPr rtlCol="0" anchor="ctr"/>
           <a:lstStyle/>
           <a:p>
-            <a:pPr algn="ctr"/>
+            <a:pPr algn="ctr">
+              <a:defRPr>
+                <a:latin typeface="Roboto"/>
+              </a:defRPr>
+            </a:pPr>
           </a:p>
         </p:txBody>
       </p:sp>
@@ -12576,12 +13522,17 @@
           </a:bodyPr>
           <a:lstStyle/>
           <a:p>
+            <a:pPr>
+              <a:defRPr>
+                <a:latin typeface="Roboto"/>
+              </a:defRPr>
+            </a:pPr>
             <a:r>
               <a:rPr sz="1100" b="1">
                 <a:solidFill>
                   <a:srgbClr val="5F6F63"/>
                 </a:solidFill>
-                <a:latin typeface="Arial"/>
+                <a:latin typeface="Roboto"/>
               </a:rPr>
               <a:t>WHAT IT SHOWS</a:t>
             </a:r>
@@ -12610,12 +13561,17 @@
           </a:bodyPr>
           <a:lstStyle/>
           <a:p>
+            <a:pPr>
+              <a:defRPr>
+                <a:latin typeface="Roboto"/>
+              </a:defRPr>
+            </a:pPr>
             <a:r>
               <a:rPr sz="1600" b="0">
                 <a:solidFill>
                   <a:srgbClr val="25342A"/>
                 </a:solidFill>
-                <a:latin typeface="Arial"/>
+                <a:latin typeface="Roboto"/>
               </a:rPr>
               <a:t>In October so far maintenance contracts made a 59.5% job gross margin, installations made a 22.0% job gross margin, call-outs and repairs made a 45.0% job gross margin (technician time at $68 an hour, wages and all on-costs). Jobs need 31.1% just to cover overheads.</a:t>
             </a:r>
@@ -12663,7 +13619,11 @@
           <a:bodyPr rtlCol="0" anchor="ctr"/>
           <a:lstStyle/>
           <a:p>
-            <a:pPr algn="ctr"/>
+            <a:pPr algn="ctr">
+              <a:defRPr>
+                <a:latin typeface="Roboto"/>
+              </a:defRPr>
+            </a:pPr>
           </a:p>
         </p:txBody>
       </p:sp>
@@ -12689,12 +13649,17 @@
           </a:bodyPr>
           <a:lstStyle/>
           <a:p>
+            <a:pPr>
+              <a:defRPr>
+                <a:latin typeface="Roboto"/>
+              </a:defRPr>
+            </a:pPr>
             <a:r>
               <a:rPr sz="1100" b="1">
                 <a:solidFill>
                   <a:srgbClr val="5F6F63"/>
                 </a:solidFill>
-                <a:latin typeface="Arial"/>
+                <a:latin typeface="Roboto"/>
               </a:rPr>
               <a:t>WHAT YOU'D DO ABOUT IT</a:t>
             </a:r>
@@ -12723,12 +13688,17 @@
           </a:bodyPr>
           <a:lstStyle/>
           <a:p>
+            <a:pPr>
+              <a:defRPr>
+                <a:latin typeface="Roboto"/>
+              </a:defRPr>
+            </a:pPr>
             <a:r>
               <a:rPr sz="1600" b="0">
                 <a:solidFill>
                   <a:srgbClr val="25342A"/>
                 </a:solidFill>
-                <a:latin typeface="Arial"/>
+                <a:latin typeface="Roboto"/>
               </a:rPr>
               <a:t>Maintenance contracts: 59.5% gross margin, the most profitable work you do. Installations: 22.0% gross margin, below the 31.1% needed to cover overheads.</a:t>
             </a:r>
@@ -12757,12 +13727,17 @@
           </a:bodyPr>
           <a:lstStyle/>
           <a:p>
+            <a:pPr>
+              <a:defRPr>
+                <a:latin typeface="Roboto"/>
+              </a:defRPr>
+            </a:pPr>
             <a:r>
               <a:rPr sz="900" b="0">
                 <a:solidFill>
                   <a:srgbClr val="5F6F63"/>
                 </a:solidFill>
-                <a:latin typeface="Arial"/>
+                <a:latin typeface="Roboto"/>
               </a:rPr>
               <a:t>job-margins.pptx</a:t>
             </a:r>
@@ -12791,13 +13766,17 @@
           </a:bodyPr>
           <a:lstStyle/>
           <a:p>
-            <a:pPr algn="ctr"/>
+            <a:pPr algn="ctr">
+              <a:defRPr>
+                <a:latin typeface="Roboto"/>
+              </a:defRPr>
+            </a:pPr>
             <a:r>
               <a:rPr sz="900" b="0">
                 <a:solidFill>
                   <a:srgbClr val="5F6F63"/>
                 </a:solidFill>
-                <a:latin typeface="Arial"/>
+                <a:latin typeface="Roboto"/>
               </a:rPr>
               <a:t>Data retrieved 2pm, Tue 6 Oct 2026 · Sample data</a:t>
             </a:r>
@@ -12826,13 +13805,17 @@
           </a:bodyPr>
           <a:lstStyle/>
           <a:p>
-            <a:pPr algn="r"/>
+            <a:pPr algn="r">
+              <a:defRPr>
+                <a:latin typeface="Roboto"/>
+              </a:defRPr>
+            </a:pPr>
             <a:r>
               <a:rPr sz="900" b="0">
                 <a:solidFill>
                   <a:srgbClr val="5F6F63"/>
                 </a:solidFill>
-                <a:latin typeface="Arial"/>
+                <a:latin typeface="Roboto"/>
               </a:rPr>
               <a:t>Slide 7 of 21</a:t>
             </a:r>
@@ -12896,7 +13879,11 @@
           <a:bodyPr rtlCol="0" anchor="ctr"/>
           <a:lstStyle/>
           <a:p>
-            <a:pPr algn="ctr"/>
+            <a:pPr algn="ctr">
+              <a:defRPr>
+                <a:latin typeface="Roboto"/>
+              </a:defRPr>
+            </a:pPr>
           </a:p>
         </p:txBody>
       </p:sp>
@@ -12922,12 +13909,17 @@
           </a:bodyPr>
           <a:lstStyle/>
           <a:p>
+            <a:pPr>
+              <a:defRPr>
+                <a:latin typeface="Roboto"/>
+              </a:defRPr>
+            </a:pPr>
             <a:r>
               <a:rPr sz="1000" b="0">
                 <a:solidFill>
                   <a:srgbClr val="5F6F63"/>
                 </a:solidFill>
-                <a:latin typeface="Arial"/>
+                <a:latin typeface="Roboto"/>
               </a:rPr>
               <a:t>Sample Electrical &amp; Air Pty Ltd · Which jobs actually make money?</a:t>
             </a:r>
@@ -12956,12 +13948,17 @@
           </a:bodyPr>
           <a:lstStyle/>
           <a:p>
+            <a:pPr>
+              <a:defRPr>
+                <a:latin typeface="Roboto"/>
+              </a:defRPr>
+            </a:pPr>
             <a:r>
               <a:rPr sz="2400" b="1">
                 <a:solidFill>
                   <a:srgbClr val="25342A"/>
                 </a:solidFill>
-                <a:latin typeface="Arial"/>
+                <a:latin typeface="Roboto"/>
               </a:rPr>
               <a:t>Headline numbers · Type of job: Maintenance contracts</a:t>
             </a:r>
@@ -13009,7 +14006,11 @@
           <a:bodyPr rtlCol="0" anchor="ctr"/>
           <a:lstStyle/>
           <a:p>
-            <a:pPr algn="ctr"/>
+            <a:pPr algn="ctr">
+              <a:defRPr>
+                <a:latin typeface="Roboto"/>
+              </a:defRPr>
+            </a:pPr>
           </a:p>
         </p:txBody>
       </p:sp>
@@ -13035,12 +14036,17 @@
           </a:bodyPr>
           <a:lstStyle/>
           <a:p>
+            <a:pPr>
+              <a:defRPr>
+                <a:latin typeface="Roboto"/>
+              </a:defRPr>
+            </a:pPr>
             <a:r>
               <a:rPr sz="1200" b="0">
                 <a:solidFill>
                   <a:srgbClr val="5F6F63"/>
                 </a:solidFill>
-                <a:latin typeface="Arial"/>
+                <a:latin typeface="Roboto"/>
               </a:rPr>
               <a:t>Job gross margin, October so far · Maintenance contracts</a:t>
             </a:r>
@@ -13069,12 +14075,17 @@
           </a:bodyPr>
           <a:lstStyle/>
           <a:p>
+            <a:pPr>
+              <a:defRPr>
+                <a:latin typeface="Roboto"/>
+              </a:defRPr>
+            </a:pPr>
             <a:r>
               <a:rPr sz="3000" b="1">
                 <a:solidFill>
                   <a:srgbClr val="2F7A5D"/>
                 </a:solidFill>
-                <a:latin typeface="Arial"/>
+                <a:latin typeface="Roboto"/>
               </a:rPr>
               <a:t>59.5%</a:t>
             </a:r>
@@ -13103,12 +14114,17 @@
           </a:bodyPr>
           <a:lstStyle/>
           <a:p>
+            <a:pPr>
+              <a:defRPr>
+                <a:latin typeface="Roboto"/>
+              </a:defRPr>
+            </a:pPr>
             <a:r>
               <a:rPr sz="1100" b="0">
                 <a:solidFill>
                   <a:srgbClr val="5F6F63"/>
                 </a:solidFill>
-                <a:latin typeface="Arial"/>
+                <a:latin typeface="Roboto"/>
               </a:rPr>
               <a:t>September 59.5%</a:t>
             </a:r>
@@ -13137,12 +14153,17 @@
           </a:bodyPr>
           <a:lstStyle/>
           <a:p>
+            <a:pPr>
+              <a:defRPr>
+                <a:latin typeface="Roboto"/>
+              </a:defRPr>
+            </a:pPr>
             <a:r>
               <a:rPr sz="900" b="0">
                 <a:solidFill>
                   <a:srgbClr val="5F6F63"/>
                 </a:solidFill>
-                <a:latin typeface="Arial"/>
+                <a:latin typeface="Roboto"/>
               </a:rPr>
               <a:t>job-margins.pptx</a:t>
             </a:r>
@@ -13171,13 +14192,17 @@
           </a:bodyPr>
           <a:lstStyle/>
           <a:p>
-            <a:pPr algn="ctr"/>
+            <a:pPr algn="ctr">
+              <a:defRPr>
+                <a:latin typeface="Roboto"/>
+              </a:defRPr>
+            </a:pPr>
             <a:r>
               <a:rPr sz="900" b="0">
                 <a:solidFill>
                   <a:srgbClr val="5F6F63"/>
                 </a:solidFill>
-                <a:latin typeface="Arial"/>
+                <a:latin typeface="Roboto"/>
               </a:rPr>
               <a:t>Data retrieved 2pm, Tue 6 Oct 2026 · Sample data</a:t>
             </a:r>
@@ -13206,13 +14231,17 @@
           </a:bodyPr>
           <a:lstStyle/>
           <a:p>
-            <a:pPr algn="r"/>
+            <a:pPr algn="r">
+              <a:defRPr>
+                <a:latin typeface="Roboto"/>
+              </a:defRPr>
+            </a:pPr>
             <a:r>
               <a:rPr sz="900" b="0">
                 <a:solidFill>
                   <a:srgbClr val="5F6F63"/>
                 </a:solidFill>
-                <a:latin typeface="Arial"/>
+                <a:latin typeface="Roboto"/>
               </a:rPr>
               <a:t>Slide 8 of 21</a:t>
             </a:r>
@@ -13276,7 +14305,11 @@
           <a:bodyPr rtlCol="0" anchor="ctr"/>
           <a:lstStyle/>
           <a:p>
-            <a:pPr algn="ctr"/>
+            <a:pPr algn="ctr">
+              <a:defRPr>
+                <a:latin typeface="Roboto"/>
+              </a:defRPr>
+            </a:pPr>
           </a:p>
         </p:txBody>
       </p:sp>
@@ -13302,12 +14335,17 @@
           </a:bodyPr>
           <a:lstStyle/>
           <a:p>
+            <a:pPr>
+              <a:defRPr>
+                <a:latin typeface="Roboto"/>
+              </a:defRPr>
+            </a:pPr>
             <a:r>
               <a:rPr sz="1000" b="0">
                 <a:solidFill>
                   <a:srgbClr val="5F6F63"/>
                 </a:solidFill>
-                <a:latin typeface="Arial"/>
+                <a:latin typeface="Roboto"/>
               </a:rPr>
               <a:t>Sample Electrical &amp; Air Pty Ltd · Which jobs actually make money?</a:t>
             </a:r>
@@ -13336,12 +14374,17 @@
           </a:bodyPr>
           <a:lstStyle/>
           <a:p>
+            <a:pPr>
+              <a:defRPr>
+                <a:latin typeface="Roboto"/>
+              </a:defRPr>
+            </a:pPr>
             <a:r>
               <a:rPr sz="2400" b="1">
                 <a:solidFill>
                   <a:srgbClr val="25342A"/>
                 </a:solidFill>
-                <a:latin typeface="Arial"/>
+                <a:latin typeface="Roboto"/>
               </a:rPr>
               <a:t>Job gross margin on each maintenance contract, October 2026 to date · Gross margin % · Type of job: Maintenance contracts</a:t>
             </a:r>
@@ -13370,12 +14413,17 @@
           </a:bodyPr>
           <a:lstStyle/>
           <a:p>
+            <a:pPr>
+              <a:defRPr>
+                <a:latin typeface="Roboto"/>
+              </a:defRPr>
+            </a:pPr>
             <a:r>
               <a:rPr sz="1200" b="0">
                 <a:solidFill>
                   <a:srgbClr val="5F6F63"/>
                 </a:solidFill>
-                <a:latin typeface="Arial"/>
+                <a:latin typeface="Roboto"/>
               </a:rPr>
               <a:t>The month's fee less materials and technician time at $68/hour.</a:t>
             </a:r>
@@ -13422,12 +14470,17 @@
           </a:bodyPr>
           <a:lstStyle/>
           <a:p>
+            <a:pPr>
+              <a:defRPr>
+                <a:latin typeface="Roboto"/>
+              </a:defRPr>
+            </a:pPr>
             <a:r>
               <a:rPr sz="1000" b="0">
                 <a:solidFill>
                   <a:srgbClr val="5F6F63"/>
                 </a:solidFill>
-                <a:latin typeface="Arial"/>
+                <a:latin typeface="Roboto"/>
               </a:rPr>
               <a:t>Target 35.0%  ·  grey = below target</a:t>
             </a:r>
@@ -13456,12 +14509,17 @@
           </a:bodyPr>
           <a:lstStyle/>
           <a:p>
+            <a:pPr>
+              <a:defRPr>
+                <a:latin typeface="Roboto"/>
+              </a:defRPr>
+            </a:pPr>
             <a:r>
               <a:rPr sz="900" b="0">
                 <a:solidFill>
                   <a:srgbClr val="5F6F63"/>
                 </a:solidFill>
-                <a:latin typeface="Arial"/>
+                <a:latin typeface="Roboto"/>
               </a:rPr>
               <a:t>job-margins.pptx</a:t>
             </a:r>
@@ -13490,13 +14548,17 @@
           </a:bodyPr>
           <a:lstStyle/>
           <a:p>
-            <a:pPr algn="ctr"/>
+            <a:pPr algn="ctr">
+              <a:defRPr>
+                <a:latin typeface="Roboto"/>
+              </a:defRPr>
+            </a:pPr>
             <a:r>
               <a:rPr sz="900" b="0">
                 <a:solidFill>
                   <a:srgbClr val="5F6F63"/>
                 </a:solidFill>
-                <a:latin typeface="Arial"/>
+                <a:latin typeface="Roboto"/>
               </a:rPr>
               <a:t>Data retrieved 2pm, Tue 6 Oct 2026 · Sample data</a:t>
             </a:r>
@@ -13525,13 +14587,17 @@
           </a:bodyPr>
           <a:lstStyle/>
           <a:p>
-            <a:pPr algn="r"/>
+            <a:pPr algn="r">
+              <a:defRPr>
+                <a:latin typeface="Roboto"/>
+              </a:defRPr>
+            </a:pPr>
             <a:r>
               <a:rPr sz="900" b="0">
                 <a:solidFill>
                   <a:srgbClr val="5F6F63"/>
                 </a:solidFill>
-                <a:latin typeface="Arial"/>
+                <a:latin typeface="Roboto"/>
               </a:rPr>
               <a:t>Slide 9 of 21</a:t>
             </a:r>

--- a/media/exports/reports/2026-10/job-margins.pptx
+++ b/media/exports/reports/2026-10/job-margins.pptx
@@ -154,7 +154,7 @@
             <c:idx val="0"/>
             <c:spPr>
               <a:solidFill>
-                <a:srgbClr val="A7B0B8"/>
+                <a:srgbClr val="7D8790"/>
               </a:solidFill>
             </c:spPr>
           </c:dPt>
@@ -622,7 +622,7 @@
             <c:idx val="0"/>
             <c:spPr>
               <a:solidFill>
-                <a:srgbClr val="A7B0B8"/>
+                <a:srgbClr val="7D8790"/>
               </a:solidFill>
             </c:spPr>
           </c:dPt>
@@ -1440,7 +1440,7 @@
             <c:idx val="0"/>
             <c:spPr>
               <a:solidFill>
-                <a:srgbClr val="A7B0B8"/>
+                <a:srgbClr val="7D8790"/>
               </a:solidFill>
             </c:spPr>
           </c:dPt>
@@ -1582,7 +1582,7 @@
             <c:idx val="0"/>
             <c:spPr>
               <a:solidFill>
-                <a:srgbClr val="A7B0B8"/>
+                <a:srgbClr val="7D8790"/>
               </a:solidFill>
             </c:spPr>
           </c:dPt>

--- a/media/exports/reports/2026-10/job-margins.pptx
+++ b/media/exports/reports/2026-10/job-margins.pptx
@@ -5618,7 +5618,7 @@
                 </a:solidFill>
                 <a:latin typeface="Roboto"/>
               </a:rPr>
-              <a:t>Period: October 2026 to date. Every job's gross margin: revenue less materials, subcontractors and technician time at $68 an hour (fully loaded: wages and all on-costs). Before overheads, so this is not profit. Pick a type of job and every number, chart and note on the page follows it.</a:t>
+              <a:t>Period: October 2026 to date. Every job's gross margin: revenue less materials, subcontractors and technician time at $68 an hour (fully loaded: wages and all on-costs). Pick a type of job and every number, chart and note on the page follows it.</a:t>
             </a:r>
           </a:p>
         </p:txBody>
@@ -5988,7 +5988,7 @@
                 </a:solidFill>
                 <a:latin typeface="Roboto"/>
               </a:rPr>
-              <a:t>The month's fee less materials and technician time at $68/hour.</a:t>
+              <a:t>The month's fee less materials and technician time at $68/hour. Target 35.0% is what to price for; break-even 31.1% only covers overheads and time not charged.</a:t>
             </a:r>
           </a:p>
         </p:txBody>
@@ -6520,7 +6520,7 @@
                 </a:solidFill>
                 <a:latin typeface="Roboto"/>
               </a:rPr>
-              <a:t>The Kangaroo Point townhouses contract: 58.2% gross margin, 27.1 points clear of the 31.1% overheads need. Maintenance contracts overall: 59.5% gross margin.</a:t>
+              <a:t>The thinnest, Kangaroo Point townhouses: 58.2% gross margin, 23.3 points over the 35.0% target ($558 ahead on $2,400 in October so far). All maintenance contracts: 59.5% gross margin, 24.5 points over the 35.0% target ($9,941 ahead on $40,500 in October so far).</a:t>
             </a:r>
           </a:p>
         </p:txBody>
@@ -6794,7 +6794,7 @@
         <p:spPr>
           <a:xfrm>
             <a:off x="457200" y="1645920"/>
-            <a:ext cx="11277295" cy="2011680"/>
+            <a:ext cx="3576218" cy="2011680"/>
           </a:xfrm>
           <a:prstGeom prst="rect">
             <a:avLst/>
@@ -6843,7 +6843,7 @@
         <p:spPr>
           <a:xfrm>
             <a:off x="640080" y="1783080"/>
-            <a:ext cx="10911535" cy="457200"/>
+            <a:ext cx="3210458" cy="457200"/>
           </a:xfrm>
           <a:prstGeom prst="rect">
             <a:avLst/>
@@ -6882,7 +6882,7 @@
         <p:spPr>
           <a:xfrm>
             <a:off x="640080" y="2240280"/>
-            <a:ext cx="10911535" cy="731520"/>
+            <a:ext cx="3210458" cy="731520"/>
           </a:xfrm>
           <a:prstGeom prst="rect">
             <a:avLst/>
@@ -6921,7 +6921,7 @@
         <p:spPr>
           <a:xfrm>
             <a:off x="640080" y="3017520"/>
-            <a:ext cx="10911535" cy="548640"/>
+            <a:ext cx="3210458" cy="548640"/>
           </a:xfrm>
           <a:prstGeom prst="rect">
             <a:avLst/>
@@ -6946,14 +6946,346 @@
                 </a:solidFill>
                 <a:latin typeface="Roboto"/>
               </a:rPr>
-              <a:t>September 27.0%</a:t>
-            </a:r>
-          </a:p>
-        </p:txBody>
-      </p:sp>
-      <p:sp>
-        <p:nvSpPr>
-          <p:cNvPr id="9" name="TextBox 8"/>
+              <a:t>target 35.0%</a:t>
+            </a:r>
+          </a:p>
+        </p:txBody>
+      </p:sp>
+      <p:sp>
+        <p:nvSpPr>
+          <p:cNvPr id="9" name="Rectangle 8"/>
+          <p:cNvSpPr/>
+          <p:nvPr/>
+        </p:nvSpPr>
+        <p:spPr>
+          <a:xfrm>
+            <a:off x="4307738" y="1645920"/>
+            <a:ext cx="3576218" cy="2011680"/>
+          </a:xfrm>
+          <a:prstGeom prst="rect">
+            <a:avLst/>
+          </a:prstGeom>
+          <a:solidFill>
+            <a:srgbClr val="F7FAF7"/>
+          </a:solidFill>
+          <a:ln>
+            <a:solidFill>
+              <a:srgbClr val="DCE8DC"/>
+            </a:solidFill>
+          </a:ln>
+        </p:spPr>
+        <p:style>
+          <a:lnRef idx="1">
+            <a:schemeClr val="accent1"/>
+          </a:lnRef>
+          <a:fillRef idx="3">
+            <a:schemeClr val="accent1"/>
+          </a:fillRef>
+          <a:effectRef idx="2">
+            <a:schemeClr val="accent1"/>
+          </a:effectRef>
+          <a:fontRef idx="minor">
+            <a:schemeClr val="lt1"/>
+          </a:fontRef>
+        </p:style>
+        <p:txBody>
+          <a:bodyPr rtlCol="0" anchor="ctr"/>
+          <a:lstStyle/>
+          <a:p>
+            <a:pPr algn="ctr">
+              <a:defRPr>
+                <a:latin typeface="Roboto"/>
+              </a:defRPr>
+            </a:pPr>
+          </a:p>
+        </p:txBody>
+      </p:sp>
+      <p:sp>
+        <p:nvSpPr>
+          <p:cNvPr id="10" name="TextBox 9"/>
+          <p:cNvSpPr txBox="1"/>
+          <p:nvPr/>
+        </p:nvSpPr>
+        <p:spPr>
+          <a:xfrm>
+            <a:off x="4490618" y="1783080"/>
+            <a:ext cx="3210458" cy="457200"/>
+          </a:xfrm>
+          <a:prstGeom prst="rect">
+            <a:avLst/>
+          </a:prstGeom>
+          <a:noFill/>
+        </p:spPr>
+        <p:txBody>
+          <a:bodyPr wrap="square">
+            <a:spAutoFit/>
+          </a:bodyPr>
+          <a:lstStyle/>
+          <a:p>
+            <a:pPr>
+              <a:defRPr>
+                <a:latin typeface="Roboto"/>
+              </a:defRPr>
+            </a:pPr>
+            <a:r>
+              <a:rPr sz="1200" b="0">
+                <a:solidFill>
+                  <a:srgbClr val="5F6F63"/>
+                </a:solidFill>
+                <a:latin typeface="Roboto"/>
+              </a:rPr>
+              <a:t>Job gross margin, September · Installations</a:t>
+            </a:r>
+          </a:p>
+        </p:txBody>
+      </p:sp>
+      <p:sp>
+        <p:nvSpPr>
+          <p:cNvPr id="11" name="TextBox 10"/>
+          <p:cNvSpPr txBox="1"/>
+          <p:nvPr/>
+        </p:nvSpPr>
+        <p:spPr>
+          <a:xfrm>
+            <a:off x="4490618" y="2240280"/>
+            <a:ext cx="3210458" cy="731520"/>
+          </a:xfrm>
+          <a:prstGeom prst="rect">
+            <a:avLst/>
+          </a:prstGeom>
+          <a:noFill/>
+        </p:spPr>
+        <p:txBody>
+          <a:bodyPr wrap="square">
+            <a:spAutoFit/>
+          </a:bodyPr>
+          <a:lstStyle/>
+          <a:p>
+            <a:pPr>
+              <a:defRPr>
+                <a:latin typeface="Roboto"/>
+              </a:defRPr>
+            </a:pPr>
+            <a:r>
+              <a:rPr sz="3000" b="1">
+                <a:solidFill>
+                  <a:srgbClr val="2F7A5D"/>
+                </a:solidFill>
+                <a:latin typeface="Roboto"/>
+              </a:rPr>
+              <a:t>27.0%</a:t>
+            </a:r>
+          </a:p>
+        </p:txBody>
+      </p:sp>
+      <p:sp>
+        <p:nvSpPr>
+          <p:cNvPr id="12" name="TextBox 11"/>
+          <p:cNvSpPr txBox="1"/>
+          <p:nvPr/>
+        </p:nvSpPr>
+        <p:spPr>
+          <a:xfrm>
+            <a:off x="4490618" y="3017520"/>
+            <a:ext cx="3210458" cy="548640"/>
+          </a:xfrm>
+          <a:prstGeom prst="rect">
+            <a:avLst/>
+          </a:prstGeom>
+          <a:noFill/>
+        </p:spPr>
+        <p:txBody>
+          <a:bodyPr wrap="square">
+            <a:spAutoFit/>
+          </a:bodyPr>
+          <a:lstStyle/>
+          <a:p>
+            <a:pPr>
+              <a:defRPr>
+                <a:latin typeface="Roboto"/>
+              </a:defRPr>
+            </a:pPr>
+            <a:r>
+              <a:rPr sz="1100" b="0">
+                <a:solidFill>
+                  <a:srgbClr val="5F6F63"/>
+                </a:solidFill>
+                <a:latin typeface="Roboto"/>
+              </a:rPr>
+              <a:t>target 35.0%</a:t>
+            </a:r>
+          </a:p>
+        </p:txBody>
+      </p:sp>
+      <p:sp>
+        <p:nvSpPr>
+          <p:cNvPr id="13" name="Rectangle 12"/>
+          <p:cNvSpPr/>
+          <p:nvPr/>
+        </p:nvSpPr>
+        <p:spPr>
+          <a:xfrm>
+            <a:off x="8158276" y="1645920"/>
+            <a:ext cx="3576218" cy="2011680"/>
+          </a:xfrm>
+          <a:prstGeom prst="rect">
+            <a:avLst/>
+          </a:prstGeom>
+          <a:solidFill>
+            <a:srgbClr val="F7FAF7"/>
+          </a:solidFill>
+          <a:ln>
+            <a:solidFill>
+              <a:srgbClr val="DCE8DC"/>
+            </a:solidFill>
+          </a:ln>
+        </p:spPr>
+        <p:style>
+          <a:lnRef idx="1">
+            <a:schemeClr val="accent1"/>
+          </a:lnRef>
+          <a:fillRef idx="3">
+            <a:schemeClr val="accent1"/>
+          </a:fillRef>
+          <a:effectRef idx="2">
+            <a:schemeClr val="accent1"/>
+          </a:effectRef>
+          <a:fontRef idx="minor">
+            <a:schemeClr val="lt1"/>
+          </a:fontRef>
+        </p:style>
+        <p:txBody>
+          <a:bodyPr rtlCol="0" anchor="ctr"/>
+          <a:lstStyle/>
+          <a:p>
+            <a:pPr algn="ctr">
+              <a:defRPr>
+                <a:latin typeface="Roboto"/>
+              </a:defRPr>
+            </a:pPr>
+          </a:p>
+        </p:txBody>
+      </p:sp>
+      <p:sp>
+        <p:nvSpPr>
+          <p:cNvPr id="14" name="TextBox 13"/>
+          <p:cNvSpPr txBox="1"/>
+          <p:nvPr/>
+        </p:nvSpPr>
+        <p:spPr>
+          <a:xfrm>
+            <a:off x="8341156" y="1783080"/>
+            <a:ext cx="3210458" cy="457200"/>
+          </a:xfrm>
+          <a:prstGeom prst="rect">
+            <a:avLst/>
+          </a:prstGeom>
+          <a:noFill/>
+        </p:spPr>
+        <p:txBody>
+          <a:bodyPr wrap="square">
+            <a:spAutoFit/>
+          </a:bodyPr>
+          <a:lstStyle/>
+          <a:p>
+            <a:pPr>
+              <a:defRPr>
+                <a:latin typeface="Roboto"/>
+              </a:defRPr>
+            </a:pPr>
+            <a:r>
+              <a:rPr sz="1200" b="0">
+                <a:solidFill>
+                  <a:srgbClr val="5F6F63"/>
+                </a:solidFill>
+                <a:latin typeface="Roboto"/>
+              </a:rPr>
+              <a:t>Gross margin jobs need to break even</a:t>
+            </a:r>
+          </a:p>
+        </p:txBody>
+      </p:sp>
+      <p:sp>
+        <p:nvSpPr>
+          <p:cNvPr id="15" name="TextBox 14"/>
+          <p:cNvSpPr txBox="1"/>
+          <p:nvPr/>
+        </p:nvSpPr>
+        <p:spPr>
+          <a:xfrm>
+            <a:off x="8341156" y="2240280"/>
+            <a:ext cx="3210458" cy="731520"/>
+          </a:xfrm>
+          <a:prstGeom prst="rect">
+            <a:avLst/>
+          </a:prstGeom>
+          <a:noFill/>
+        </p:spPr>
+        <p:txBody>
+          <a:bodyPr wrap="square">
+            <a:spAutoFit/>
+          </a:bodyPr>
+          <a:lstStyle/>
+          <a:p>
+            <a:pPr>
+              <a:defRPr>
+                <a:latin typeface="Roboto"/>
+              </a:defRPr>
+            </a:pPr>
+            <a:r>
+              <a:rPr sz="3000" b="1">
+                <a:solidFill>
+                  <a:srgbClr val="2F7A5D"/>
+                </a:solidFill>
+                <a:latin typeface="Roboto"/>
+              </a:rPr>
+              <a:t>31.1%</a:t>
+            </a:r>
+          </a:p>
+        </p:txBody>
+      </p:sp>
+      <p:sp>
+        <p:nvSpPr>
+          <p:cNvPr id="16" name="TextBox 15"/>
+          <p:cNvSpPr txBox="1"/>
+          <p:nvPr/>
+        </p:nvSpPr>
+        <p:spPr>
+          <a:xfrm>
+            <a:off x="8341156" y="3017520"/>
+            <a:ext cx="3210458" cy="548640"/>
+          </a:xfrm>
+          <a:prstGeom prst="rect">
+            <a:avLst/>
+          </a:prstGeom>
+          <a:noFill/>
+        </p:spPr>
+        <p:txBody>
+          <a:bodyPr wrap="square">
+            <a:spAutoFit/>
+          </a:bodyPr>
+          <a:lstStyle/>
+          <a:p>
+            <a:pPr>
+              <a:defRPr>
+                <a:latin typeface="Roboto"/>
+              </a:defRPr>
+            </a:pPr>
+            <a:r>
+              <a:rPr sz="1100" b="0">
+                <a:solidFill>
+                  <a:srgbClr val="5F6F63"/>
+                </a:solidFill>
+                <a:latin typeface="Roboto"/>
+              </a:rPr>
+              <a:t>covers overheads and time not charged (September)</a:t>
+            </a:r>
+          </a:p>
+        </p:txBody>
+      </p:sp>
+      <p:sp>
+        <p:nvSpPr>
+          <p:cNvPr id="17" name="TextBox 16"/>
           <p:cNvSpPr txBox="1"/>
           <p:nvPr/>
         </p:nvSpPr>
@@ -6992,7 +7324,7 @@
       </p:sp>
       <p:sp>
         <p:nvSpPr>
-          <p:cNvPr id="10" name="TextBox 9"/>
+          <p:cNvPr id="18" name="TextBox 17"/>
           <p:cNvSpPr txBox="1"/>
           <p:nvPr/>
         </p:nvSpPr>
@@ -7031,7 +7363,7 @@
       </p:sp>
       <p:sp>
         <p:nvSpPr>
-          <p:cNvPr id="11" name="TextBox 10"/>
+          <p:cNvPr id="19" name="TextBox 18"/>
           <p:cNvSpPr txBox="1"/>
           <p:nvPr/>
         </p:nvSpPr>
@@ -7245,7 +7577,7 @@
                 </a:solidFill>
                 <a:latin typeface="Roboto"/>
               </a:rPr>
-              <a:t>Whole job, recognised when invoiced: revenue less materials, subcontractors and technician time at $68/hour. Before overheads: not profit. One 35.0% target for every job for now.</a:t>
+              <a:t>Whole job, recognised when invoiced: revenue less materials, subcontractors and technician time at $68/hour. One target for every job for now. Target 35.0% is what to price for; break-even 31.1% only covers overheads and time not charged.</a:t>
             </a:r>
           </a:p>
         </p:txBody>
@@ -7601,7 +7933,7 @@
                 </a:solidFill>
                 <a:latin typeface="Roboto"/>
               </a:rPr>
-              <a:t>Whole job, recognised when invoiced: revenue less materials, subcontractors and technician time at $68/hour. Before overheads: not profit. One 35.0% target for every job for now.</a:t>
+              <a:t>Whole job, recognised when invoiced: revenue less materials, subcontractors and technician time at $68/hour. One target for every job for now. Target 35.0% is what to price for; break-even 31.1% only covers overheads and time not charged.</a:t>
             </a:r>
           </a:p>
         </p:txBody>
@@ -8133,7 +8465,7 @@
                 </a:solidFill>
                 <a:latin typeface="Roboto"/>
               </a:rPr>
-              <a:t>Below the 31.1% overheads need: Morningside house air-con install (22.0%). Most profitable: Morningside house air-con install (22.0%).</a:t>
+              <a:t>1 installation under the 35.0% target, worth about $4,292 between them on $33,000 of revenue. The biggest gap, Morningside house air-con install: 22.0% gross margin, 13.0 points under the 35.0% target: about $4,292 on $33,000 of revenue in October so far. It's below the 31.1% needed to cover overheads, too.</a:t>
             </a:r>
           </a:p>
         </p:txBody>
@@ -8407,7 +8739,7 @@
         <p:spPr>
           <a:xfrm>
             <a:off x="457200" y="1645920"/>
-            <a:ext cx="3576218" cy="2011680"/>
+            <a:ext cx="2036003" cy="2011680"/>
           </a:xfrm>
           <a:prstGeom prst="rect">
             <a:avLst/>
@@ -8456,7 +8788,7 @@
         <p:spPr>
           <a:xfrm>
             <a:off x="640080" y="1783080"/>
-            <a:ext cx="3210458" cy="457200"/>
+            <a:ext cx="1670243" cy="457200"/>
           </a:xfrm>
           <a:prstGeom prst="rect">
             <a:avLst/>
@@ -8495,7 +8827,7 @@
         <p:spPr>
           <a:xfrm>
             <a:off x="640080" y="2240280"/>
-            <a:ext cx="3210458" cy="731520"/>
+            <a:ext cx="1670243" cy="731520"/>
           </a:xfrm>
           <a:prstGeom prst="rect">
             <a:avLst/>
@@ -8534,7 +8866,7 @@
         <p:spPr>
           <a:xfrm>
             <a:off x="640080" y="3017520"/>
-            <a:ext cx="3210458" cy="548640"/>
+            <a:ext cx="1670243" cy="548640"/>
           </a:xfrm>
           <a:prstGeom prst="rect">
             <a:avLst/>
@@ -8559,7 +8891,7 @@
                 </a:solidFill>
                 <a:latin typeface="Roboto"/>
               </a:rPr>
-              <a:t>September 43.9%</a:t>
+              <a:t>target 35.0%</a:t>
             </a:r>
           </a:p>
         </p:txBody>
@@ -8572,8 +8904,8 @@
         </p:nvSpPr>
         <p:spPr>
           <a:xfrm>
-            <a:off x="4307738" y="1645920"/>
-            <a:ext cx="3576218" cy="2011680"/>
+            <a:off x="2767523" y="1645920"/>
+            <a:ext cx="2036003" cy="2011680"/>
           </a:xfrm>
           <a:prstGeom prst="rect">
             <a:avLst/>
@@ -8621,8 +8953,8 @@
         </p:nvSpPr>
         <p:spPr>
           <a:xfrm>
-            <a:off x="4490618" y="1783080"/>
-            <a:ext cx="3210458" cy="457200"/>
+            <a:off x="2950403" y="1783080"/>
+            <a:ext cx="1670243" cy="457200"/>
           </a:xfrm>
           <a:prstGeom prst="rect">
             <a:avLst/>
@@ -8647,7 +8979,7 @@
                 </a:solidFill>
                 <a:latin typeface="Roboto"/>
               </a:rPr>
-              <a:t>Technician time charged, October so far</a:t>
+              <a:t>Job gross margin, September · Call-outs and repairs</a:t>
             </a:r>
           </a:p>
         </p:txBody>
@@ -8660,8 +8992,8 @@
         </p:nvSpPr>
         <p:spPr>
           <a:xfrm>
-            <a:off x="4490618" y="2240280"/>
-            <a:ext cx="3210458" cy="731520"/>
+            <a:off x="2950403" y="2240280"/>
+            <a:ext cx="1670243" cy="731520"/>
           </a:xfrm>
           <a:prstGeom prst="rect">
             <a:avLst/>
@@ -8686,7 +9018,7 @@
                 </a:solidFill>
                 <a:latin typeface="Roboto"/>
               </a:rPr>
-              <a:t>$2,465</a:t>
+              <a:t>43.9%</a:t>
             </a:r>
           </a:p>
         </p:txBody>
@@ -8699,8 +9031,8 @@
         </p:nvSpPr>
         <p:spPr>
           <a:xfrm>
-            <a:off x="4490618" y="3017520"/>
-            <a:ext cx="3210458" cy="548640"/>
+            <a:off x="2950403" y="3017520"/>
+            <a:ext cx="1670243" cy="548640"/>
           </a:xfrm>
           <a:prstGeom prst="rect">
             <a:avLst/>
@@ -8725,7 +9057,7 @@
                 </a:solidFill>
                 <a:latin typeface="Roboto"/>
               </a:rPr>
-              <a:t>73.0% of call-out revenue</a:t>
+              <a:t>target 35.0%</a:t>
             </a:r>
           </a:p>
         </p:txBody>
@@ -8738,8 +9070,8 @@
         </p:nvSpPr>
         <p:spPr>
           <a:xfrm>
-            <a:off x="8158276" y="1645920"/>
-            <a:ext cx="3576218" cy="2011680"/>
+            <a:off x="5077846" y="1645920"/>
+            <a:ext cx="2036003" cy="2011680"/>
           </a:xfrm>
           <a:prstGeom prst="rect">
             <a:avLst/>
@@ -8787,8 +9119,8 @@
         </p:nvSpPr>
         <p:spPr>
           <a:xfrm>
-            <a:off x="8341156" y="1783080"/>
-            <a:ext cx="3210458" cy="457200"/>
+            <a:off x="5260726" y="1783080"/>
+            <a:ext cx="1670243" cy="457200"/>
           </a:xfrm>
           <a:prstGeom prst="rect">
             <a:avLst/>
@@ -8813,6 +9145,338 @@
                 </a:solidFill>
                 <a:latin typeface="Roboto"/>
               </a:rPr>
+              <a:t>Gross margin jobs need to break even</a:t>
+            </a:r>
+          </a:p>
+        </p:txBody>
+      </p:sp>
+      <p:sp>
+        <p:nvSpPr>
+          <p:cNvPr id="15" name="TextBox 14"/>
+          <p:cNvSpPr txBox="1"/>
+          <p:nvPr/>
+        </p:nvSpPr>
+        <p:spPr>
+          <a:xfrm>
+            <a:off x="5260726" y="2240280"/>
+            <a:ext cx="1670243" cy="731520"/>
+          </a:xfrm>
+          <a:prstGeom prst="rect">
+            <a:avLst/>
+          </a:prstGeom>
+          <a:noFill/>
+        </p:spPr>
+        <p:txBody>
+          <a:bodyPr wrap="square">
+            <a:spAutoFit/>
+          </a:bodyPr>
+          <a:lstStyle/>
+          <a:p>
+            <a:pPr>
+              <a:defRPr>
+                <a:latin typeface="Roboto"/>
+              </a:defRPr>
+            </a:pPr>
+            <a:r>
+              <a:rPr sz="3000" b="1">
+                <a:solidFill>
+                  <a:srgbClr val="2F7A5D"/>
+                </a:solidFill>
+                <a:latin typeface="Roboto"/>
+              </a:rPr>
+              <a:t>31.1%</a:t>
+            </a:r>
+          </a:p>
+        </p:txBody>
+      </p:sp>
+      <p:sp>
+        <p:nvSpPr>
+          <p:cNvPr id="16" name="TextBox 15"/>
+          <p:cNvSpPr txBox="1"/>
+          <p:nvPr/>
+        </p:nvSpPr>
+        <p:spPr>
+          <a:xfrm>
+            <a:off x="5260726" y="3017520"/>
+            <a:ext cx="1670243" cy="548640"/>
+          </a:xfrm>
+          <a:prstGeom prst="rect">
+            <a:avLst/>
+          </a:prstGeom>
+          <a:noFill/>
+        </p:spPr>
+        <p:txBody>
+          <a:bodyPr wrap="square">
+            <a:spAutoFit/>
+          </a:bodyPr>
+          <a:lstStyle/>
+          <a:p>
+            <a:pPr>
+              <a:defRPr>
+                <a:latin typeface="Roboto"/>
+              </a:defRPr>
+            </a:pPr>
+            <a:r>
+              <a:rPr sz="1100" b="0">
+                <a:solidFill>
+                  <a:srgbClr val="5F6F63"/>
+                </a:solidFill>
+                <a:latin typeface="Roboto"/>
+              </a:rPr>
+              <a:t>covers overheads and time not charged (September)</a:t>
+            </a:r>
+          </a:p>
+        </p:txBody>
+      </p:sp>
+      <p:sp>
+        <p:nvSpPr>
+          <p:cNvPr id="17" name="Rectangle 16"/>
+          <p:cNvSpPr/>
+          <p:nvPr/>
+        </p:nvSpPr>
+        <p:spPr>
+          <a:xfrm>
+            <a:off x="7388169" y="1645920"/>
+            <a:ext cx="2036003" cy="2011680"/>
+          </a:xfrm>
+          <a:prstGeom prst="rect">
+            <a:avLst/>
+          </a:prstGeom>
+          <a:solidFill>
+            <a:srgbClr val="F7FAF7"/>
+          </a:solidFill>
+          <a:ln>
+            <a:solidFill>
+              <a:srgbClr val="DCE8DC"/>
+            </a:solidFill>
+          </a:ln>
+        </p:spPr>
+        <p:style>
+          <a:lnRef idx="1">
+            <a:schemeClr val="accent1"/>
+          </a:lnRef>
+          <a:fillRef idx="3">
+            <a:schemeClr val="accent1"/>
+          </a:fillRef>
+          <a:effectRef idx="2">
+            <a:schemeClr val="accent1"/>
+          </a:effectRef>
+          <a:fontRef idx="minor">
+            <a:schemeClr val="lt1"/>
+          </a:fontRef>
+        </p:style>
+        <p:txBody>
+          <a:bodyPr rtlCol="0" anchor="ctr"/>
+          <a:lstStyle/>
+          <a:p>
+            <a:pPr algn="ctr">
+              <a:defRPr>
+                <a:latin typeface="Roboto"/>
+              </a:defRPr>
+            </a:pPr>
+          </a:p>
+        </p:txBody>
+      </p:sp>
+      <p:sp>
+        <p:nvSpPr>
+          <p:cNvPr id="18" name="TextBox 17"/>
+          <p:cNvSpPr txBox="1"/>
+          <p:nvPr/>
+        </p:nvSpPr>
+        <p:spPr>
+          <a:xfrm>
+            <a:off x="7571049" y="1783080"/>
+            <a:ext cx="1670243" cy="457200"/>
+          </a:xfrm>
+          <a:prstGeom prst="rect">
+            <a:avLst/>
+          </a:prstGeom>
+          <a:noFill/>
+        </p:spPr>
+        <p:txBody>
+          <a:bodyPr wrap="square">
+            <a:spAutoFit/>
+          </a:bodyPr>
+          <a:lstStyle/>
+          <a:p>
+            <a:pPr>
+              <a:defRPr>
+                <a:latin typeface="Roboto"/>
+              </a:defRPr>
+            </a:pPr>
+            <a:r>
+              <a:rPr sz="1200" b="0">
+                <a:solidFill>
+                  <a:srgbClr val="5F6F63"/>
+                </a:solidFill>
+                <a:latin typeface="Roboto"/>
+              </a:rPr>
+              <a:t>Technician time charged, October so far</a:t>
+            </a:r>
+          </a:p>
+        </p:txBody>
+      </p:sp>
+      <p:sp>
+        <p:nvSpPr>
+          <p:cNvPr id="19" name="TextBox 18"/>
+          <p:cNvSpPr txBox="1"/>
+          <p:nvPr/>
+        </p:nvSpPr>
+        <p:spPr>
+          <a:xfrm>
+            <a:off x="7571049" y="2240280"/>
+            <a:ext cx="1670243" cy="731520"/>
+          </a:xfrm>
+          <a:prstGeom prst="rect">
+            <a:avLst/>
+          </a:prstGeom>
+          <a:noFill/>
+        </p:spPr>
+        <p:txBody>
+          <a:bodyPr wrap="square">
+            <a:spAutoFit/>
+          </a:bodyPr>
+          <a:lstStyle/>
+          <a:p>
+            <a:pPr>
+              <a:defRPr>
+                <a:latin typeface="Roboto"/>
+              </a:defRPr>
+            </a:pPr>
+            <a:r>
+              <a:rPr sz="3000" b="1">
+                <a:solidFill>
+                  <a:srgbClr val="2F7A5D"/>
+                </a:solidFill>
+                <a:latin typeface="Roboto"/>
+              </a:rPr>
+              <a:t>$2,465</a:t>
+            </a:r>
+          </a:p>
+        </p:txBody>
+      </p:sp>
+      <p:sp>
+        <p:nvSpPr>
+          <p:cNvPr id="20" name="TextBox 19"/>
+          <p:cNvSpPr txBox="1"/>
+          <p:nvPr/>
+        </p:nvSpPr>
+        <p:spPr>
+          <a:xfrm>
+            <a:off x="7571049" y="3017520"/>
+            <a:ext cx="1670243" cy="548640"/>
+          </a:xfrm>
+          <a:prstGeom prst="rect">
+            <a:avLst/>
+          </a:prstGeom>
+          <a:noFill/>
+        </p:spPr>
+        <p:txBody>
+          <a:bodyPr wrap="square">
+            <a:spAutoFit/>
+          </a:bodyPr>
+          <a:lstStyle/>
+          <a:p>
+            <a:pPr>
+              <a:defRPr>
+                <a:latin typeface="Roboto"/>
+              </a:defRPr>
+            </a:pPr>
+            <a:r>
+              <a:rPr sz="1100" b="0">
+                <a:solidFill>
+                  <a:srgbClr val="5F6F63"/>
+                </a:solidFill>
+                <a:latin typeface="Roboto"/>
+              </a:rPr>
+              <a:t>73.0% of call-out revenue</a:t>
+            </a:r>
+          </a:p>
+        </p:txBody>
+      </p:sp>
+      <p:sp>
+        <p:nvSpPr>
+          <p:cNvPr id="21" name="Rectangle 20"/>
+          <p:cNvSpPr/>
+          <p:nvPr/>
+        </p:nvSpPr>
+        <p:spPr>
+          <a:xfrm>
+            <a:off x="9698492" y="1645920"/>
+            <a:ext cx="2036003" cy="2011680"/>
+          </a:xfrm>
+          <a:prstGeom prst="rect">
+            <a:avLst/>
+          </a:prstGeom>
+          <a:solidFill>
+            <a:srgbClr val="F7FAF7"/>
+          </a:solidFill>
+          <a:ln>
+            <a:solidFill>
+              <a:srgbClr val="DCE8DC"/>
+            </a:solidFill>
+          </a:ln>
+        </p:spPr>
+        <p:style>
+          <a:lnRef idx="1">
+            <a:schemeClr val="accent1"/>
+          </a:lnRef>
+          <a:fillRef idx="3">
+            <a:schemeClr val="accent1"/>
+          </a:fillRef>
+          <a:effectRef idx="2">
+            <a:schemeClr val="accent1"/>
+          </a:effectRef>
+          <a:fontRef idx="minor">
+            <a:schemeClr val="lt1"/>
+          </a:fontRef>
+        </p:style>
+        <p:txBody>
+          <a:bodyPr rtlCol="0" anchor="ctr"/>
+          <a:lstStyle/>
+          <a:p>
+            <a:pPr algn="ctr">
+              <a:defRPr>
+                <a:latin typeface="Roboto"/>
+              </a:defRPr>
+            </a:pPr>
+          </a:p>
+        </p:txBody>
+      </p:sp>
+      <p:sp>
+        <p:nvSpPr>
+          <p:cNvPr id="22" name="TextBox 21"/>
+          <p:cNvSpPr txBox="1"/>
+          <p:nvPr/>
+        </p:nvSpPr>
+        <p:spPr>
+          <a:xfrm>
+            <a:off x="9881372" y="1783080"/>
+            <a:ext cx="1670243" cy="457200"/>
+          </a:xfrm>
+          <a:prstGeom prst="rect">
+            <a:avLst/>
+          </a:prstGeom>
+          <a:noFill/>
+        </p:spPr>
+        <p:txBody>
+          <a:bodyPr wrap="square">
+            <a:spAutoFit/>
+          </a:bodyPr>
+          <a:lstStyle/>
+          <a:p>
+            <a:pPr>
+              <a:defRPr>
+                <a:latin typeface="Roboto"/>
+              </a:defRPr>
+            </a:pPr>
+            <a:r>
+              <a:rPr sz="1200" b="0">
+                <a:solidFill>
+                  <a:srgbClr val="5F6F63"/>
+                </a:solidFill>
+                <a:latin typeface="Roboto"/>
+              </a:rPr>
               <a:t>Materials charged, October so far</a:t>
             </a:r>
           </a:p>
@@ -8820,14 +9484,14 @@
       </p:sp>
       <p:sp>
         <p:nvSpPr>
-          <p:cNvPr id="15" name="TextBox 14"/>
-          <p:cNvSpPr txBox="1"/>
-          <p:nvPr/>
-        </p:nvSpPr>
-        <p:spPr>
-          <a:xfrm>
-            <a:off x="8341156" y="2240280"/>
-            <a:ext cx="3210458" cy="731520"/>
+          <p:cNvPr id="23" name="TextBox 22"/>
+          <p:cNvSpPr txBox="1"/>
+          <p:nvPr/>
+        </p:nvSpPr>
+        <p:spPr>
+          <a:xfrm>
+            <a:off x="9881372" y="2240280"/>
+            <a:ext cx="1670243" cy="731520"/>
           </a:xfrm>
           <a:prstGeom prst="rect">
             <a:avLst/>
@@ -8859,14 +9523,14 @@
       </p:sp>
       <p:sp>
         <p:nvSpPr>
-          <p:cNvPr id="16" name="TextBox 15"/>
-          <p:cNvSpPr txBox="1"/>
-          <p:nvPr/>
-        </p:nvSpPr>
-        <p:spPr>
-          <a:xfrm>
-            <a:off x="8341156" y="3017520"/>
-            <a:ext cx="3210458" cy="548640"/>
+          <p:cNvPr id="24" name="TextBox 23"/>
+          <p:cNvSpPr txBox="1"/>
+          <p:nvPr/>
+        </p:nvSpPr>
+        <p:spPr>
+          <a:xfrm>
+            <a:off x="9881372" y="3017520"/>
+            <a:ext cx="1670243" cy="548640"/>
           </a:xfrm>
           <a:prstGeom prst="rect">
             <a:avLst/>
@@ -8898,7 +9562,7 @@
       </p:sp>
       <p:sp>
         <p:nvSpPr>
-          <p:cNvPr id="17" name="TextBox 16"/>
+          <p:cNvPr id="25" name="TextBox 24"/>
           <p:cNvSpPr txBox="1"/>
           <p:nvPr/>
         </p:nvSpPr>
@@ -8937,7 +9601,7 @@
       </p:sp>
       <p:sp>
         <p:nvSpPr>
-          <p:cNvPr id="18" name="TextBox 17"/>
+          <p:cNvPr id="26" name="TextBox 25"/>
           <p:cNvSpPr txBox="1"/>
           <p:nvPr/>
         </p:nvSpPr>
@@ -8976,7 +9640,7 @@
       </p:sp>
       <p:sp>
         <p:nvSpPr>
-          <p:cNvPr id="19" name="TextBox 18"/>
+          <p:cNvPr id="27" name="TextBox 26"/>
           <p:cNvSpPr txBox="1"/>
           <p:nvPr/>
         </p:nvSpPr>
@@ -9190,7 +9854,7 @@
                 </a:solidFill>
                 <a:latin typeface="Roboto"/>
               </a:rPr>
-              <a:t>Charged at $145/hour plus materials at cost × 1.3; technician time at $68/hour.</a:t>
+              <a:t>Charged at $145/hour plus materials at cost × 1.3; technician time at $68/hour. Target 35.0% is what to price for; break-even 31.1% only covers overheads and time not charged.</a:t>
             </a:r>
           </a:p>
         </p:txBody>
@@ -9546,7 +10210,7 @@
                 </a:solidFill>
                 <a:latin typeface="Roboto"/>
               </a:rPr>
-              <a:t>Charged at $145/hour plus materials at cost × 1.3; technician time at $68/hour.</a:t>
+              <a:t>Charged at $145/hour plus materials at cost × 1.3; technician time at $68/hour. Target 35.0% is what to price for; break-even 31.1% only covers overheads and time not charged.</a:t>
             </a:r>
           </a:p>
         </p:txBody>
@@ -10078,7 +10742,7 @@
                 </a:solidFill>
                 <a:latin typeface="Roboto"/>
               </a:rPr>
-              <a:t>Call-outs: 45.0% gross margin, 13.9 points clear of the 31.1% overheads need.</a:t>
+              <a:t>All call-outs: 45.0% gross margin, 10.0 points over the 35.0% target ($338 ahead on $3,375 in October so far).</a:t>
             </a:r>
           </a:p>
         </p:txBody>
@@ -11359,7 +12023,7 @@
                 </a:solidFill>
                 <a:latin typeface="Roboto"/>
               </a:rPr>
-              <a:t>From gross margin to profit</a:t>
+              <a:t>From gross margin to profit · latest closed month: September</a:t>
             </a:r>
           </a:p>
         </p:txBody>
@@ -11398,7 +12062,7 @@
                 </a:solidFill>
                 <a:latin typeface="Roboto"/>
               </a:rPr>
-              <a:t>September's jobs made $73,107 gross margin (36.1%). Technician time not charged to jobs took $3,430 and overheads $59,580, leaving $10,097 profit before tax (5.0% of revenue). To cover overheads, jobs need a 31.1% gross margin on average.</a:t>
+              <a:t>October is still in progress and wages are paid fortnightly, so a part month can't be bridged: this is September, the latest closed month. September's jobs made $73,107 gross margin (36.1%). Technician time not charged to jobs took $3,430 and overheads $59,580, leaving $10,097 profit before tax (5.0% of revenue). To cover overheads, jobs need a 31.1% gross margin on average.</a:t>
             </a:r>
           </a:p>
         </p:txBody>
@@ -12361,7 +13025,7 @@
         <p:spPr>
           <a:xfrm>
             <a:off x="457200" y="1645920"/>
-            <a:ext cx="11277295" cy="2011680"/>
+            <a:ext cx="3576218" cy="2011680"/>
           </a:xfrm>
           <a:prstGeom prst="rect">
             <a:avLst/>
@@ -12410,7 +13074,7 @@
         <p:spPr>
           <a:xfrm>
             <a:off x="640080" y="1783080"/>
-            <a:ext cx="10911535" cy="457200"/>
+            <a:ext cx="3210458" cy="457200"/>
           </a:xfrm>
           <a:prstGeom prst="rect">
             <a:avLst/>
@@ -12449,7 +13113,7 @@
         <p:spPr>
           <a:xfrm>
             <a:off x="640080" y="2240280"/>
-            <a:ext cx="10911535" cy="731520"/>
+            <a:ext cx="3210458" cy="731520"/>
           </a:xfrm>
           <a:prstGeom prst="rect">
             <a:avLst/>
@@ -12488,7 +13152,7 @@
         <p:spPr>
           <a:xfrm>
             <a:off x="640080" y="3017520"/>
-            <a:ext cx="10911535" cy="548640"/>
+            <a:ext cx="3210458" cy="548640"/>
           </a:xfrm>
           <a:prstGeom prst="rect">
             <a:avLst/>
@@ -12513,14 +13177,346 @@
                 </a:solidFill>
                 <a:latin typeface="Roboto"/>
               </a:rPr>
-              <a:t>September 36.1%</a:t>
-            </a:r>
-          </a:p>
-        </p:txBody>
-      </p:sp>
-      <p:sp>
-        <p:nvSpPr>
-          <p:cNvPr id="9" name="TextBox 8"/>
+              <a:t>target 35.0%</a:t>
+            </a:r>
+          </a:p>
+        </p:txBody>
+      </p:sp>
+      <p:sp>
+        <p:nvSpPr>
+          <p:cNvPr id="9" name="Rectangle 8"/>
+          <p:cNvSpPr/>
+          <p:nvPr/>
+        </p:nvSpPr>
+        <p:spPr>
+          <a:xfrm>
+            <a:off x="4307738" y="1645920"/>
+            <a:ext cx="3576218" cy="2011680"/>
+          </a:xfrm>
+          <a:prstGeom prst="rect">
+            <a:avLst/>
+          </a:prstGeom>
+          <a:solidFill>
+            <a:srgbClr val="F7FAF7"/>
+          </a:solidFill>
+          <a:ln>
+            <a:solidFill>
+              <a:srgbClr val="DCE8DC"/>
+            </a:solidFill>
+          </a:ln>
+        </p:spPr>
+        <p:style>
+          <a:lnRef idx="1">
+            <a:schemeClr val="accent1"/>
+          </a:lnRef>
+          <a:fillRef idx="3">
+            <a:schemeClr val="accent1"/>
+          </a:fillRef>
+          <a:effectRef idx="2">
+            <a:schemeClr val="accent1"/>
+          </a:effectRef>
+          <a:fontRef idx="minor">
+            <a:schemeClr val="lt1"/>
+          </a:fontRef>
+        </p:style>
+        <p:txBody>
+          <a:bodyPr rtlCol="0" anchor="ctr"/>
+          <a:lstStyle/>
+          <a:p>
+            <a:pPr algn="ctr">
+              <a:defRPr>
+                <a:latin typeface="Roboto"/>
+              </a:defRPr>
+            </a:pPr>
+          </a:p>
+        </p:txBody>
+      </p:sp>
+      <p:sp>
+        <p:nvSpPr>
+          <p:cNvPr id="10" name="TextBox 9"/>
+          <p:cNvSpPr txBox="1"/>
+          <p:nvPr/>
+        </p:nvSpPr>
+        <p:spPr>
+          <a:xfrm>
+            <a:off x="4490618" y="1783080"/>
+            <a:ext cx="3210458" cy="457200"/>
+          </a:xfrm>
+          <a:prstGeom prst="rect">
+            <a:avLst/>
+          </a:prstGeom>
+          <a:noFill/>
+        </p:spPr>
+        <p:txBody>
+          <a:bodyPr wrap="square">
+            <a:spAutoFit/>
+          </a:bodyPr>
+          <a:lstStyle/>
+          <a:p>
+            <a:pPr>
+              <a:defRPr>
+                <a:latin typeface="Roboto"/>
+              </a:defRPr>
+            </a:pPr>
+            <a:r>
+              <a:rPr sz="1200" b="0">
+                <a:solidFill>
+                  <a:srgbClr val="5F6F63"/>
+                </a:solidFill>
+                <a:latin typeface="Roboto"/>
+              </a:rPr>
+              <a:t>Job gross margin, September · All jobs</a:t>
+            </a:r>
+          </a:p>
+        </p:txBody>
+      </p:sp>
+      <p:sp>
+        <p:nvSpPr>
+          <p:cNvPr id="11" name="TextBox 10"/>
+          <p:cNvSpPr txBox="1"/>
+          <p:nvPr/>
+        </p:nvSpPr>
+        <p:spPr>
+          <a:xfrm>
+            <a:off x="4490618" y="2240280"/>
+            <a:ext cx="3210458" cy="731520"/>
+          </a:xfrm>
+          <a:prstGeom prst="rect">
+            <a:avLst/>
+          </a:prstGeom>
+          <a:noFill/>
+        </p:spPr>
+        <p:txBody>
+          <a:bodyPr wrap="square">
+            <a:spAutoFit/>
+          </a:bodyPr>
+          <a:lstStyle/>
+          <a:p>
+            <a:pPr>
+              <a:defRPr>
+                <a:latin typeface="Roboto"/>
+              </a:defRPr>
+            </a:pPr>
+            <a:r>
+              <a:rPr sz="3000" b="1">
+                <a:solidFill>
+                  <a:srgbClr val="2F7A5D"/>
+                </a:solidFill>
+                <a:latin typeface="Roboto"/>
+              </a:rPr>
+              <a:t>36.1%</a:t>
+            </a:r>
+          </a:p>
+        </p:txBody>
+      </p:sp>
+      <p:sp>
+        <p:nvSpPr>
+          <p:cNvPr id="12" name="TextBox 11"/>
+          <p:cNvSpPr txBox="1"/>
+          <p:nvPr/>
+        </p:nvSpPr>
+        <p:spPr>
+          <a:xfrm>
+            <a:off x="4490618" y="3017520"/>
+            <a:ext cx="3210458" cy="548640"/>
+          </a:xfrm>
+          <a:prstGeom prst="rect">
+            <a:avLst/>
+          </a:prstGeom>
+          <a:noFill/>
+        </p:spPr>
+        <p:txBody>
+          <a:bodyPr wrap="square">
+            <a:spAutoFit/>
+          </a:bodyPr>
+          <a:lstStyle/>
+          <a:p>
+            <a:pPr>
+              <a:defRPr>
+                <a:latin typeface="Roboto"/>
+              </a:defRPr>
+            </a:pPr>
+            <a:r>
+              <a:rPr sz="1100" b="0">
+                <a:solidFill>
+                  <a:srgbClr val="5F6F63"/>
+                </a:solidFill>
+                <a:latin typeface="Roboto"/>
+              </a:rPr>
+              <a:t>target 35.0%</a:t>
+            </a:r>
+          </a:p>
+        </p:txBody>
+      </p:sp>
+      <p:sp>
+        <p:nvSpPr>
+          <p:cNvPr id="13" name="Rectangle 12"/>
+          <p:cNvSpPr/>
+          <p:nvPr/>
+        </p:nvSpPr>
+        <p:spPr>
+          <a:xfrm>
+            <a:off x="8158276" y="1645920"/>
+            <a:ext cx="3576218" cy="2011680"/>
+          </a:xfrm>
+          <a:prstGeom prst="rect">
+            <a:avLst/>
+          </a:prstGeom>
+          <a:solidFill>
+            <a:srgbClr val="F7FAF7"/>
+          </a:solidFill>
+          <a:ln>
+            <a:solidFill>
+              <a:srgbClr val="DCE8DC"/>
+            </a:solidFill>
+          </a:ln>
+        </p:spPr>
+        <p:style>
+          <a:lnRef idx="1">
+            <a:schemeClr val="accent1"/>
+          </a:lnRef>
+          <a:fillRef idx="3">
+            <a:schemeClr val="accent1"/>
+          </a:fillRef>
+          <a:effectRef idx="2">
+            <a:schemeClr val="accent1"/>
+          </a:effectRef>
+          <a:fontRef idx="minor">
+            <a:schemeClr val="lt1"/>
+          </a:fontRef>
+        </p:style>
+        <p:txBody>
+          <a:bodyPr rtlCol="0" anchor="ctr"/>
+          <a:lstStyle/>
+          <a:p>
+            <a:pPr algn="ctr">
+              <a:defRPr>
+                <a:latin typeface="Roboto"/>
+              </a:defRPr>
+            </a:pPr>
+          </a:p>
+        </p:txBody>
+      </p:sp>
+      <p:sp>
+        <p:nvSpPr>
+          <p:cNvPr id="14" name="TextBox 13"/>
+          <p:cNvSpPr txBox="1"/>
+          <p:nvPr/>
+        </p:nvSpPr>
+        <p:spPr>
+          <a:xfrm>
+            <a:off x="8341156" y="1783080"/>
+            <a:ext cx="3210458" cy="457200"/>
+          </a:xfrm>
+          <a:prstGeom prst="rect">
+            <a:avLst/>
+          </a:prstGeom>
+          <a:noFill/>
+        </p:spPr>
+        <p:txBody>
+          <a:bodyPr wrap="square">
+            <a:spAutoFit/>
+          </a:bodyPr>
+          <a:lstStyle/>
+          <a:p>
+            <a:pPr>
+              <a:defRPr>
+                <a:latin typeface="Roboto"/>
+              </a:defRPr>
+            </a:pPr>
+            <a:r>
+              <a:rPr sz="1200" b="0">
+                <a:solidFill>
+                  <a:srgbClr val="5F6F63"/>
+                </a:solidFill>
+                <a:latin typeface="Roboto"/>
+              </a:rPr>
+              <a:t>Gross margin jobs need to break even</a:t>
+            </a:r>
+          </a:p>
+        </p:txBody>
+      </p:sp>
+      <p:sp>
+        <p:nvSpPr>
+          <p:cNvPr id="15" name="TextBox 14"/>
+          <p:cNvSpPr txBox="1"/>
+          <p:nvPr/>
+        </p:nvSpPr>
+        <p:spPr>
+          <a:xfrm>
+            <a:off x="8341156" y="2240280"/>
+            <a:ext cx="3210458" cy="731520"/>
+          </a:xfrm>
+          <a:prstGeom prst="rect">
+            <a:avLst/>
+          </a:prstGeom>
+          <a:noFill/>
+        </p:spPr>
+        <p:txBody>
+          <a:bodyPr wrap="square">
+            <a:spAutoFit/>
+          </a:bodyPr>
+          <a:lstStyle/>
+          <a:p>
+            <a:pPr>
+              <a:defRPr>
+                <a:latin typeface="Roboto"/>
+              </a:defRPr>
+            </a:pPr>
+            <a:r>
+              <a:rPr sz="3000" b="1">
+                <a:solidFill>
+                  <a:srgbClr val="2F7A5D"/>
+                </a:solidFill>
+                <a:latin typeface="Roboto"/>
+              </a:rPr>
+              <a:t>31.1%</a:t>
+            </a:r>
+          </a:p>
+        </p:txBody>
+      </p:sp>
+      <p:sp>
+        <p:nvSpPr>
+          <p:cNvPr id="16" name="TextBox 15"/>
+          <p:cNvSpPr txBox="1"/>
+          <p:nvPr/>
+        </p:nvSpPr>
+        <p:spPr>
+          <a:xfrm>
+            <a:off x="8341156" y="3017520"/>
+            <a:ext cx="3210458" cy="548640"/>
+          </a:xfrm>
+          <a:prstGeom prst="rect">
+            <a:avLst/>
+          </a:prstGeom>
+          <a:noFill/>
+        </p:spPr>
+        <p:txBody>
+          <a:bodyPr wrap="square">
+            <a:spAutoFit/>
+          </a:bodyPr>
+          <a:lstStyle/>
+          <a:p>
+            <a:pPr>
+              <a:defRPr>
+                <a:latin typeface="Roboto"/>
+              </a:defRPr>
+            </a:pPr>
+            <a:r>
+              <a:rPr sz="1100" b="0">
+                <a:solidFill>
+                  <a:srgbClr val="5F6F63"/>
+                </a:solidFill>
+                <a:latin typeface="Roboto"/>
+              </a:rPr>
+              <a:t>covers overheads and time not charged (September)</a:t>
+            </a:r>
+          </a:p>
+        </p:txBody>
+      </p:sp>
+      <p:sp>
+        <p:nvSpPr>
+          <p:cNvPr id="17" name="TextBox 16"/>
           <p:cNvSpPr txBox="1"/>
           <p:nvPr/>
         </p:nvSpPr>
@@ -12559,7 +13555,7 @@
       </p:sp>
       <p:sp>
         <p:nvSpPr>
-          <p:cNvPr id="10" name="TextBox 9"/>
+          <p:cNvPr id="18" name="TextBox 17"/>
           <p:cNvSpPr txBox="1"/>
           <p:nvPr/>
         </p:nvSpPr>
@@ -12598,7 +13594,7 @@
       </p:sp>
       <p:sp>
         <p:nvSpPr>
-          <p:cNvPr id="11" name="TextBox 10"/>
+          <p:cNvPr id="19" name="TextBox 18"/>
           <p:cNvSpPr txBox="1"/>
           <p:nvPr/>
         </p:nvSpPr>
@@ -12812,7 +13808,7 @@
                 </a:solidFill>
                 <a:latin typeface="Roboto"/>
               </a:rPr>
-              <a:t>Revenue less materials, subcontractors and technician time at $68/hour.</a:t>
+              <a:t>Revenue less materials, subcontractors and technician time at $68/hour. Target 35.0% is what to price for; break-even 31.1% only covers overheads and time not charged.</a:t>
             </a:r>
           </a:p>
         </p:txBody>
@@ -13168,7 +14164,7 @@
                 </a:solidFill>
                 <a:latin typeface="Roboto"/>
               </a:rPr>
-              <a:t>Revenue less materials, subcontractors and technician time at $68/hour.</a:t>
+              <a:t>Revenue less materials, subcontractors and technician time at $68/hour. Target 35.0% is what to price for; break-even 31.1% only covers overheads and time not charged.</a:t>
             </a:r>
           </a:p>
         </p:txBody>
@@ -13700,7 +14696,7 @@
                 </a:solidFill>
                 <a:latin typeface="Roboto"/>
               </a:rPr>
-              <a:t>Maintenance contracts: 59.5% gross margin, the most profitable work you do. Installations: 22.0% gross margin, below the 31.1% needed to cover overheads.</a:t>
+              <a:t>Installations: 22.0% gross margin, 13.0 points under the 35.0% target: about $4,292 on $33,000 of revenue in October so far. It's below the 31.1% needed to cover overheads, too. Maintenance contracts: 59.5% gross margin, 24.5 points over the 35.0% target ($9,941 ahead on $40,500 in October so far).</a:t>
             </a:r>
           </a:p>
         </p:txBody>
@@ -13974,7 +14970,7 @@
         <p:spPr>
           <a:xfrm>
             <a:off x="457200" y="1645920"/>
-            <a:ext cx="11277295" cy="2011680"/>
+            <a:ext cx="3576218" cy="2011680"/>
           </a:xfrm>
           <a:prstGeom prst="rect">
             <a:avLst/>
@@ -14023,7 +15019,7 @@
         <p:spPr>
           <a:xfrm>
             <a:off x="640080" y="1783080"/>
-            <a:ext cx="10911535" cy="457200"/>
+            <a:ext cx="3210458" cy="457200"/>
           </a:xfrm>
           <a:prstGeom prst="rect">
             <a:avLst/>
@@ -14062,7 +15058,7 @@
         <p:spPr>
           <a:xfrm>
             <a:off x="640080" y="2240280"/>
-            <a:ext cx="10911535" cy="731520"/>
+            <a:ext cx="3210458" cy="731520"/>
           </a:xfrm>
           <a:prstGeom prst="rect">
             <a:avLst/>
@@ -14101,7 +15097,7 @@
         <p:spPr>
           <a:xfrm>
             <a:off x="640080" y="3017520"/>
-            <a:ext cx="10911535" cy="548640"/>
+            <a:ext cx="3210458" cy="548640"/>
           </a:xfrm>
           <a:prstGeom prst="rect">
             <a:avLst/>
@@ -14126,14 +15122,346 @@
                 </a:solidFill>
                 <a:latin typeface="Roboto"/>
               </a:rPr>
-              <a:t>September 59.5%</a:t>
-            </a:r>
-          </a:p>
-        </p:txBody>
-      </p:sp>
-      <p:sp>
-        <p:nvSpPr>
-          <p:cNvPr id="9" name="TextBox 8"/>
+              <a:t>target 35.0%</a:t>
+            </a:r>
+          </a:p>
+        </p:txBody>
+      </p:sp>
+      <p:sp>
+        <p:nvSpPr>
+          <p:cNvPr id="9" name="Rectangle 8"/>
+          <p:cNvSpPr/>
+          <p:nvPr/>
+        </p:nvSpPr>
+        <p:spPr>
+          <a:xfrm>
+            <a:off x="4307738" y="1645920"/>
+            <a:ext cx="3576218" cy="2011680"/>
+          </a:xfrm>
+          <a:prstGeom prst="rect">
+            <a:avLst/>
+          </a:prstGeom>
+          <a:solidFill>
+            <a:srgbClr val="F7FAF7"/>
+          </a:solidFill>
+          <a:ln>
+            <a:solidFill>
+              <a:srgbClr val="DCE8DC"/>
+            </a:solidFill>
+          </a:ln>
+        </p:spPr>
+        <p:style>
+          <a:lnRef idx="1">
+            <a:schemeClr val="accent1"/>
+          </a:lnRef>
+          <a:fillRef idx="3">
+            <a:schemeClr val="accent1"/>
+          </a:fillRef>
+          <a:effectRef idx="2">
+            <a:schemeClr val="accent1"/>
+          </a:effectRef>
+          <a:fontRef idx="minor">
+            <a:schemeClr val="lt1"/>
+          </a:fontRef>
+        </p:style>
+        <p:txBody>
+          <a:bodyPr rtlCol="0" anchor="ctr"/>
+          <a:lstStyle/>
+          <a:p>
+            <a:pPr algn="ctr">
+              <a:defRPr>
+                <a:latin typeface="Roboto"/>
+              </a:defRPr>
+            </a:pPr>
+          </a:p>
+        </p:txBody>
+      </p:sp>
+      <p:sp>
+        <p:nvSpPr>
+          <p:cNvPr id="10" name="TextBox 9"/>
+          <p:cNvSpPr txBox="1"/>
+          <p:nvPr/>
+        </p:nvSpPr>
+        <p:spPr>
+          <a:xfrm>
+            <a:off x="4490618" y="1783080"/>
+            <a:ext cx="3210458" cy="457200"/>
+          </a:xfrm>
+          <a:prstGeom prst="rect">
+            <a:avLst/>
+          </a:prstGeom>
+          <a:noFill/>
+        </p:spPr>
+        <p:txBody>
+          <a:bodyPr wrap="square">
+            <a:spAutoFit/>
+          </a:bodyPr>
+          <a:lstStyle/>
+          <a:p>
+            <a:pPr>
+              <a:defRPr>
+                <a:latin typeface="Roboto"/>
+              </a:defRPr>
+            </a:pPr>
+            <a:r>
+              <a:rPr sz="1200" b="0">
+                <a:solidFill>
+                  <a:srgbClr val="5F6F63"/>
+                </a:solidFill>
+                <a:latin typeface="Roboto"/>
+              </a:rPr>
+              <a:t>Job gross margin, September · Maintenance contracts</a:t>
+            </a:r>
+          </a:p>
+        </p:txBody>
+      </p:sp>
+      <p:sp>
+        <p:nvSpPr>
+          <p:cNvPr id="11" name="TextBox 10"/>
+          <p:cNvSpPr txBox="1"/>
+          <p:nvPr/>
+        </p:nvSpPr>
+        <p:spPr>
+          <a:xfrm>
+            <a:off x="4490618" y="2240280"/>
+            <a:ext cx="3210458" cy="731520"/>
+          </a:xfrm>
+          <a:prstGeom prst="rect">
+            <a:avLst/>
+          </a:prstGeom>
+          <a:noFill/>
+        </p:spPr>
+        <p:txBody>
+          <a:bodyPr wrap="square">
+            <a:spAutoFit/>
+          </a:bodyPr>
+          <a:lstStyle/>
+          <a:p>
+            <a:pPr>
+              <a:defRPr>
+                <a:latin typeface="Roboto"/>
+              </a:defRPr>
+            </a:pPr>
+            <a:r>
+              <a:rPr sz="3000" b="1">
+                <a:solidFill>
+                  <a:srgbClr val="2F7A5D"/>
+                </a:solidFill>
+                <a:latin typeface="Roboto"/>
+              </a:rPr>
+              <a:t>59.5%</a:t>
+            </a:r>
+          </a:p>
+        </p:txBody>
+      </p:sp>
+      <p:sp>
+        <p:nvSpPr>
+          <p:cNvPr id="12" name="TextBox 11"/>
+          <p:cNvSpPr txBox="1"/>
+          <p:nvPr/>
+        </p:nvSpPr>
+        <p:spPr>
+          <a:xfrm>
+            <a:off x="4490618" y="3017520"/>
+            <a:ext cx="3210458" cy="548640"/>
+          </a:xfrm>
+          <a:prstGeom prst="rect">
+            <a:avLst/>
+          </a:prstGeom>
+          <a:noFill/>
+        </p:spPr>
+        <p:txBody>
+          <a:bodyPr wrap="square">
+            <a:spAutoFit/>
+          </a:bodyPr>
+          <a:lstStyle/>
+          <a:p>
+            <a:pPr>
+              <a:defRPr>
+                <a:latin typeface="Roboto"/>
+              </a:defRPr>
+            </a:pPr>
+            <a:r>
+              <a:rPr sz="1100" b="0">
+                <a:solidFill>
+                  <a:srgbClr val="5F6F63"/>
+                </a:solidFill>
+                <a:latin typeface="Roboto"/>
+              </a:rPr>
+              <a:t>target 35.0%</a:t>
+            </a:r>
+          </a:p>
+        </p:txBody>
+      </p:sp>
+      <p:sp>
+        <p:nvSpPr>
+          <p:cNvPr id="13" name="Rectangle 12"/>
+          <p:cNvSpPr/>
+          <p:nvPr/>
+        </p:nvSpPr>
+        <p:spPr>
+          <a:xfrm>
+            <a:off x="8158276" y="1645920"/>
+            <a:ext cx="3576218" cy="2011680"/>
+          </a:xfrm>
+          <a:prstGeom prst="rect">
+            <a:avLst/>
+          </a:prstGeom>
+          <a:solidFill>
+            <a:srgbClr val="F7FAF7"/>
+          </a:solidFill>
+          <a:ln>
+            <a:solidFill>
+              <a:srgbClr val="DCE8DC"/>
+            </a:solidFill>
+          </a:ln>
+        </p:spPr>
+        <p:style>
+          <a:lnRef idx="1">
+            <a:schemeClr val="accent1"/>
+          </a:lnRef>
+          <a:fillRef idx="3">
+            <a:schemeClr val="accent1"/>
+          </a:fillRef>
+          <a:effectRef idx="2">
+            <a:schemeClr val="accent1"/>
+          </a:effectRef>
+          <a:fontRef idx="minor">
+            <a:schemeClr val="lt1"/>
+          </a:fontRef>
+        </p:style>
+        <p:txBody>
+          <a:bodyPr rtlCol="0" anchor="ctr"/>
+          <a:lstStyle/>
+          <a:p>
+            <a:pPr algn="ctr">
+              <a:defRPr>
+                <a:latin typeface="Roboto"/>
+              </a:defRPr>
+            </a:pPr>
+          </a:p>
+        </p:txBody>
+      </p:sp>
+      <p:sp>
+        <p:nvSpPr>
+          <p:cNvPr id="14" name="TextBox 13"/>
+          <p:cNvSpPr txBox="1"/>
+          <p:nvPr/>
+        </p:nvSpPr>
+        <p:spPr>
+          <a:xfrm>
+            <a:off x="8341156" y="1783080"/>
+            <a:ext cx="3210458" cy="457200"/>
+          </a:xfrm>
+          <a:prstGeom prst="rect">
+            <a:avLst/>
+          </a:prstGeom>
+          <a:noFill/>
+        </p:spPr>
+        <p:txBody>
+          <a:bodyPr wrap="square">
+            <a:spAutoFit/>
+          </a:bodyPr>
+          <a:lstStyle/>
+          <a:p>
+            <a:pPr>
+              <a:defRPr>
+                <a:latin typeface="Roboto"/>
+              </a:defRPr>
+            </a:pPr>
+            <a:r>
+              <a:rPr sz="1200" b="0">
+                <a:solidFill>
+                  <a:srgbClr val="5F6F63"/>
+                </a:solidFill>
+                <a:latin typeface="Roboto"/>
+              </a:rPr>
+              <a:t>Gross margin jobs need to break even</a:t>
+            </a:r>
+          </a:p>
+        </p:txBody>
+      </p:sp>
+      <p:sp>
+        <p:nvSpPr>
+          <p:cNvPr id="15" name="TextBox 14"/>
+          <p:cNvSpPr txBox="1"/>
+          <p:nvPr/>
+        </p:nvSpPr>
+        <p:spPr>
+          <a:xfrm>
+            <a:off x="8341156" y="2240280"/>
+            <a:ext cx="3210458" cy="731520"/>
+          </a:xfrm>
+          <a:prstGeom prst="rect">
+            <a:avLst/>
+          </a:prstGeom>
+          <a:noFill/>
+        </p:spPr>
+        <p:txBody>
+          <a:bodyPr wrap="square">
+            <a:spAutoFit/>
+          </a:bodyPr>
+          <a:lstStyle/>
+          <a:p>
+            <a:pPr>
+              <a:defRPr>
+                <a:latin typeface="Roboto"/>
+              </a:defRPr>
+            </a:pPr>
+            <a:r>
+              <a:rPr sz="3000" b="1">
+                <a:solidFill>
+                  <a:srgbClr val="2F7A5D"/>
+                </a:solidFill>
+                <a:latin typeface="Roboto"/>
+              </a:rPr>
+              <a:t>31.1%</a:t>
+            </a:r>
+          </a:p>
+        </p:txBody>
+      </p:sp>
+      <p:sp>
+        <p:nvSpPr>
+          <p:cNvPr id="16" name="TextBox 15"/>
+          <p:cNvSpPr txBox="1"/>
+          <p:nvPr/>
+        </p:nvSpPr>
+        <p:spPr>
+          <a:xfrm>
+            <a:off x="8341156" y="3017520"/>
+            <a:ext cx="3210458" cy="548640"/>
+          </a:xfrm>
+          <a:prstGeom prst="rect">
+            <a:avLst/>
+          </a:prstGeom>
+          <a:noFill/>
+        </p:spPr>
+        <p:txBody>
+          <a:bodyPr wrap="square">
+            <a:spAutoFit/>
+          </a:bodyPr>
+          <a:lstStyle/>
+          <a:p>
+            <a:pPr>
+              <a:defRPr>
+                <a:latin typeface="Roboto"/>
+              </a:defRPr>
+            </a:pPr>
+            <a:r>
+              <a:rPr sz="1100" b="0">
+                <a:solidFill>
+                  <a:srgbClr val="5F6F63"/>
+                </a:solidFill>
+                <a:latin typeface="Roboto"/>
+              </a:rPr>
+              <a:t>covers overheads and time not charged (September)</a:t>
+            </a:r>
+          </a:p>
+        </p:txBody>
+      </p:sp>
+      <p:sp>
+        <p:nvSpPr>
+          <p:cNvPr id="17" name="TextBox 16"/>
           <p:cNvSpPr txBox="1"/>
           <p:nvPr/>
         </p:nvSpPr>
@@ -14172,7 +15500,7 @@
       </p:sp>
       <p:sp>
         <p:nvSpPr>
-          <p:cNvPr id="10" name="TextBox 9"/>
+          <p:cNvPr id="18" name="TextBox 17"/>
           <p:cNvSpPr txBox="1"/>
           <p:nvPr/>
         </p:nvSpPr>
@@ -14211,7 +15539,7 @@
       </p:sp>
       <p:sp>
         <p:nvSpPr>
-          <p:cNvPr id="11" name="TextBox 10"/>
+          <p:cNvPr id="19" name="TextBox 18"/>
           <p:cNvSpPr txBox="1"/>
           <p:nvPr/>
         </p:nvSpPr>
@@ -14425,7 +15753,7 @@
                 </a:solidFill>
                 <a:latin typeface="Roboto"/>
               </a:rPr>
-              <a:t>The month's fee less materials and technician time at $68/hour.</a:t>
+              <a:t>The month's fee less materials and technician time at $68/hour. Target 35.0% is what to price for; break-even 31.1% only covers overheads and time not charged.</a:t>
             </a:r>
           </a:p>
         </p:txBody>

--- a/media/exports/reports/2026-10/job-margins.pptx
+++ b/media/exports/reports/2026-10/job-margins.pptx
@@ -196,13 +196,13 @@
                 <c:formatCode>0.0"%";[Red](0.0"%")</c:formatCode>
                 <c:ptCount val="3"/>
                 <c:pt idx="0">
-                  <c:v>22.0</c:v>
+                  <c:v>30.4</c:v>
                 </c:pt>
                 <c:pt idx="1">
-                  <c:v>45.0</c:v>
+                  <c:v>49.6</c:v>
                 </c:pt>
                 <c:pt idx="2">
-                  <c:v>59.5</c:v>
+                  <c:v>63.9</c:v>
                 </c:pt>
               </c:numCache>
             </c:numRef>
@@ -266,7 +266,7 @@
       <c:valAx>
         <c:axId val="-2113994440"/>
         <c:scaling>
-          <c:max val="68.425"/>
+          <c:max val="73.485"/>
           <c:min val="0.0"/>
         </c:scaling>
         <c:delete/>
@@ -459,28 +459,28 @@
                   <c:v>Rocklea factory</c:v>
                 </c:pt>
                 <c:pt idx="3">
+                  <c:v>Wacol logistics depot</c:v>
+                </c:pt>
+                <c:pt idx="4">
                   <c:v>Milton office tower</c:v>
                 </c:pt>
-                <c:pt idx="4">
+                <c:pt idx="5">
                   <c:v>Bulimba school</c:v>
-                </c:pt>
-                <c:pt idx="5">
-                  <c:v>Wacol logistics depot</c:v>
                 </c:pt>
                 <c:pt idx="6">
                   <c:v>Chermside retail centre</c:v>
                 </c:pt>
                 <c:pt idx="7">
+                  <c:v>Southbank cafe group</c:v>
+                </c:pt>
+                <c:pt idx="8">
                   <c:v>Fortitude Valley hotel</c:v>
                 </c:pt>
-                <c:pt idx="8">
+                <c:pt idx="9">
                   <c:v>Riverside Apartments (strata)</c:v>
                 </c:pt>
-                <c:pt idx="9">
+                <c:pt idx="10">
                   <c:v>Newstead gym</c:v>
-                </c:pt>
-                <c:pt idx="10">
-                  <c:v>Southbank cafe group</c:v>
                 </c:pt>
                 <c:pt idx="11">
                   <c:v>Ashgrove aged care</c:v>
@@ -501,46 +501,46 @@
                 <c:formatCode>0.0"%";[Red](0.0"%")</c:formatCode>
                 <c:ptCount val="14"/>
                 <c:pt idx="0">
-                  <c:v>58.2</c:v>
+                  <c:v>62.9</c:v>
                 </c:pt>
                 <c:pt idx="1">
-                  <c:v>58.8</c:v>
+                  <c:v>63.1</c:v>
                 </c:pt>
                 <c:pt idx="2">
-                  <c:v>58.8</c:v>
+                  <c:v>63.1</c:v>
                 </c:pt>
                 <c:pt idx="3">
-                  <c:v>59.0</c:v>
+                  <c:v>63.4</c:v>
                 </c:pt>
                 <c:pt idx="4">
-                  <c:v>59.0</c:v>
+                  <c:v>63.4</c:v>
                 </c:pt>
                 <c:pt idx="5">
-                  <c:v>59.1</c:v>
+                  <c:v>63.6</c:v>
                 </c:pt>
                 <c:pt idx="6">
-                  <c:v>59.4</c:v>
+                  <c:v>63.8</c:v>
                 </c:pt>
                 <c:pt idx="7">
-                  <c:v>59.9</c:v>
+                  <c:v>64.0</c:v>
                 </c:pt>
                 <c:pt idx="8">
-                  <c:v>59.9</c:v>
+                  <c:v>64.2</c:v>
                 </c:pt>
                 <c:pt idx="9">
-                  <c:v>59.9</c:v>
+                  <c:v>64.3</c:v>
                 </c:pt>
                 <c:pt idx="10">
-                  <c:v>60.0</c:v>
+                  <c:v>64.3</c:v>
                 </c:pt>
                 <c:pt idx="11">
-                  <c:v>60.0</c:v>
+                  <c:v>64.4</c:v>
                 </c:pt>
                 <c:pt idx="12">
-                  <c:v>61.1</c:v>
+                  <c:v>65.1</c:v>
                 </c:pt>
                 <c:pt idx="13">
-                  <c:v>62.2</c:v>
+                  <c:v>66.2</c:v>
                 </c:pt>
               </c:numCache>
             </c:numRef>
@@ -604,7 +604,7 @@
       <c:valAx>
         <c:axId val="-2113994440"/>
         <c:scaling>
-          <c:max val="71.53"/>
+          <c:max val="76.13"/>
           <c:min val="0.0"/>
         </c:scaling>
         <c:delete/>
@@ -696,7 +696,7 @@
                 <c:formatCode>0.0"%";[Red](0.0"%")</c:formatCode>
                 <c:ptCount val="1"/>
                 <c:pt idx="0">
-                  <c:v>22.0</c:v>
+                  <c:v>30.4</c:v>
                 </c:pt>
               </c:numCache>
             </c:numRef>
@@ -760,7 +760,7 @@
       <c:valAx>
         <c:axId val="-2113994440"/>
         <c:scaling>
-          <c:max val="40.25"/>
+          <c:max val="44.849999999999994"/>
           <c:min val="0.0"/>
         </c:scaling>
         <c:delete/>
@@ -896,19 +896,19 @@
                 <c:formatCode>0.0"%";[Red](0.0"%")</c:formatCode>
                 <c:ptCount val="5"/>
                 <c:pt idx="0">
-                  <c:v>41.0</c:v>
+                  <c:v>45.0</c:v>
                 </c:pt>
                 <c:pt idx="1">
-                  <c:v>42.0</c:v>
+                  <c:v>46.3</c:v>
                 </c:pt>
                 <c:pt idx="2">
-                  <c:v>44.2</c:v>
+                  <c:v>48.8</c:v>
                 </c:pt>
                 <c:pt idx="3">
-                  <c:v>44.7</c:v>
+                  <c:v>49.2</c:v>
                 </c:pt>
                 <c:pt idx="4">
-                  <c:v>48.1</c:v>
+                  <c:v>52.9</c:v>
                 </c:pt>
               </c:numCache>
             </c:numRef>
@@ -972,7 +972,7 @@
       <c:valAx>
         <c:axId val="-2113994440"/>
         <c:scaling>
-          <c:max val="55.315"/>
+          <c:max val="60.834999999999994"/>
           <c:min val="0.0"/>
         </c:scaling>
         <c:delete/>
@@ -1138,76 +1138,76 @@
                 <c:formatCode>0.0"%";[Red](0.0"%")</c:formatCode>
                 <c:ptCount val="24"/>
                 <c:pt idx="0">
-                  <c:v>37.0</c:v>
+                  <c:v>43.5</c:v>
                 </c:pt>
                 <c:pt idx="1">
-                  <c:v>40.4</c:v>
+                  <c:v>46.5</c:v>
                 </c:pt>
                 <c:pt idx="2">
+                  <c:v>48.5</c:v>
+                </c:pt>
+                <c:pt idx="3">
+                  <c:v>42.9</c:v>
+                </c:pt>
+                <c:pt idx="4">
+                  <c:v>43.0</c:v>
+                </c:pt>
+                <c:pt idx="5">
+                  <c:v>44.7</c:v>
+                </c:pt>
+                <c:pt idx="6">
+                  <c:v>42.1</c:v>
+                </c:pt>
+                <c:pt idx="7">
+                  <c:v>46.8</c:v>
+                </c:pt>
+                <c:pt idx="8">
+                  <c:v>42.3</c:v>
+                </c:pt>
+                <c:pt idx="9">
+                  <c:v>49.5</c:v>
+                </c:pt>
+                <c:pt idx="10">
+                  <c:v>44.0</c:v>
+                </c:pt>
+                <c:pt idx="11">
+                  <c:v>44.7</c:v>
+                </c:pt>
+                <c:pt idx="12">
+                  <c:v>40.5</c:v>
+                </c:pt>
+                <c:pt idx="13">
+                  <c:v>43.7</c:v>
+                </c:pt>
+                <c:pt idx="14">
+                  <c:v>41.9</c:v>
+                </c:pt>
+                <c:pt idx="15">
+                  <c:v>44.9</c:v>
+                </c:pt>
+                <c:pt idx="16">
+                  <c:v>42.2</c:v>
+                </c:pt>
+                <c:pt idx="17">
+                  <c:v>47.7</c:v>
+                </c:pt>
+                <c:pt idx="18">
+                  <c:v>45.2</c:v>
+                </c:pt>
+                <c:pt idx="19">
+                  <c:v>44.8</c:v>
+                </c:pt>
+                <c:pt idx="20">
+                  <c:v>43.4</c:v>
+                </c:pt>
+                <c:pt idx="21">
+                  <c:v>47.2</c:v>
+                </c:pt>
+                <c:pt idx="22">
                   <c:v>42.7</c:v>
                 </c:pt>
-                <c:pt idx="3">
-                  <c:v>36.4</c:v>
-                </c:pt>
-                <c:pt idx="4">
-                  <c:v>36.5</c:v>
-                </c:pt>
-                <c:pt idx="5">
-                  <c:v>38.4</c:v>
-                </c:pt>
-                <c:pt idx="6">
-                  <c:v>35.5</c:v>
-                </c:pt>
-                <c:pt idx="7">
-                  <c:v>40.5</c:v>
-                </c:pt>
-                <c:pt idx="8">
-                  <c:v>35.6</c:v>
-                </c:pt>
-                <c:pt idx="9">
-                  <c:v>43.8</c:v>
-                </c:pt>
-                <c:pt idx="10">
-                  <c:v>37.6</c:v>
-                </c:pt>
-                <c:pt idx="11">
-                  <c:v>38.4</c:v>
-                </c:pt>
-                <c:pt idx="12">
-                  <c:v>33.7</c:v>
-                </c:pt>
-                <c:pt idx="13">
-                  <c:v>37.4</c:v>
-                </c:pt>
-                <c:pt idx="14">
-                  <c:v>35.3</c:v>
-                </c:pt>
-                <c:pt idx="15">
-                  <c:v>38.6</c:v>
-                </c:pt>
-                <c:pt idx="16">
-                  <c:v>35.6</c:v>
-                </c:pt>
-                <c:pt idx="17">
-                  <c:v>41.7</c:v>
-                </c:pt>
-                <c:pt idx="18">
-                  <c:v>39.0</c:v>
-                </c:pt>
-                <c:pt idx="19">
-                  <c:v>38.5</c:v>
-                </c:pt>
-                <c:pt idx="20">
-                  <c:v>36.8</c:v>
-                </c:pt>
-                <c:pt idx="21">
-                  <c:v>41.1</c:v>
-                </c:pt>
-                <c:pt idx="22">
-                  <c:v>36.1</c:v>
-                </c:pt>
                 <c:pt idx="23">
-                  <c:v>42.8</c:v>
+                  <c:v>48.9</c:v>
                 </c:pt>
               </c:numCache>
             </c:numRef>
@@ -1256,7 +1256,7 @@
         <c:axId val="-2100718248"/>
         <c:scaling>
           <c:orientation val="minMax"/>
-          <c:max val="50.0"/>
+          <c:max val="60.0"/>
           <c:min val="0.0"/>
         </c:scaling>
         <c:delete val="0"/>
@@ -1781,7 +1781,7 @@
           <a:lstStyle/>
           <a:p>
             <a:r>
-              <a:t>From gross margin to profit · latest closed month: September. October is still in progress and wages are paid fortnightly, so a part month can't be bridged: this is September, the latest closed month. September's jobs made $73,107 gross margin (36.1%). Technician time not charged to jobs took $3,430 and overheads $59,580, leaving $10,097 profit before tax (5.0% of revenue). To cover overheads, jobs need a 31.1% gross margin on average.</a:t>
+              <a:t>From gross margin to profit · latest closed month: September. October is still in progress and wages are paid fortnightly, so a part month can't be bridged: this is September, the latest closed month. September's jobs made $96,230 gross margin (42.7%). Technician time not charged to jobs took $28,417 and overheads $59,580, leaving $8,233 profit before tax (3.7% of revenue). To cover overheads, jobs need a 39.0% gross margin on average.</a:t>
             </a:r>
           </a:p>
         </p:txBody>
@@ -1851,7 +1851,7 @@
           <a:lstStyle/>
           <a:p>
             <a:r>
-              <a:t>All jobs. Job gross margin, October so far · All jobs: 42.8%; Job gross margin, September · All jobs: 36.1%; Gross margin jobs need to break even: 31.1%. In October so far maintenance contracts made a 59.5% job gross margin, installations made a 22.0% job gross margin, call-outs and repairs made a 45.0% job gross margin (technician time at $68 an hour, wages and all on-costs). Jobs need 31.1% just to cover overheads. Installations: 22.0% gross margin, 13.0 points under the 35.0% target: about $4,292 on $33,000 of revenue in October so far. It's below the 31.1% needed to cover overheads, too. Maintenance contracts: 59.5% gross margin, 24.5 points over the 35.0% target ($9,941 ahead on $40,500 in October so far).</a:t>
+              <a:t>All jobs. Job gross margin, October so far · All jobs: 48.9%; Job gross margin, September · All jobs: 42.7%; Gross margin jobs need to break even: 39.0%. In October so far maintenance contracts made a 63.9% job gross margin, installations made a 30.4% job gross margin, call-outs and repairs made a 49.6% job gross margin (technician time at $68 an hour, wages and all on-costs). Jobs need 39.0% just to cover overheads. Installations: 30.4% gross margin, 4.6 points under the 35.0% target: about $1,692 on $37,000 of revenue in October so far. It's below the 39.0% needed to cover overheads, too. Maintenance contracts: 63.9% gross margin, 28.9 points over the 35.0% target ($13,094 ahead on $45,350 in October so far).</a:t>
             </a:r>
           </a:p>
         </p:txBody>
@@ -1921,7 +1921,7 @@
           <a:lstStyle/>
           <a:p>
             <a:r>
-              <a:t>Maintenance contracts. Job gross margin, October so far · Maintenance contracts: 59.5%; Job gross margin, September · Maintenance contracts: 59.5%; Gross margin jobs need to break even: 31.1%. All 14 contracts made more than the 35.0% job gross margin target. The thinnest was Kangaroo Point townhouses at 58.2% job gross margin: 14.0 h of technician time on a $2,400 monthly fee. The thinnest, Kangaroo Point townhouses: 58.2% gross margin, 23.3 points over the 35.0% target ($558 ahead on $2,400 in October so far). All maintenance contracts: 59.5% gross margin, 24.5 points over the 35.0% target ($9,941 ahead on $40,500 in October so far).</a:t>
+              <a:t>Maintenance contracts. Job gross margin, October so far · Maintenance contracts: 63.9%; Job gross margin, September · Maintenance contracts: 63.9%; Gross margin jobs need to break even: 39.0%. All 14 contracts made more than the 35.0% job gross margin target. The thinnest was Kangaroo Point townhouses at 62.9% job gross margin: 14.0 h of technician time on a $2,700 monthly fee. The thinnest, Kangaroo Point townhouses: 62.9% gross margin, 27.9 points over the 35.0% target ($753 ahead on $2,700 in October so far). All maintenance contracts: 63.9% gross margin, 28.9 points over the 35.0% target ($13,094 ahead on $45,350 in October so far).</a:t>
             </a:r>
           </a:p>
         </p:txBody>
@@ -1991,7 +1991,7 @@
           <a:lstStyle/>
           <a:p>
             <a:r>
-              <a:t>Job gross margin on each maintenance contract, October 2026 to date. The month's fee less materials and technician time at $68/hour. Target 35.0% is what to price for; break-even 31.1% only covers overheads and time not charged.</a:t>
+              <a:t>Job gross margin on each maintenance contract, October 2026 to date. The month's fee less materials and technician time at $68/hour. Target 35.0% is what to price for; break-even 39.0% only covers overheads and time not charged.</a:t>
             </a:r>
           </a:p>
         </p:txBody>
@@ -2061,7 +2061,7 @@
           <a:lstStyle/>
           <a:p>
             <a:r>
-              <a:t>Installations. Job gross margin, October so far · Installations: 22.0%; Job gross margin, September · Installations: 27.0%; Gross margin jobs need to break even: 31.1%. 1 of the 1 installation jobs invoiced in October so far made less than the 35.0% job gross margin target. The Morningside house air-con install made a 22.0% job gross margin: 131.5 h of technician time ($8,942) and $2,300 of subcontractors on a $33,000 job. Jobs need 31.1% gross margin just to cover overheads. 1 installation under the 35.0% target, worth about $4,292 between them on $33,000 of revenue. The biggest gap, Morningside house air-con install: 22.0% gross margin, 13.0 points under the 35.0% target: about $4,292 on $33,000 of revenue in October so far. It's below the 31.1% needed to cover overheads, too.</a:t>
+              <a:t>Installations. Job gross margin, October so far · Installations: 30.4%; Job gross margin, September · Installations: 34.8%; Gross margin jobs need to break even: 39.0%. 1 of the 1 installation jobs invoiced in October so far made less than the 35.0% job gross margin target. The Morningside house air-con install made a 30.4% job gross margin: 131.5 h of technician time ($8,942) and $2,300 of subcontractors on a $37,000 job. Jobs need 39.0% gross margin just to cover overheads. 1 installation under the 35.0% target, worth about $1,692 between them on $37,000 of revenue. The biggest gap, Morningside house air-con install: 30.4% gross margin, 4.6 points under the 35.0% target: about $1,692 on $37,000 of revenue in October so far. It's below the 39.0% needed to cover overheads, too.</a:t>
             </a:r>
           </a:p>
         </p:txBody>
@@ -2131,7 +2131,7 @@
           <a:lstStyle/>
           <a:p>
             <a:r>
-              <a:t>Call-outs and repairs. Job gross margin, October so far · Call-outs and repairs: 45.0%; Job gross margin, September · Call-outs and repairs: 43.9%; Gross margin jobs need to break even: 31.1%; Technician time charged, October so far: $2,465; Materials charged, October so far: $910. 7 call-outs in October so far billed $2,465 of technician time and $910 of materials ($700 at cost plus 30%), and made a 45.0% job gross margin between them. Gross margins run from 41.0% to 48.1% by length: the hourly rate covers technician time comfortably, so the gross margin mostly moves with how much material goes on the van. All call-outs: 45.0% gross margin, 10.0 points over the 35.0% target ($338 ahead on $3,375 in October so far).</a:t>
+              <a:t>Call-outs and repairs. Job gross margin, October so far · Call-outs and repairs: 49.6%; Job gross margin, September · Call-outs and repairs: 48.3%; Gross margin jobs need to break even: 39.0%; Technician time charged, October so far: $2,771; Materials charged, October so far: $910. 7 call-outs in October so far billed $2,771 of technician time and $910 of materials ($700 at cost plus 30%), and made a 49.6% job gross margin between them. Gross margins run from 45.0% to 52.9% by length: the hourly rate covers technician time comfortably, so the gross margin mostly moves with how much material goes on the van. All call-outs: 49.6% gross margin, 14.6 points over the 35.0% target ($537 ahead on $3,681 in October so far).</a:t>
             </a:r>
           </a:p>
         </p:txBody>
@@ -5600,7 +5600,7 @@
                 </a:solidFill>
                 <a:latin typeface="Roboto"/>
               </a:rPr>
-              <a:t>Data retrieved 2pm, Tue 6 Oct 2026 · Generated 8 Oct 2026, 9:35am · Sample data · Made with Python (python-pptx)</a:t>
+              <a:t>Data retrieved 2pm, Tue 6 Oct 2026 · Generated 9 Oct 2026, 8:41am · Sample data · Made with Python (python-pptx)</a:t>
             </a:r>
           </a:p>
         </p:txBody>
@@ -5819,7 +5819,7 @@
                 </a:solidFill>
                 <a:latin typeface="Roboto"/>
               </a:rPr>
-              <a:t>October is still in progress and wages are paid fortnightly, so a part month can't be bridged: this is September, the latest closed month. September's jobs made $73,107 gross margin (36.1%). Technician time not charged to jobs took $3,430 and overheads $59,580, leaving $10,097 profit before tax (5.0% of revenue). To cover overheads, jobs need a 31.1% gross margin on average.</a:t>
+              <a:t>October is still in progress and wages are paid fortnightly, so a part month can't be bridged: this is September, the latest closed month. September's jobs made $96,230 gross margin (42.7%). Technician time not charged to jobs took $28,417 and overheads $59,580, leaving $8,233 profit before tax (3.7% of revenue). To cover overheads, jobs need a 39.0% gross margin on average.</a:t>
             </a:r>
           </a:p>
         </p:txBody>
@@ -5891,7 +5891,7 @@
                           </a:solidFill>
                           <a:latin typeface="Roboto"/>
                         </a:rPr>
-                        <a:t>$73,107</a:t>
+                        <a:t>$96,230</a:t>
                       </a:r>
                     </a:p>
                   </a:txBody>
@@ -5947,7 +5947,7 @@
                           </a:solidFill>
                           <a:latin typeface="Roboto"/>
                         </a:rPr>
-                        <a:t>$54,600</a:t>
+                        <a:t>$79,587</a:t>
                       </a:r>
                     </a:p>
                   </a:txBody>
@@ -6059,7 +6059,7 @@
                           </a:solidFill>
                           <a:latin typeface="Roboto"/>
                         </a:rPr>
-                        <a:t>$3,430</a:t>
+                        <a:t>$28,417</a:t>
                       </a:r>
                     </a:p>
                   </a:txBody>
@@ -6115,7 +6115,7 @@
                           </a:solidFill>
                           <a:latin typeface="Roboto"/>
                         </a:rPr>
-                        <a:t>$69,677</a:t>
+                        <a:t>$67,813</a:t>
                       </a:r>
                     </a:p>
                   </a:txBody>
@@ -6227,7 +6227,7 @@
                           </a:solidFill>
                           <a:latin typeface="Roboto"/>
                         </a:rPr>
-                        <a:t>$10,097</a:t>
+                        <a:t>$8,233</a:t>
                       </a:r>
                     </a:p>
                   </a:txBody>
@@ -6283,7 +6283,7 @@
                           </a:solidFill>
                           <a:latin typeface="Roboto"/>
                         </a:rPr>
-                        <a:t>$202,337</a:t>
+                        <a:t>$225,460</a:t>
                       </a:r>
                     </a:p>
                   </a:txBody>
@@ -6339,7 +6339,7 @@
                           </a:solidFill>
                           <a:latin typeface="Roboto"/>
                         </a:rPr>
-                        <a:t>36.1%</a:t>
+                        <a:t>42.7%</a:t>
                       </a:r>
                     </a:p>
                   </a:txBody>
@@ -6395,7 +6395,7 @@
                           </a:solidFill>
                           <a:latin typeface="Roboto"/>
                         </a:rPr>
-                        <a:t>5.0%</a:t>
+                        <a:t>3.7%</a:t>
                       </a:r>
                     </a:p>
                   </a:txBody>
@@ -6451,7 +6451,7 @@
                           </a:solidFill>
                           <a:latin typeface="Roboto"/>
                         </a:rPr>
-                        <a:t>31.1%</a:t>
+                        <a:t>39.0%</a:t>
                       </a:r>
                     </a:p>
                   </a:txBody>
@@ -6539,7 +6539,7 @@
                 </a:solidFill>
                 <a:latin typeface="Roboto"/>
               </a:rPr>
-              <a:t>Data retrieved 2pm, Tue 6 Oct 2026 · Generated 8 Oct 2026, 9:35am · Sample data · Made with Python (python-pptx)</a:t>
+              <a:t>Data retrieved 2pm, Tue 6 Oct 2026 · Generated 9 Oct 2026, 8:41am · Sample data · Made with Python (python-pptx)</a:t>
             </a:r>
           </a:p>
         </p:txBody>
@@ -6885,7 +6885,7 @@
                 </a:solidFill>
                 <a:latin typeface="Roboto"/>
               </a:rPr>
-              <a:t>42.8%</a:t>
+              <a:t>48.9%</a:t>
             </a:r>
           </a:p>
         </p:txBody>
@@ -7051,7 +7051,7 @@
                 </a:solidFill>
                 <a:latin typeface="Roboto"/>
               </a:rPr>
-              <a:t>36.1%</a:t>
+              <a:t>42.7%</a:t>
             </a:r>
           </a:p>
         </p:txBody>
@@ -7217,7 +7217,7 @@
                 </a:solidFill>
                 <a:latin typeface="Roboto"/>
               </a:rPr>
-              <a:t>31.1%</a:t>
+              <a:t>39.0%</a:t>
             </a:r>
           </a:p>
         </p:txBody>
@@ -7287,7 +7287,7 @@
         </p:nvCxnSpPr>
         <p:spPr>
           <a:xfrm>
-            <a:off x="7186082" y="2661025"/>
+            <a:off x="6955705" y="2661025"/>
             <a:ext cx="0" cy="1657625"/>
           </a:xfrm>
           <a:prstGeom prst="line">
@@ -7323,7 +7323,7 @@
         </p:nvSpPr>
         <p:spPr>
           <a:xfrm>
-            <a:off x="6088802" y="4318650"/>
+            <a:off x="5858425" y="4318650"/>
             <a:ext cx="2194560" cy="237744"/>
           </a:xfrm>
           <a:prstGeom prst="rect">
@@ -7362,7 +7362,7 @@
         </p:nvCxnSpPr>
         <p:spPr>
           <a:xfrm>
-            <a:off x="6813276" y="2661025"/>
+            <a:off x="7311742" y="2661025"/>
             <a:ext cx="0" cy="1657625"/>
           </a:xfrm>
           <a:prstGeom prst="line">
@@ -7398,7 +7398,7 @@
         </p:nvSpPr>
         <p:spPr>
           <a:xfrm>
-            <a:off x="5715996" y="4556394"/>
+            <a:off x="6214462" y="4556394"/>
             <a:ext cx="2194560" cy="237744"/>
           </a:xfrm>
           <a:prstGeom prst="rect">
@@ -7424,7 +7424,7 @@
                 </a:solidFill>
                 <a:latin typeface="Roboto"/>
               </a:rPr>
-              <a:t>Break-even 31.1%</a:t>
+              <a:t>Break-even 39.0%</a:t>
             </a:r>
           </a:p>
         </p:txBody>
@@ -7551,7 +7551,7 @@
                 </a:solidFill>
                 <a:latin typeface="Roboto"/>
               </a:rPr>
-              <a:t>In October so far maintenance contracts made a 59.5% job gross margin, installations made a 22.0% job gross margin, call-outs and repairs made a 45.0% job gross margin (technician time at $68 an hour, wages and all on-costs). Jobs need 31.1% just to cover overheads.</a:t>
+              <a:t>In October so far maintenance contracts made a 63.9% job gross margin, installations made a 30.4% job gross margin, call-outs and repairs made a 49.6% job gross margin (technician time at $68 an hour, wages and all on-costs). Jobs need 39.0% just to cover overheads.</a:t>
             </a:r>
           </a:p>
         </p:txBody>
@@ -7678,7 +7678,7 @@
                 </a:solidFill>
                 <a:latin typeface="Roboto"/>
               </a:rPr>
-              <a:t>Installations: 22.0% gross margin, 13.0 points under the 35.0% target: about $4,292 on $33,000 of revenue in October so far. It's below the 31.1% needed to cover overheads, too. Maintenance contracts: 59.5% gross margin, 24.5 points over the 35.0% target ($9,941 ahead on $40,500 in October so far).</a:t>
+              <a:t>Installations: 30.4% gross margin, 4.6 points under the 35.0% target: about $1,692 on $37,000 of revenue in October so far. It's below the 39.0% needed to cover overheads, too. Maintenance contracts: 63.9% gross margin, 28.9 points over the 35.0% target ($13,094 ahead on $45,350 in October so far).</a:t>
             </a:r>
           </a:p>
         </p:txBody>
@@ -7756,7 +7756,7 @@
                 </a:solidFill>
                 <a:latin typeface="Roboto"/>
               </a:rPr>
-              <a:t>Data retrieved 2pm, Tue 6 Oct 2026 · Generated 8 Oct 2026, 9:35am · Sample data · Made with Python (python-pptx)</a:t>
+              <a:t>Data retrieved 2pm, Tue 6 Oct 2026 · Generated 9 Oct 2026, 8:41am · Sample data · Made with Python (python-pptx)</a:t>
             </a:r>
           </a:p>
         </p:txBody>
@@ -8063,7 +8063,7 @@
                 </a:solidFill>
                 <a:latin typeface="Roboto"/>
               </a:rPr>
-              <a:t>59.5%</a:t>
+              <a:t>63.9%</a:t>
             </a:r>
           </a:p>
         </p:txBody>
@@ -8229,7 +8229,7 @@
                 </a:solidFill>
                 <a:latin typeface="Roboto"/>
               </a:rPr>
-              <a:t>59.5%</a:t>
+              <a:t>63.9%</a:t>
             </a:r>
           </a:p>
         </p:txBody>
@@ -8395,7 +8395,7 @@
                 </a:solidFill>
                 <a:latin typeface="Roboto"/>
               </a:rPr>
-              <a:t>31.1%</a:t>
+              <a:t>39.0%</a:t>
             </a:r>
           </a:p>
         </p:txBody>
@@ -8561,7 +8561,7 @@
                 </a:solidFill>
                 <a:latin typeface="Roboto"/>
               </a:rPr>
-              <a:t>All 14 contracts made more than the 35.0% job gross margin target. The thinnest was Kangaroo Point townhouses at 58.2% job gross margin: 14.0 h of technician time on a $2,400 monthly fee.</a:t>
+              <a:t>All 14 contracts made more than the 35.0% job gross margin target. The thinnest was Kangaroo Point townhouses at 62.9% job gross margin: 14.0 h of technician time on a $2,700 monthly fee.</a:t>
             </a:r>
           </a:p>
         </p:txBody>
@@ -8688,7 +8688,7 @@
                 </a:solidFill>
                 <a:latin typeface="Roboto"/>
               </a:rPr>
-              <a:t>The thinnest, Kangaroo Point townhouses: 58.2% gross margin, 23.3 points over the 35.0% target ($558 ahead on $2,400 in October so far). All maintenance contracts: 59.5% gross margin, 24.5 points over the 35.0% target ($9,941 ahead on $40,500 in October so far).</a:t>
+              <a:t>The thinnest, Kangaroo Point townhouses: 62.9% gross margin, 27.9 points over the 35.0% target ($753 ahead on $2,700 in October so far). All maintenance contracts: 63.9% gross margin, 28.9 points over the 35.0% target ($13,094 ahead on $45,350 in October so far).</a:t>
             </a:r>
           </a:p>
         </p:txBody>
@@ -8766,7 +8766,7 @@
                 </a:solidFill>
                 <a:latin typeface="Roboto"/>
               </a:rPr>
-              <a:t>Data retrieved 2pm, Tue 6 Oct 2026 · Generated 8 Oct 2026, 9:35am · Sample data · Made with Python (python-pptx)</a:t>
+              <a:t>Data retrieved 2pm, Tue 6 Oct 2026 · Generated 9 Oct 2026, 8:41am · Sample data · Made with Python (python-pptx)</a:t>
             </a:r>
           </a:p>
         </p:txBody>
@@ -8985,7 +8985,7 @@
                 </a:solidFill>
                 <a:latin typeface="Roboto"/>
               </a:rPr>
-              <a:t>The month's fee less materials and technician time at $68/hour. Target 35.0% is what to price for; break-even 31.1% only covers overheads and time not charged.</a:t>
+              <a:t>The month's fee less materials and technician time at $68/hour. Target 35.0% is what to price for; break-even 39.0% only covers overheads and time not charged.</a:t>
             </a:r>
           </a:p>
         </p:txBody>
@@ -9016,7 +9016,7 @@
         </p:nvCxnSpPr>
         <p:spPr>
           <a:xfrm>
-            <a:off x="7040851" y="1599255"/>
+            <a:off x="6847469" y="1599255"/>
             <a:ext cx="0" cy="3816827"/>
           </a:xfrm>
           <a:prstGeom prst="line">
@@ -9052,7 +9052,7 @@
         </p:nvSpPr>
         <p:spPr>
           <a:xfrm>
-            <a:off x="5943571" y="5416082"/>
+            <a:off x="5750189" y="5416082"/>
             <a:ext cx="2194560" cy="237744"/>
           </a:xfrm>
           <a:prstGeom prst="rect">
@@ -9091,7 +9091,7 @@
         </p:nvCxnSpPr>
         <p:spPr>
           <a:xfrm>
-            <a:off x="6684228" y="1599255"/>
+            <a:off x="7191136" y="1599255"/>
             <a:ext cx="0" cy="3816827"/>
           </a:xfrm>
           <a:prstGeom prst="line">
@@ -9127,7 +9127,7 @@
         </p:nvSpPr>
         <p:spPr>
           <a:xfrm>
-            <a:off x="5586948" y="5653826"/>
+            <a:off x="6093856" y="5653826"/>
             <a:ext cx="2194560" cy="237744"/>
           </a:xfrm>
           <a:prstGeom prst="rect">
@@ -9153,7 +9153,7 @@
                 </a:solidFill>
                 <a:latin typeface="Roboto"/>
               </a:rPr>
-              <a:t>Break-even 31.1%</a:t>
+              <a:t>Break-even 39.0%</a:t>
             </a:r>
           </a:p>
         </p:txBody>
@@ -9231,7 +9231,7 @@
                 </a:solidFill>
                 <a:latin typeface="Roboto"/>
               </a:rPr>
-              <a:t>Data retrieved 2pm, Tue 6 Oct 2026 · Generated 8 Oct 2026, 9:35am · Sample data · Made with Python (python-pptx)</a:t>
+              <a:t>Data retrieved 2pm, Tue 6 Oct 2026 · Generated 9 Oct 2026, 8:41am · Sample data · Made with Python (python-pptx)</a:t>
             </a:r>
           </a:p>
         </p:txBody>
@@ -9577,7 +9577,7 @@
                 </a:solidFill>
                 <a:latin typeface="Roboto"/>
               </a:rPr>
-              <a:t>22.0%</a:t>
+              <a:t>30.4%</a:t>
             </a:r>
           </a:p>
         </p:txBody>
@@ -9743,7 +9743,7 @@
                 </a:solidFill>
                 <a:latin typeface="Roboto"/>
               </a:rPr>
-              <a:t>27.0%</a:t>
+              <a:t>34.8%</a:t>
             </a:r>
           </a:p>
         </p:txBody>
@@ -9909,7 +9909,7 @@
                 </a:solidFill>
                 <a:latin typeface="Roboto"/>
               </a:rPr>
-              <a:t>31.1%</a:t>
+              <a:t>39.0%</a:t>
             </a:r>
           </a:p>
         </p:txBody>
@@ -9979,7 +9979,7 @@
         </p:nvCxnSpPr>
         <p:spPr>
           <a:xfrm>
-            <a:off x="9528067" y="2637983"/>
+            <a:off x="8944716" y="2637983"/>
             <a:ext cx="0" cy="981699"/>
           </a:xfrm>
           <a:prstGeom prst="line">
@@ -10015,7 +10015,7 @@
         </p:nvSpPr>
         <p:spPr>
           <a:xfrm>
-            <a:off x="8430787" y="3619682"/>
+            <a:off x="7847436" y="3619682"/>
             <a:ext cx="2194560" cy="237744"/>
           </a:xfrm>
           <a:prstGeom prst="rect">
@@ -10054,7 +10054,7 @@
         </p:nvCxnSpPr>
         <p:spPr>
           <a:xfrm>
-            <a:off x="8894297" y="2637983"/>
+            <a:off x="9528067" y="2637983"/>
             <a:ext cx="0" cy="981699"/>
           </a:xfrm>
           <a:prstGeom prst="line">
@@ -10090,7 +10090,7 @@
         </p:nvSpPr>
         <p:spPr>
           <a:xfrm>
-            <a:off x="7797017" y="3857426"/>
+            <a:off x="8430787" y="3857426"/>
             <a:ext cx="2194560" cy="237744"/>
           </a:xfrm>
           <a:prstGeom prst="rect">
@@ -10116,7 +10116,7 @@
                 </a:solidFill>
                 <a:latin typeface="Roboto"/>
               </a:rPr>
-              <a:t>Break-even 31.1%</a:t>
+              <a:t>Break-even 39.0%</a:t>
             </a:r>
           </a:p>
         </p:txBody>
@@ -10243,7 +10243,7 @@
                 </a:solidFill>
                 <a:latin typeface="Roboto"/>
               </a:rPr>
-              <a:t>1 of the 1 installation jobs invoiced in October so far made less than the 35.0% job gross margin target. The Morningside house air-con install made a 22.0% job gross margin: 131.5 h of technician time ($8,942) and $2,300 of subcontractors on a $33,000 job. Jobs need 31.1% gross margin just to cover overheads.</a:t>
+              <a:t>1 of the 1 installation jobs invoiced in October so far made less than the 35.0% job gross margin target. The Morningside house air-con install made a 30.4% job gross margin: 131.5 h of technician time ($8,942) and $2,300 of subcontractors on a $37,000 job. Jobs need 39.0% gross margin just to cover overheads.</a:t>
             </a:r>
           </a:p>
         </p:txBody>
@@ -10370,7 +10370,7 @@
                 </a:solidFill>
                 <a:latin typeface="Roboto"/>
               </a:rPr>
-              <a:t>1 installation under the 35.0% target, worth about $4,292 between them on $33,000 of revenue. The biggest gap, Morningside house air-con install: 22.0% gross margin, 13.0 points under the 35.0% target: about $4,292 on $33,000 of revenue in October so far. It's below the 31.1% needed to cover overheads, too.</a:t>
+              <a:t>1 installation under the 35.0% target, worth about $1,692 between them on $37,000 of revenue. The biggest gap, Morningside house air-con install: 30.4% gross margin, 4.6 points under the 35.0% target: about $1,692 on $37,000 of revenue in October so far. It's below the 39.0% needed to cover overheads, too.</a:t>
             </a:r>
           </a:p>
         </p:txBody>
@@ -10448,7 +10448,7 @@
                 </a:solidFill>
                 <a:latin typeface="Roboto"/>
               </a:rPr>
-              <a:t>Data retrieved 2pm, Tue 6 Oct 2026 · Generated 8 Oct 2026, 9:35am · Sample data · Made with Python (python-pptx)</a:t>
+              <a:t>Data retrieved 2pm, Tue 6 Oct 2026 · Generated 9 Oct 2026, 8:41am · Sample data · Made with Python (python-pptx)</a:t>
             </a:r>
           </a:p>
         </p:txBody>
@@ -10794,7 +10794,7 @@
                 </a:solidFill>
                 <a:latin typeface="Roboto"/>
               </a:rPr>
-              <a:t>45.0%</a:t>
+              <a:t>49.6%</a:t>
             </a:r>
           </a:p>
         </p:txBody>
@@ -10960,7 +10960,7 @@
                 </a:solidFill>
                 <a:latin typeface="Roboto"/>
               </a:rPr>
-              <a:t>43.9%</a:t>
+              <a:t>48.3%</a:t>
             </a:r>
           </a:p>
         </p:txBody>
@@ -11126,7 +11126,7 @@
                 </a:solidFill>
                 <a:latin typeface="Roboto"/>
               </a:rPr>
-              <a:t>31.1%</a:t>
+              <a:t>39.0%</a:t>
             </a:r>
           </a:p>
         </p:txBody>
@@ -11292,7 +11292,7 @@
                 </a:solidFill>
                 <a:latin typeface="Roboto"/>
               </a:rPr>
-              <a:t>$2,465</a:t>
+              <a:t>$2,771</a:t>
             </a:r>
           </a:p>
         </p:txBody>
@@ -11331,7 +11331,7 @@
                 </a:solidFill>
                 <a:latin typeface="Roboto"/>
               </a:rPr>
-              <a:t>73.0% of call-out revenue</a:t>
+              <a:t>75.3% of call-out revenue</a:t>
             </a:r>
           </a:p>
         </p:txBody>
@@ -11528,7 +11528,7 @@
         </p:nvCxnSpPr>
         <p:spPr>
           <a:xfrm>
-            <a:off x="7979032" y="2668112"/>
+            <a:off x="7603503" y="2668112"/>
             <a:ext cx="0" cy="1865498"/>
           </a:xfrm>
           <a:prstGeom prst="line">
@@ -11564,7 +11564,7 @@
         </p:nvSpPr>
         <p:spPr>
           <a:xfrm>
-            <a:off x="6881752" y="4533610"/>
+            <a:off x="6506223" y="4533610"/>
             <a:ext cx="2194560" cy="237744"/>
           </a:xfrm>
           <a:prstGeom prst="rect">
@@ -11603,7 +11603,7 @@
         </p:nvCxnSpPr>
         <p:spPr>
           <a:xfrm>
-            <a:off x="7517869" y="2668112"/>
+            <a:off x="8033573" y="2668112"/>
             <a:ext cx="0" cy="1865498"/>
           </a:xfrm>
           <a:prstGeom prst="line">
@@ -11639,7 +11639,7 @@
         </p:nvSpPr>
         <p:spPr>
           <a:xfrm>
-            <a:off x="6420589" y="4771354"/>
+            <a:off x="6936293" y="4771354"/>
             <a:ext cx="2194560" cy="237744"/>
           </a:xfrm>
           <a:prstGeom prst="rect">
@@ -11665,7 +11665,7 @@
                 </a:solidFill>
                 <a:latin typeface="Roboto"/>
               </a:rPr>
-              <a:t>Break-even 31.1%</a:t>
+              <a:t>Break-even 39.0%</a:t>
             </a:r>
           </a:p>
         </p:txBody>
@@ -11792,7 +11792,7 @@
                 </a:solidFill>
                 <a:latin typeface="Roboto"/>
               </a:rPr>
-              <a:t>7 call-outs in October so far billed $2,465 of technician time and $910 of materials ($700 at cost plus 30%), and made a 45.0% job gross margin between them. Gross margins run from 41.0% to 48.1% by length: the hourly rate covers technician time comfortably, so the gross margin mostly moves with how much material goes on the van.</a:t>
+              <a:t>7 call-outs in October so far billed $2,771 of technician time and $910 of materials ($700 at cost plus 30%), and made a 49.6% job gross margin between them. Gross margins run from 45.0% to 52.9% by length: the hourly rate covers technician time comfortably, so the gross margin mostly moves with how much material goes on the van.</a:t>
             </a:r>
           </a:p>
         </p:txBody>
@@ -11919,7 +11919,7 @@
                 </a:solidFill>
                 <a:latin typeface="Roboto"/>
               </a:rPr>
-              <a:t>All call-outs: 45.0% gross margin, 10.0 points over the 35.0% target ($338 ahead on $3,375 in October so far).</a:t>
+              <a:t>All call-outs: 49.6% gross margin, 14.6 points over the 35.0% target ($537 ahead on $3,681 in October so far).</a:t>
             </a:r>
           </a:p>
         </p:txBody>
@@ -11997,7 +11997,7 @@
                 </a:solidFill>
                 <a:latin typeface="Roboto"/>
               </a:rPr>
-              <a:t>Data retrieved 2pm, Tue 6 Oct 2026 · Generated 8 Oct 2026, 9:35am · Sample data · Made with Python (python-pptx)</a:t>
+              <a:t>Data retrieved 2pm, Tue 6 Oct 2026 · Generated 9 Oct 2026, 8:41am · Sample data · Made with Python (python-pptx)</a:t>
             </a:r>
           </a:p>
         </p:txBody>
@@ -12312,7 +12312,7 @@
                 </a:solidFill>
                 <a:latin typeface="Roboto"/>
               </a:rPr>
-              <a:t>Data retrieved 2pm, Tue 6 Oct 2026 · Generated 8 Oct 2026, 9:35am · Sample data · Made with Python (python-pptx)</a:t>
+              <a:t>Data retrieved 2pm, Tue 6 Oct 2026 · Generated 9 Oct 2026, 8:41am · Sample data · Made with Python (python-pptx)</a:t>
             </a:r>
           </a:p>
         </p:txBody>

--- a/media/exports/reports/2026-10/job-margins.pptx
+++ b/media/exports/reports/2026-10/job-margins.pptx
@@ -1711,7 +1711,7 @@
           <a:lstStyle/>
           <a:p>
             <a:r>
-              <a:t>Which jobs actually make money?. Sample Electrical &amp; Air Pty Ltd. Period: October 2026 to date. Every job's gross margin: revenue less materials, subcontractors and technician time at $68 an hour (fully loaded: wages and all on-costs). Pick a type of job and every number, chart and note on the page follows it.</a:t>
+              <a:t>Which jobs actually make money?. Sample Electrical &amp; Air Pty Ltd. Period: October 2026 to date. In short: Jobs made a 48.9% gross margin in October so far: maintenance contracts the most (63.9%), installations the least (30.4%). Every job's gross margin: revenue less materials, subcontractors and technician time at $68 an hour (fully loaded: wages and all on-costs). Pick a type of job and every number, chart and note on the page follows it.</a:t>
             </a:r>
           </a:p>
         </p:txBody>
@@ -5426,7 +5426,7 @@
         <p:spPr>
           <a:xfrm>
             <a:off x="457200" y="3703320"/>
-            <a:ext cx="11277295" cy="535940"/>
+            <a:ext cx="11277295" cy="758190"/>
           </a:xfrm>
           <a:prstGeom prst="rect">
             <a:avLst/>
@@ -5451,7 +5451,7 @@
                 </a:solidFill>
                 <a:latin typeface="Roboto"/>
               </a:rPr>
-              <a:t>Period: October 2026 to date. Every job's gross margin: revenue less materials, subcontractors and technician time at $68 an hour (fully loaded: wages and all on-costs). Pick a type of job and every number, chart and note on the page follows it.</a:t>
+              <a:t>Period: October 2026 to date. In short: Jobs made a 48.9% gross margin in October so far: maintenance contracts the most (63.9%), installations the least (30.4%). Every job's gross margin: revenue less materials, subcontractors and technician time at $68 an hour (fully loaded: wages and all on-costs). Pick a type of job and every number, chart and note on the page follows it.</a:t>
             </a:r>
           </a:p>
         </p:txBody>
@@ -5464,7 +5464,7 @@
         </p:nvSpPr>
         <p:spPr>
           <a:xfrm>
-            <a:off x="457200" y="4330700"/>
+            <a:off x="457200" y="4552950"/>
             <a:ext cx="11277295" cy="1097280"/>
           </a:xfrm>
           <a:prstGeom prst="rect">
@@ -5600,7 +5600,7 @@
                 </a:solidFill>
                 <a:latin typeface="Roboto"/>
               </a:rPr>
-              <a:t>Data retrieved 2pm, Tue 6 Oct 2026 · Generated 9 Oct 2026, 8:41am · Sample data · Made with Python (python-pptx)</a:t>
+              <a:t>Data retrieved 2pm, Tue 6 Oct 2026 · Generated 10 Oct 2026, 9:55pm · Sample data · Made with Python (python-pptx)</a:t>
             </a:r>
           </a:p>
         </p:txBody>
@@ -6539,7 +6539,7 @@
                 </a:solidFill>
                 <a:latin typeface="Roboto"/>
               </a:rPr>
-              <a:t>Data retrieved 2pm, Tue 6 Oct 2026 · Generated 9 Oct 2026, 8:41am · Sample data · Made with Python (python-pptx)</a:t>
+              <a:t>Data retrieved 2pm, Tue 6 Oct 2026 · Generated 10 Oct 2026, 9:55pm · Sample data · Made with Python (python-pptx)</a:t>
             </a:r>
           </a:p>
         </p:txBody>
@@ -7756,7 +7756,7 @@
                 </a:solidFill>
                 <a:latin typeface="Roboto"/>
               </a:rPr>
-              <a:t>Data retrieved 2pm, Tue 6 Oct 2026 · Generated 9 Oct 2026, 8:41am · Sample data · Made with Python (python-pptx)</a:t>
+              <a:t>Data retrieved 2pm, Tue 6 Oct 2026 · Generated 10 Oct 2026, 9:55pm · Sample data · Made with Python (python-pptx)</a:t>
             </a:r>
           </a:p>
         </p:txBody>
@@ -8766,7 +8766,7 @@
                 </a:solidFill>
                 <a:latin typeface="Roboto"/>
               </a:rPr>
-              <a:t>Data retrieved 2pm, Tue 6 Oct 2026 · Generated 9 Oct 2026, 8:41am · Sample data · Made with Python (python-pptx)</a:t>
+              <a:t>Data retrieved 2pm, Tue 6 Oct 2026 · Generated 10 Oct 2026, 9:55pm · Sample data · Made with Python (python-pptx)</a:t>
             </a:r>
           </a:p>
         </p:txBody>
@@ -9231,7 +9231,7 @@
                 </a:solidFill>
                 <a:latin typeface="Roboto"/>
               </a:rPr>
-              <a:t>Data retrieved 2pm, Tue 6 Oct 2026 · Generated 9 Oct 2026, 8:41am · Sample data · Made with Python (python-pptx)</a:t>
+              <a:t>Data retrieved 2pm, Tue 6 Oct 2026 · Generated 10 Oct 2026, 9:55pm · Sample data · Made with Python (python-pptx)</a:t>
             </a:r>
           </a:p>
         </p:txBody>
@@ -10448,7 +10448,7 @@
                 </a:solidFill>
                 <a:latin typeface="Roboto"/>
               </a:rPr>
-              <a:t>Data retrieved 2pm, Tue 6 Oct 2026 · Generated 9 Oct 2026, 8:41am · Sample data · Made with Python (python-pptx)</a:t>
+              <a:t>Data retrieved 2pm, Tue 6 Oct 2026 · Generated 10 Oct 2026, 9:55pm · Sample data · Made with Python (python-pptx)</a:t>
             </a:r>
           </a:p>
         </p:txBody>
@@ -11997,7 +11997,7 @@
                 </a:solidFill>
                 <a:latin typeface="Roboto"/>
               </a:rPr>
-              <a:t>Data retrieved 2pm, Tue 6 Oct 2026 · Generated 9 Oct 2026, 8:41am · Sample data · Made with Python (python-pptx)</a:t>
+              <a:t>Data retrieved 2pm, Tue 6 Oct 2026 · Generated 10 Oct 2026, 9:55pm · Sample data · Made with Python (python-pptx)</a:t>
             </a:r>
           </a:p>
         </p:txBody>
@@ -12312,7 +12312,7 @@
                 </a:solidFill>
                 <a:latin typeface="Roboto"/>
               </a:rPr>
-              <a:t>Data retrieved 2pm, Tue 6 Oct 2026 · Generated 9 Oct 2026, 8:41am · Sample data · Made with Python (python-pptx)</a:t>
+              <a:t>Data retrieved 2pm, Tue 6 Oct 2026 · Generated 10 Oct 2026, 9:55pm · Sample data · Made with Python (python-pptx)</a:t>
             </a:r>
           </a:p>
         </p:txBody>
